--- a/Final/Figures/totaltransition.pptx
+++ b/Final/Figures/totaltransition.pptx
@@ -2,13 +2,13 @@
 <file path=ppt/presentation.xml><?xml version="1.0" encoding="utf-8"?>
 <p:presentation xmlns:a="http://schemas.openxmlformats.org/drawingml/2006/main" xmlns:r="http://schemas.openxmlformats.org/officeDocument/2006/relationships" xmlns:p="http://schemas.openxmlformats.org/presentationml/2006/main" saveSubsetFonts="1">
   <p:sldMasterIdLst>
-    <p:sldMasterId id="2147483756" r:id="rId1"/>
+    <p:sldMasterId id="2147483804" r:id="rId1"/>
   </p:sldMasterIdLst>
   <p:sldIdLst>
     <p:sldId id="256" r:id="rId2"/>
     <p:sldId id="257" r:id="rId3"/>
   </p:sldIdLst>
-  <p:sldSz cx="15479713" cy="5040313"/>
+  <p:sldSz cx="9906000" cy="5129213"/>
   <p:notesSz cx="6858000" cy="9144000"/>
   <p:defaultTextStyle>
     <a:defPPr>
@@ -142,15 +142,15 @@
         </p:nvSpPr>
         <p:spPr>
           <a:xfrm>
-            <a:off x="1934964" y="824885"/>
-            <a:ext cx="11609785" cy="1754776"/>
+            <a:off x="1238250" y="839434"/>
+            <a:ext cx="7429500" cy="1785726"/>
           </a:xfrm>
         </p:spPr>
         <p:txBody>
           <a:bodyPr anchor="b"/>
           <a:lstStyle>
             <a:lvl1pPr algn="ctr">
-              <a:defRPr sz="4410"/>
+              <a:defRPr sz="4487"/>
             </a:lvl1pPr>
           </a:lstStyle>
           <a:p>
@@ -174,8 +174,8 @@
         </p:nvSpPr>
         <p:spPr>
           <a:xfrm>
-            <a:off x="1934964" y="2647331"/>
-            <a:ext cx="11609785" cy="1216909"/>
+            <a:off x="1238250" y="2694025"/>
+            <a:ext cx="7429500" cy="1238372"/>
           </a:xfrm>
         </p:spPr>
         <p:txBody>
@@ -183,39 +183,39 @@
           <a:lstStyle>
             <a:lvl1pPr marL="0" indent="0" algn="ctr">
               <a:buNone/>
-              <a:defRPr sz="1764"/>
+              <a:defRPr sz="1795"/>
             </a:lvl1pPr>
-            <a:lvl2pPr marL="336042" indent="0" algn="ctr">
+            <a:lvl2pPr marL="341940" indent="0" algn="ctr">
               <a:buNone/>
-              <a:defRPr sz="1470"/>
+              <a:defRPr sz="1496"/>
             </a:lvl2pPr>
-            <a:lvl3pPr marL="672084" indent="0" algn="ctr">
+            <a:lvl3pPr marL="683880" indent="0" algn="ctr">
               <a:buNone/>
-              <a:defRPr sz="1323"/>
+              <a:defRPr sz="1346"/>
             </a:lvl3pPr>
-            <a:lvl4pPr marL="1008126" indent="0" algn="ctr">
+            <a:lvl4pPr marL="1025820" indent="0" algn="ctr">
               <a:buNone/>
-              <a:defRPr sz="1176"/>
+              <a:defRPr sz="1197"/>
             </a:lvl4pPr>
-            <a:lvl5pPr marL="1344168" indent="0" algn="ctr">
+            <a:lvl5pPr marL="1367760" indent="0" algn="ctr">
               <a:buNone/>
-              <a:defRPr sz="1176"/>
+              <a:defRPr sz="1197"/>
             </a:lvl5pPr>
-            <a:lvl6pPr marL="1680210" indent="0" algn="ctr">
+            <a:lvl6pPr marL="1709699" indent="0" algn="ctr">
               <a:buNone/>
-              <a:defRPr sz="1176"/>
+              <a:defRPr sz="1197"/>
             </a:lvl6pPr>
-            <a:lvl7pPr marL="2016252" indent="0" algn="ctr">
+            <a:lvl7pPr marL="2051639" indent="0" algn="ctr">
               <a:buNone/>
-              <a:defRPr sz="1176"/>
+              <a:defRPr sz="1197"/>
             </a:lvl7pPr>
-            <a:lvl8pPr marL="2352294" indent="0" algn="ctr">
+            <a:lvl8pPr marL="2393579" indent="0" algn="ctr">
               <a:buNone/>
-              <a:defRPr sz="1176"/>
+              <a:defRPr sz="1197"/>
             </a:lvl8pPr>
-            <a:lvl9pPr marL="2688336" indent="0" algn="ctr">
+            <a:lvl9pPr marL="2735519" indent="0" algn="ctr">
               <a:buNone/>
-              <a:defRPr sz="1176"/>
+              <a:defRPr sz="1197"/>
             </a:lvl9pPr>
           </a:lstStyle>
           <a:p>
@@ -244,7 +244,7 @@
           <a:p>
             <a:fld id="{881A6E93-4FD9-4879-A402-30E11AB0882A}" type="datetimeFigureOut">
               <a:rPr lang="zh-TW" altLang="en-US" smtClean="0"/>
-              <a:t>2026/5/6</a:t>
+              <a:t>2026/5/22</a:t>
             </a:fld>
             <a:endParaRPr lang="zh-TW" altLang="en-US"/>
           </a:p>
@@ -295,7 +295,7 @@
     </p:spTree>
     <p:extLst>
       <p:ext uri="{BB962C8B-B14F-4D97-AF65-F5344CB8AC3E}">
-        <p14:creationId xmlns:p14="http://schemas.microsoft.com/office/powerpoint/2010/main" val="2251486548"/>
+        <p14:creationId xmlns:p14="http://schemas.microsoft.com/office/powerpoint/2010/main" val="2142560827"/>
       </p:ext>
     </p:extLst>
   </p:cSld>
@@ -414,7 +414,7 @@
           <a:p>
             <a:fld id="{881A6E93-4FD9-4879-A402-30E11AB0882A}" type="datetimeFigureOut">
               <a:rPr lang="zh-TW" altLang="en-US" smtClean="0"/>
-              <a:t>2026/5/6</a:t>
+              <a:t>2026/5/22</a:t>
             </a:fld>
             <a:endParaRPr lang="zh-TW" altLang="en-US"/>
           </a:p>
@@ -465,7 +465,7 @@
     </p:spTree>
     <p:extLst>
       <p:ext uri="{BB962C8B-B14F-4D97-AF65-F5344CB8AC3E}">
-        <p14:creationId xmlns:p14="http://schemas.microsoft.com/office/powerpoint/2010/main" val="1999469143"/>
+        <p14:creationId xmlns:p14="http://schemas.microsoft.com/office/powerpoint/2010/main" val="530854986"/>
       </p:ext>
     </p:extLst>
   </p:cSld>
@@ -504,8 +504,8 @@
         </p:nvSpPr>
         <p:spPr>
           <a:xfrm>
-            <a:off x="11077670" y="268350"/>
-            <a:ext cx="3337813" cy="4271432"/>
+            <a:off x="7088981" y="273083"/>
+            <a:ext cx="2135981" cy="4346771"/>
           </a:xfrm>
         </p:spPr>
         <p:txBody>
@@ -532,8 +532,8 @@
         </p:nvSpPr>
         <p:spPr>
           <a:xfrm>
-            <a:off x="1064230" y="268350"/>
-            <a:ext cx="9819943" cy="4271432"/>
+            <a:off x="681037" y="273083"/>
+            <a:ext cx="6284119" cy="4346771"/>
           </a:xfrm>
         </p:spPr>
         <p:txBody>
@@ -594,7 +594,7 @@
           <a:p>
             <a:fld id="{881A6E93-4FD9-4879-A402-30E11AB0882A}" type="datetimeFigureOut">
               <a:rPr lang="zh-TW" altLang="en-US" smtClean="0"/>
-              <a:t>2026/5/6</a:t>
+              <a:t>2026/5/22</a:t>
             </a:fld>
             <a:endParaRPr lang="zh-TW" altLang="en-US"/>
           </a:p>
@@ -645,7 +645,7 @@
     </p:spTree>
     <p:extLst>
       <p:ext uri="{BB962C8B-B14F-4D97-AF65-F5344CB8AC3E}">
-        <p14:creationId xmlns:p14="http://schemas.microsoft.com/office/powerpoint/2010/main" val="3930948029"/>
+        <p14:creationId xmlns:p14="http://schemas.microsoft.com/office/powerpoint/2010/main" val="2249823600"/>
       </p:ext>
     </p:extLst>
   </p:cSld>
@@ -764,7 +764,7 @@
           <a:p>
             <a:fld id="{881A6E93-4FD9-4879-A402-30E11AB0882A}" type="datetimeFigureOut">
               <a:rPr lang="zh-TW" altLang="en-US" smtClean="0"/>
-              <a:t>2026/5/6</a:t>
+              <a:t>2026/5/22</a:t>
             </a:fld>
             <a:endParaRPr lang="zh-TW" altLang="en-US"/>
           </a:p>
@@ -815,7 +815,7 @@
     </p:spTree>
     <p:extLst>
       <p:ext uri="{BB962C8B-B14F-4D97-AF65-F5344CB8AC3E}">
-        <p14:creationId xmlns:p14="http://schemas.microsoft.com/office/powerpoint/2010/main" val="2099514148"/>
+        <p14:creationId xmlns:p14="http://schemas.microsoft.com/office/powerpoint/2010/main" val="1815010303"/>
       </p:ext>
     </p:extLst>
   </p:cSld>
@@ -854,15 +854,15 @@
         </p:nvSpPr>
         <p:spPr>
           <a:xfrm>
-            <a:off x="1056168" y="1256579"/>
-            <a:ext cx="13351252" cy="2096630"/>
+            <a:off x="675878" y="1278742"/>
+            <a:ext cx="8543925" cy="2133610"/>
           </a:xfrm>
         </p:spPr>
         <p:txBody>
           <a:bodyPr anchor="b"/>
           <a:lstStyle>
             <a:lvl1pPr>
-              <a:defRPr sz="4410"/>
+              <a:defRPr sz="4487"/>
             </a:lvl1pPr>
           </a:lstStyle>
           <a:p>
@@ -886,8 +886,8 @@
         </p:nvSpPr>
         <p:spPr>
           <a:xfrm>
-            <a:off x="1056168" y="3373044"/>
-            <a:ext cx="13351252" cy="1102568"/>
+            <a:off x="675878" y="3432537"/>
+            <a:ext cx="8543925" cy="1122015"/>
           </a:xfrm>
         </p:spPr>
         <p:txBody>
@@ -895,7 +895,7 @@
           <a:lstStyle>
             <a:lvl1pPr marL="0" indent="0">
               <a:buNone/>
-              <a:defRPr sz="1764">
+              <a:defRPr sz="1795">
                 <a:solidFill>
                   <a:schemeClr val="tx1">
                     <a:tint val="75000"/>
@@ -903,9 +903,9 @@
                 </a:solidFill>
               </a:defRPr>
             </a:lvl1pPr>
-            <a:lvl2pPr marL="336042" indent="0">
+            <a:lvl2pPr marL="341940" indent="0">
               <a:buNone/>
-              <a:defRPr sz="1470">
+              <a:defRPr sz="1496">
                 <a:solidFill>
                   <a:schemeClr val="tx1">
                     <a:tint val="75000"/>
@@ -913,9 +913,9 @@
                 </a:solidFill>
               </a:defRPr>
             </a:lvl2pPr>
-            <a:lvl3pPr marL="672084" indent="0">
+            <a:lvl3pPr marL="683880" indent="0">
               <a:buNone/>
-              <a:defRPr sz="1323">
+              <a:defRPr sz="1346">
                 <a:solidFill>
                   <a:schemeClr val="tx1">
                     <a:tint val="75000"/>
@@ -923,9 +923,9 @@
                 </a:solidFill>
               </a:defRPr>
             </a:lvl3pPr>
-            <a:lvl4pPr marL="1008126" indent="0">
+            <a:lvl4pPr marL="1025820" indent="0">
               <a:buNone/>
-              <a:defRPr sz="1176">
+              <a:defRPr sz="1197">
                 <a:solidFill>
                   <a:schemeClr val="tx1">
                     <a:tint val="75000"/>
@@ -933,9 +933,9 @@
                 </a:solidFill>
               </a:defRPr>
             </a:lvl4pPr>
-            <a:lvl5pPr marL="1344168" indent="0">
+            <a:lvl5pPr marL="1367760" indent="0">
               <a:buNone/>
-              <a:defRPr sz="1176">
+              <a:defRPr sz="1197">
                 <a:solidFill>
                   <a:schemeClr val="tx1">
                     <a:tint val="75000"/>
@@ -943,9 +943,9 @@
                 </a:solidFill>
               </a:defRPr>
             </a:lvl5pPr>
-            <a:lvl6pPr marL="1680210" indent="0">
+            <a:lvl6pPr marL="1709699" indent="0">
               <a:buNone/>
-              <a:defRPr sz="1176">
+              <a:defRPr sz="1197">
                 <a:solidFill>
                   <a:schemeClr val="tx1">
                     <a:tint val="75000"/>
@@ -953,9 +953,9 @@
                 </a:solidFill>
               </a:defRPr>
             </a:lvl6pPr>
-            <a:lvl7pPr marL="2016252" indent="0">
+            <a:lvl7pPr marL="2051639" indent="0">
               <a:buNone/>
-              <a:defRPr sz="1176">
+              <a:defRPr sz="1197">
                 <a:solidFill>
                   <a:schemeClr val="tx1">
                     <a:tint val="75000"/>
@@ -963,9 +963,9 @@
                 </a:solidFill>
               </a:defRPr>
             </a:lvl7pPr>
-            <a:lvl8pPr marL="2352294" indent="0">
+            <a:lvl8pPr marL="2393579" indent="0">
               <a:buNone/>
-              <a:defRPr sz="1176">
+              <a:defRPr sz="1197">
                 <a:solidFill>
                   <a:schemeClr val="tx1">
                     <a:tint val="75000"/>
@@ -973,9 +973,9 @@
                 </a:solidFill>
               </a:defRPr>
             </a:lvl8pPr>
-            <a:lvl9pPr marL="2688336" indent="0">
+            <a:lvl9pPr marL="2735519" indent="0">
               <a:buNone/>
-              <a:defRPr sz="1176">
+              <a:defRPr sz="1197">
                 <a:solidFill>
                   <a:schemeClr val="tx1">
                     <a:tint val="75000"/>
@@ -1010,7 +1010,7 @@
           <a:p>
             <a:fld id="{881A6E93-4FD9-4879-A402-30E11AB0882A}" type="datetimeFigureOut">
               <a:rPr lang="zh-TW" altLang="en-US" smtClean="0"/>
-              <a:t>2026/5/6</a:t>
+              <a:t>2026/5/22</a:t>
             </a:fld>
             <a:endParaRPr lang="zh-TW" altLang="en-US"/>
           </a:p>
@@ -1061,7 +1061,7 @@
     </p:spTree>
     <p:extLst>
       <p:ext uri="{BB962C8B-B14F-4D97-AF65-F5344CB8AC3E}">
-        <p14:creationId xmlns:p14="http://schemas.microsoft.com/office/powerpoint/2010/main" val="117159057"/>
+        <p14:creationId xmlns:p14="http://schemas.microsoft.com/office/powerpoint/2010/main" val="1936387370"/>
       </p:ext>
     </p:extLst>
   </p:cSld>
@@ -1123,8 +1123,8 @@
         </p:nvSpPr>
         <p:spPr>
           <a:xfrm>
-            <a:off x="1064230" y="1341750"/>
-            <a:ext cx="6578878" cy="3198032"/>
+            <a:off x="681038" y="1365415"/>
+            <a:ext cx="4210050" cy="3254439"/>
           </a:xfrm>
         </p:spPr>
         <p:txBody>
@@ -1180,8 +1180,8 @@
         </p:nvSpPr>
         <p:spPr>
           <a:xfrm>
-            <a:off x="7836605" y="1341750"/>
-            <a:ext cx="6578878" cy="3198032"/>
+            <a:off x="5014913" y="1365415"/>
+            <a:ext cx="4210050" cy="3254439"/>
           </a:xfrm>
         </p:spPr>
         <p:txBody>
@@ -1242,7 +1242,7 @@
           <a:p>
             <a:fld id="{881A6E93-4FD9-4879-A402-30E11AB0882A}" type="datetimeFigureOut">
               <a:rPr lang="zh-TW" altLang="en-US" smtClean="0"/>
-              <a:t>2026/5/6</a:t>
+              <a:t>2026/5/22</a:t>
             </a:fld>
             <a:endParaRPr lang="zh-TW" altLang="en-US"/>
           </a:p>
@@ -1293,7 +1293,7 @@
     </p:spTree>
     <p:extLst>
       <p:ext uri="{BB962C8B-B14F-4D97-AF65-F5344CB8AC3E}">
-        <p14:creationId xmlns:p14="http://schemas.microsoft.com/office/powerpoint/2010/main" val="4204560846"/>
+        <p14:creationId xmlns:p14="http://schemas.microsoft.com/office/powerpoint/2010/main" val="3540798525"/>
       </p:ext>
     </p:extLst>
   </p:cSld>
@@ -1332,8 +1332,8 @@
         </p:nvSpPr>
         <p:spPr>
           <a:xfrm>
-            <a:off x="1066247" y="268350"/>
-            <a:ext cx="13351252" cy="974228"/>
+            <a:off x="682328" y="273083"/>
+            <a:ext cx="8543925" cy="991411"/>
           </a:xfrm>
         </p:spPr>
         <p:txBody>
@@ -1360,8 +1360,8 @@
         </p:nvSpPr>
         <p:spPr>
           <a:xfrm>
-            <a:off x="1066247" y="1235577"/>
-            <a:ext cx="6548644" cy="605537"/>
+            <a:off x="682328" y="1257370"/>
+            <a:ext cx="4190702" cy="616218"/>
           </a:xfrm>
         </p:spPr>
         <p:txBody>
@@ -1369,39 +1369,39 @@
           <a:lstStyle>
             <a:lvl1pPr marL="0" indent="0">
               <a:buNone/>
-              <a:defRPr sz="1764" b="1"/>
+              <a:defRPr sz="1795" b="1"/>
             </a:lvl1pPr>
-            <a:lvl2pPr marL="336042" indent="0">
+            <a:lvl2pPr marL="341940" indent="0">
               <a:buNone/>
-              <a:defRPr sz="1470" b="1"/>
+              <a:defRPr sz="1496" b="1"/>
             </a:lvl2pPr>
-            <a:lvl3pPr marL="672084" indent="0">
+            <a:lvl3pPr marL="683880" indent="0">
               <a:buNone/>
-              <a:defRPr sz="1323" b="1"/>
+              <a:defRPr sz="1346" b="1"/>
             </a:lvl3pPr>
-            <a:lvl4pPr marL="1008126" indent="0">
+            <a:lvl4pPr marL="1025820" indent="0">
               <a:buNone/>
-              <a:defRPr sz="1176" b="1"/>
+              <a:defRPr sz="1197" b="1"/>
             </a:lvl4pPr>
-            <a:lvl5pPr marL="1344168" indent="0">
+            <a:lvl5pPr marL="1367760" indent="0">
               <a:buNone/>
-              <a:defRPr sz="1176" b="1"/>
+              <a:defRPr sz="1197" b="1"/>
             </a:lvl5pPr>
-            <a:lvl6pPr marL="1680210" indent="0">
+            <a:lvl6pPr marL="1709699" indent="0">
               <a:buNone/>
-              <a:defRPr sz="1176" b="1"/>
+              <a:defRPr sz="1197" b="1"/>
             </a:lvl6pPr>
-            <a:lvl7pPr marL="2016252" indent="0">
+            <a:lvl7pPr marL="2051639" indent="0">
               <a:buNone/>
-              <a:defRPr sz="1176" b="1"/>
+              <a:defRPr sz="1197" b="1"/>
             </a:lvl7pPr>
-            <a:lvl8pPr marL="2352294" indent="0">
+            <a:lvl8pPr marL="2393579" indent="0">
               <a:buNone/>
-              <a:defRPr sz="1176" b="1"/>
+              <a:defRPr sz="1197" b="1"/>
             </a:lvl8pPr>
-            <a:lvl9pPr marL="2688336" indent="0">
+            <a:lvl9pPr marL="2735519" indent="0">
               <a:buNone/>
-              <a:defRPr sz="1176" b="1"/>
+              <a:defRPr sz="1197" b="1"/>
             </a:lvl9pPr>
           </a:lstStyle>
           <a:p>
@@ -1425,8 +1425,8 @@
         </p:nvSpPr>
         <p:spPr>
           <a:xfrm>
-            <a:off x="1066247" y="1841114"/>
-            <a:ext cx="6548644" cy="2708002"/>
+            <a:off x="682328" y="1873588"/>
+            <a:ext cx="4190702" cy="2755765"/>
           </a:xfrm>
         </p:spPr>
         <p:txBody>
@@ -1482,8 +1482,8 @@
         </p:nvSpPr>
         <p:spPr>
           <a:xfrm>
-            <a:off x="7836605" y="1235577"/>
-            <a:ext cx="6580894" cy="605537"/>
+            <a:off x="5014913" y="1257370"/>
+            <a:ext cx="4211340" cy="616218"/>
           </a:xfrm>
         </p:spPr>
         <p:txBody>
@@ -1491,39 +1491,39 @@
           <a:lstStyle>
             <a:lvl1pPr marL="0" indent="0">
               <a:buNone/>
-              <a:defRPr sz="1764" b="1"/>
+              <a:defRPr sz="1795" b="1"/>
             </a:lvl1pPr>
-            <a:lvl2pPr marL="336042" indent="0">
+            <a:lvl2pPr marL="341940" indent="0">
               <a:buNone/>
-              <a:defRPr sz="1470" b="1"/>
+              <a:defRPr sz="1496" b="1"/>
             </a:lvl2pPr>
-            <a:lvl3pPr marL="672084" indent="0">
+            <a:lvl3pPr marL="683880" indent="0">
               <a:buNone/>
-              <a:defRPr sz="1323" b="1"/>
+              <a:defRPr sz="1346" b="1"/>
             </a:lvl3pPr>
-            <a:lvl4pPr marL="1008126" indent="0">
+            <a:lvl4pPr marL="1025820" indent="0">
               <a:buNone/>
-              <a:defRPr sz="1176" b="1"/>
+              <a:defRPr sz="1197" b="1"/>
             </a:lvl4pPr>
-            <a:lvl5pPr marL="1344168" indent="0">
+            <a:lvl5pPr marL="1367760" indent="0">
               <a:buNone/>
-              <a:defRPr sz="1176" b="1"/>
+              <a:defRPr sz="1197" b="1"/>
             </a:lvl5pPr>
-            <a:lvl6pPr marL="1680210" indent="0">
+            <a:lvl6pPr marL="1709699" indent="0">
               <a:buNone/>
-              <a:defRPr sz="1176" b="1"/>
+              <a:defRPr sz="1197" b="1"/>
             </a:lvl6pPr>
-            <a:lvl7pPr marL="2016252" indent="0">
+            <a:lvl7pPr marL="2051639" indent="0">
               <a:buNone/>
-              <a:defRPr sz="1176" b="1"/>
+              <a:defRPr sz="1197" b="1"/>
             </a:lvl7pPr>
-            <a:lvl8pPr marL="2352294" indent="0">
+            <a:lvl8pPr marL="2393579" indent="0">
               <a:buNone/>
-              <a:defRPr sz="1176" b="1"/>
+              <a:defRPr sz="1197" b="1"/>
             </a:lvl8pPr>
-            <a:lvl9pPr marL="2688336" indent="0">
+            <a:lvl9pPr marL="2735519" indent="0">
               <a:buNone/>
-              <a:defRPr sz="1176" b="1"/>
+              <a:defRPr sz="1197" b="1"/>
             </a:lvl9pPr>
           </a:lstStyle>
           <a:p>
@@ -1547,8 +1547,8 @@
         </p:nvSpPr>
         <p:spPr>
           <a:xfrm>
-            <a:off x="7836605" y="1841114"/>
-            <a:ext cx="6580894" cy="2708002"/>
+            <a:off x="5014913" y="1873588"/>
+            <a:ext cx="4211340" cy="2755765"/>
           </a:xfrm>
         </p:spPr>
         <p:txBody>
@@ -1609,7 +1609,7 @@
           <a:p>
             <a:fld id="{881A6E93-4FD9-4879-A402-30E11AB0882A}" type="datetimeFigureOut">
               <a:rPr lang="zh-TW" altLang="en-US" smtClean="0"/>
-              <a:t>2026/5/6</a:t>
+              <a:t>2026/5/22</a:t>
             </a:fld>
             <a:endParaRPr lang="zh-TW" altLang="en-US"/>
           </a:p>
@@ -1660,7 +1660,7 @@
     </p:spTree>
     <p:extLst>
       <p:ext uri="{BB962C8B-B14F-4D97-AF65-F5344CB8AC3E}">
-        <p14:creationId xmlns:p14="http://schemas.microsoft.com/office/powerpoint/2010/main" val="2043428470"/>
+        <p14:creationId xmlns:p14="http://schemas.microsoft.com/office/powerpoint/2010/main" val="1012424480"/>
       </p:ext>
     </p:extLst>
   </p:cSld>
@@ -1727,7 +1727,7 @@
           <a:p>
             <a:fld id="{881A6E93-4FD9-4879-A402-30E11AB0882A}" type="datetimeFigureOut">
               <a:rPr lang="zh-TW" altLang="en-US" smtClean="0"/>
-              <a:t>2026/5/6</a:t>
+              <a:t>2026/5/22</a:t>
             </a:fld>
             <a:endParaRPr lang="zh-TW" altLang="en-US"/>
           </a:p>
@@ -1778,7 +1778,7 @@
     </p:spTree>
     <p:extLst>
       <p:ext uri="{BB962C8B-B14F-4D97-AF65-F5344CB8AC3E}">
-        <p14:creationId xmlns:p14="http://schemas.microsoft.com/office/powerpoint/2010/main" val="2515835298"/>
+        <p14:creationId xmlns:p14="http://schemas.microsoft.com/office/powerpoint/2010/main" val="3756527664"/>
       </p:ext>
     </p:extLst>
   </p:cSld>
@@ -1822,7 +1822,7 @@
           <a:p>
             <a:fld id="{881A6E93-4FD9-4879-A402-30E11AB0882A}" type="datetimeFigureOut">
               <a:rPr lang="zh-TW" altLang="en-US" smtClean="0"/>
-              <a:t>2026/5/6</a:t>
+              <a:t>2026/5/22</a:t>
             </a:fld>
             <a:endParaRPr lang="zh-TW" altLang="en-US"/>
           </a:p>
@@ -1873,7 +1873,7 @@
     </p:spTree>
     <p:extLst>
       <p:ext uri="{BB962C8B-B14F-4D97-AF65-F5344CB8AC3E}">
-        <p14:creationId xmlns:p14="http://schemas.microsoft.com/office/powerpoint/2010/main" val="3790492329"/>
+        <p14:creationId xmlns:p14="http://schemas.microsoft.com/office/powerpoint/2010/main" val="3780047753"/>
       </p:ext>
     </p:extLst>
   </p:cSld>
@@ -1912,15 +1912,15 @@
         </p:nvSpPr>
         <p:spPr>
           <a:xfrm>
-            <a:off x="1066247" y="336021"/>
-            <a:ext cx="4992610" cy="1176073"/>
+            <a:off x="682328" y="341948"/>
+            <a:ext cx="3194943" cy="1196816"/>
           </a:xfrm>
         </p:spPr>
         <p:txBody>
           <a:bodyPr anchor="b"/>
           <a:lstStyle>
             <a:lvl1pPr>
-              <a:defRPr sz="2352"/>
+              <a:defRPr sz="2393"/>
             </a:lvl1pPr>
           </a:lstStyle>
           <a:p>
@@ -1944,39 +1944,39 @@
         </p:nvSpPr>
         <p:spPr>
           <a:xfrm>
-            <a:off x="6580894" y="725712"/>
-            <a:ext cx="7836605" cy="3581889"/>
+            <a:off x="4211340" y="738512"/>
+            <a:ext cx="5014913" cy="3645066"/>
           </a:xfrm>
         </p:spPr>
         <p:txBody>
           <a:bodyPr/>
           <a:lstStyle>
             <a:lvl1pPr>
-              <a:defRPr sz="2352"/>
+              <a:defRPr sz="2393"/>
             </a:lvl1pPr>
             <a:lvl2pPr>
-              <a:defRPr sz="2058"/>
+              <a:defRPr sz="2094"/>
             </a:lvl2pPr>
             <a:lvl3pPr>
-              <a:defRPr sz="1764"/>
+              <a:defRPr sz="1795"/>
             </a:lvl3pPr>
             <a:lvl4pPr>
-              <a:defRPr sz="1470"/>
+              <a:defRPr sz="1496"/>
             </a:lvl4pPr>
             <a:lvl5pPr>
-              <a:defRPr sz="1470"/>
+              <a:defRPr sz="1496"/>
             </a:lvl5pPr>
             <a:lvl6pPr>
-              <a:defRPr sz="1470"/>
+              <a:defRPr sz="1496"/>
             </a:lvl6pPr>
             <a:lvl7pPr>
-              <a:defRPr sz="1470"/>
+              <a:defRPr sz="1496"/>
             </a:lvl7pPr>
             <a:lvl8pPr>
-              <a:defRPr sz="1470"/>
+              <a:defRPr sz="1496"/>
             </a:lvl8pPr>
             <a:lvl9pPr>
-              <a:defRPr sz="1470"/>
+              <a:defRPr sz="1496"/>
             </a:lvl9pPr>
           </a:lstStyle>
           <a:p>
@@ -2029,8 +2029,8 @@
         </p:nvSpPr>
         <p:spPr>
           <a:xfrm>
-            <a:off x="1066247" y="1512094"/>
-            <a:ext cx="4992610" cy="2801341"/>
+            <a:off x="682328" y="1538764"/>
+            <a:ext cx="3194943" cy="2850750"/>
           </a:xfrm>
         </p:spPr>
         <p:txBody>
@@ -2038,39 +2038,39 @@
           <a:lstStyle>
             <a:lvl1pPr marL="0" indent="0">
               <a:buNone/>
-              <a:defRPr sz="1176"/>
+              <a:defRPr sz="1197"/>
             </a:lvl1pPr>
-            <a:lvl2pPr marL="336042" indent="0">
+            <a:lvl2pPr marL="341940" indent="0">
               <a:buNone/>
-              <a:defRPr sz="1029"/>
+              <a:defRPr sz="1047"/>
             </a:lvl2pPr>
-            <a:lvl3pPr marL="672084" indent="0">
+            <a:lvl3pPr marL="683880" indent="0">
               <a:buNone/>
-              <a:defRPr sz="882"/>
+              <a:defRPr sz="897"/>
             </a:lvl3pPr>
-            <a:lvl4pPr marL="1008126" indent="0">
+            <a:lvl4pPr marL="1025820" indent="0">
               <a:buNone/>
-              <a:defRPr sz="735"/>
+              <a:defRPr sz="748"/>
             </a:lvl4pPr>
-            <a:lvl5pPr marL="1344168" indent="0">
+            <a:lvl5pPr marL="1367760" indent="0">
               <a:buNone/>
-              <a:defRPr sz="735"/>
+              <a:defRPr sz="748"/>
             </a:lvl5pPr>
-            <a:lvl6pPr marL="1680210" indent="0">
+            <a:lvl6pPr marL="1709699" indent="0">
               <a:buNone/>
-              <a:defRPr sz="735"/>
+              <a:defRPr sz="748"/>
             </a:lvl6pPr>
-            <a:lvl7pPr marL="2016252" indent="0">
+            <a:lvl7pPr marL="2051639" indent="0">
               <a:buNone/>
-              <a:defRPr sz="735"/>
+              <a:defRPr sz="748"/>
             </a:lvl7pPr>
-            <a:lvl8pPr marL="2352294" indent="0">
+            <a:lvl8pPr marL="2393579" indent="0">
               <a:buNone/>
-              <a:defRPr sz="735"/>
+              <a:defRPr sz="748"/>
             </a:lvl8pPr>
-            <a:lvl9pPr marL="2688336" indent="0">
+            <a:lvl9pPr marL="2735519" indent="0">
               <a:buNone/>
-              <a:defRPr sz="735"/>
+              <a:defRPr sz="748"/>
             </a:lvl9pPr>
           </a:lstStyle>
           <a:p>
@@ -2099,7 +2099,7 @@
           <a:p>
             <a:fld id="{881A6E93-4FD9-4879-A402-30E11AB0882A}" type="datetimeFigureOut">
               <a:rPr lang="zh-TW" altLang="en-US" smtClean="0"/>
-              <a:t>2026/5/6</a:t>
+              <a:t>2026/5/22</a:t>
             </a:fld>
             <a:endParaRPr lang="zh-TW" altLang="en-US"/>
           </a:p>
@@ -2150,7 +2150,7 @@
     </p:spTree>
     <p:extLst>
       <p:ext uri="{BB962C8B-B14F-4D97-AF65-F5344CB8AC3E}">
-        <p14:creationId xmlns:p14="http://schemas.microsoft.com/office/powerpoint/2010/main" val="927158318"/>
+        <p14:creationId xmlns:p14="http://schemas.microsoft.com/office/powerpoint/2010/main" val="4215515146"/>
       </p:ext>
     </p:extLst>
   </p:cSld>
@@ -2189,15 +2189,15 @@
         </p:nvSpPr>
         <p:spPr>
           <a:xfrm>
-            <a:off x="1066247" y="336021"/>
-            <a:ext cx="4992610" cy="1176073"/>
+            <a:off x="682328" y="341948"/>
+            <a:ext cx="3194943" cy="1196816"/>
           </a:xfrm>
         </p:spPr>
         <p:txBody>
           <a:bodyPr anchor="b"/>
           <a:lstStyle>
             <a:lvl1pPr>
-              <a:defRPr sz="2352"/>
+              <a:defRPr sz="2393"/>
             </a:lvl1pPr>
           </a:lstStyle>
           <a:p>
@@ -2221,8 +2221,8 @@
         </p:nvSpPr>
         <p:spPr>
           <a:xfrm>
-            <a:off x="6580894" y="725712"/>
-            <a:ext cx="7836605" cy="3581889"/>
+            <a:off x="4211340" y="738512"/>
+            <a:ext cx="5014913" cy="3645066"/>
           </a:xfrm>
         </p:spPr>
         <p:txBody>
@@ -2230,39 +2230,39 @@
           <a:lstStyle>
             <a:lvl1pPr marL="0" indent="0">
               <a:buNone/>
-              <a:defRPr sz="2352"/>
+              <a:defRPr sz="2393"/>
             </a:lvl1pPr>
-            <a:lvl2pPr marL="336042" indent="0">
+            <a:lvl2pPr marL="341940" indent="0">
               <a:buNone/>
-              <a:defRPr sz="2058"/>
+              <a:defRPr sz="2094"/>
             </a:lvl2pPr>
-            <a:lvl3pPr marL="672084" indent="0">
+            <a:lvl3pPr marL="683880" indent="0">
               <a:buNone/>
-              <a:defRPr sz="1764"/>
+              <a:defRPr sz="1795"/>
             </a:lvl3pPr>
-            <a:lvl4pPr marL="1008126" indent="0">
+            <a:lvl4pPr marL="1025820" indent="0">
               <a:buNone/>
-              <a:defRPr sz="1470"/>
+              <a:defRPr sz="1496"/>
             </a:lvl4pPr>
-            <a:lvl5pPr marL="1344168" indent="0">
+            <a:lvl5pPr marL="1367760" indent="0">
               <a:buNone/>
-              <a:defRPr sz="1470"/>
+              <a:defRPr sz="1496"/>
             </a:lvl5pPr>
-            <a:lvl6pPr marL="1680210" indent="0">
+            <a:lvl6pPr marL="1709699" indent="0">
               <a:buNone/>
-              <a:defRPr sz="1470"/>
+              <a:defRPr sz="1496"/>
             </a:lvl6pPr>
-            <a:lvl7pPr marL="2016252" indent="0">
+            <a:lvl7pPr marL="2051639" indent="0">
               <a:buNone/>
-              <a:defRPr sz="1470"/>
+              <a:defRPr sz="1496"/>
             </a:lvl7pPr>
-            <a:lvl8pPr marL="2352294" indent="0">
+            <a:lvl8pPr marL="2393579" indent="0">
               <a:buNone/>
-              <a:defRPr sz="1470"/>
+              <a:defRPr sz="1496"/>
             </a:lvl8pPr>
-            <a:lvl9pPr marL="2688336" indent="0">
+            <a:lvl9pPr marL="2735519" indent="0">
               <a:buNone/>
-              <a:defRPr sz="1470"/>
+              <a:defRPr sz="1496"/>
             </a:lvl9pPr>
           </a:lstStyle>
           <a:p>
@@ -2286,8 +2286,8 @@
         </p:nvSpPr>
         <p:spPr>
           <a:xfrm>
-            <a:off x="1066247" y="1512094"/>
-            <a:ext cx="4992610" cy="2801341"/>
+            <a:off x="682328" y="1538764"/>
+            <a:ext cx="3194943" cy="2850750"/>
           </a:xfrm>
         </p:spPr>
         <p:txBody>
@@ -2295,39 +2295,39 @@
           <a:lstStyle>
             <a:lvl1pPr marL="0" indent="0">
               <a:buNone/>
-              <a:defRPr sz="1176"/>
+              <a:defRPr sz="1197"/>
             </a:lvl1pPr>
-            <a:lvl2pPr marL="336042" indent="0">
+            <a:lvl2pPr marL="341940" indent="0">
               <a:buNone/>
-              <a:defRPr sz="1029"/>
+              <a:defRPr sz="1047"/>
             </a:lvl2pPr>
-            <a:lvl3pPr marL="672084" indent="0">
+            <a:lvl3pPr marL="683880" indent="0">
               <a:buNone/>
-              <a:defRPr sz="882"/>
+              <a:defRPr sz="897"/>
             </a:lvl3pPr>
-            <a:lvl4pPr marL="1008126" indent="0">
+            <a:lvl4pPr marL="1025820" indent="0">
               <a:buNone/>
-              <a:defRPr sz="735"/>
+              <a:defRPr sz="748"/>
             </a:lvl4pPr>
-            <a:lvl5pPr marL="1344168" indent="0">
+            <a:lvl5pPr marL="1367760" indent="0">
               <a:buNone/>
-              <a:defRPr sz="735"/>
+              <a:defRPr sz="748"/>
             </a:lvl5pPr>
-            <a:lvl6pPr marL="1680210" indent="0">
+            <a:lvl6pPr marL="1709699" indent="0">
               <a:buNone/>
-              <a:defRPr sz="735"/>
+              <a:defRPr sz="748"/>
             </a:lvl6pPr>
-            <a:lvl7pPr marL="2016252" indent="0">
+            <a:lvl7pPr marL="2051639" indent="0">
               <a:buNone/>
-              <a:defRPr sz="735"/>
+              <a:defRPr sz="748"/>
             </a:lvl7pPr>
-            <a:lvl8pPr marL="2352294" indent="0">
+            <a:lvl8pPr marL="2393579" indent="0">
               <a:buNone/>
-              <a:defRPr sz="735"/>
+              <a:defRPr sz="748"/>
             </a:lvl8pPr>
-            <a:lvl9pPr marL="2688336" indent="0">
+            <a:lvl9pPr marL="2735519" indent="0">
               <a:buNone/>
-              <a:defRPr sz="735"/>
+              <a:defRPr sz="748"/>
             </a:lvl9pPr>
           </a:lstStyle>
           <a:p>
@@ -2356,7 +2356,7 @@
           <a:p>
             <a:fld id="{881A6E93-4FD9-4879-A402-30E11AB0882A}" type="datetimeFigureOut">
               <a:rPr lang="zh-TW" altLang="en-US" smtClean="0"/>
-              <a:t>2026/5/6</a:t>
+              <a:t>2026/5/22</a:t>
             </a:fld>
             <a:endParaRPr lang="zh-TW" altLang="en-US"/>
           </a:p>
@@ -2407,7 +2407,7 @@
     </p:spTree>
     <p:extLst>
       <p:ext uri="{BB962C8B-B14F-4D97-AF65-F5344CB8AC3E}">
-        <p14:creationId xmlns:p14="http://schemas.microsoft.com/office/powerpoint/2010/main" val="2189444579"/>
+        <p14:creationId xmlns:p14="http://schemas.microsoft.com/office/powerpoint/2010/main" val="1375903468"/>
       </p:ext>
     </p:extLst>
   </p:cSld>
@@ -2451,8 +2451,8 @@
         </p:nvSpPr>
         <p:spPr>
           <a:xfrm>
-            <a:off x="1064231" y="268350"/>
-            <a:ext cx="13351252" cy="974228"/>
+            <a:off x="681038" y="273083"/>
+            <a:ext cx="8543925" cy="991411"/>
           </a:xfrm>
           <a:prstGeom prst="rect">
             <a:avLst/>
@@ -2484,8 +2484,8 @@
         </p:nvSpPr>
         <p:spPr>
           <a:xfrm>
-            <a:off x="1064231" y="1341750"/>
-            <a:ext cx="13351252" cy="3198032"/>
+            <a:off x="681038" y="1365415"/>
+            <a:ext cx="8543925" cy="3254439"/>
           </a:xfrm>
           <a:prstGeom prst="rect">
             <a:avLst/>
@@ -2546,8 +2546,8 @@
         </p:nvSpPr>
         <p:spPr>
           <a:xfrm>
-            <a:off x="1064230" y="4671624"/>
-            <a:ext cx="3482935" cy="268350"/>
+            <a:off x="681038" y="4754021"/>
+            <a:ext cx="2228850" cy="273083"/>
           </a:xfrm>
           <a:prstGeom prst="rect">
             <a:avLst/>
@@ -2557,7 +2557,7 @@
           <a:bodyPr vert="horz" lIns="91440" tIns="45720" rIns="91440" bIns="45720" rtlCol="0" anchor="ctr"/>
           <a:lstStyle>
             <a:lvl1pPr algn="l">
-              <a:defRPr sz="882">
+              <a:defRPr sz="897">
                 <a:solidFill>
                   <a:schemeClr val="tx1">
                     <a:tint val="75000"/>
@@ -2569,7 +2569,7 @@
           <a:p>
             <a:fld id="{881A6E93-4FD9-4879-A402-30E11AB0882A}" type="datetimeFigureOut">
               <a:rPr lang="zh-TW" altLang="en-US" smtClean="0"/>
-              <a:t>2026/5/6</a:t>
+              <a:t>2026/5/22</a:t>
             </a:fld>
             <a:endParaRPr lang="zh-TW" altLang="en-US"/>
           </a:p>
@@ -2587,8 +2587,8 @@
         </p:nvSpPr>
         <p:spPr>
           <a:xfrm>
-            <a:off x="5127655" y="4671624"/>
-            <a:ext cx="5224403" cy="268350"/>
+            <a:off x="3281363" y="4754021"/>
+            <a:ext cx="3343275" cy="273083"/>
           </a:xfrm>
           <a:prstGeom prst="rect">
             <a:avLst/>
@@ -2598,7 +2598,7 @@
           <a:bodyPr vert="horz" lIns="91440" tIns="45720" rIns="91440" bIns="45720" rtlCol="0" anchor="ctr"/>
           <a:lstStyle>
             <a:lvl1pPr algn="ctr">
-              <a:defRPr sz="882">
+              <a:defRPr sz="897">
                 <a:solidFill>
                   <a:schemeClr val="tx1">
                     <a:tint val="75000"/>
@@ -2624,8 +2624,8 @@
         </p:nvSpPr>
         <p:spPr>
           <a:xfrm>
-            <a:off x="10932548" y="4671624"/>
-            <a:ext cx="3482935" cy="268350"/>
+            <a:off x="6996113" y="4754021"/>
+            <a:ext cx="2228850" cy="273083"/>
           </a:xfrm>
           <a:prstGeom prst="rect">
             <a:avLst/>
@@ -2635,7 +2635,7 @@
           <a:bodyPr vert="horz" lIns="91440" tIns="45720" rIns="91440" bIns="45720" rtlCol="0" anchor="ctr"/>
           <a:lstStyle>
             <a:lvl1pPr algn="r">
-              <a:defRPr sz="882">
+              <a:defRPr sz="897">
                 <a:solidFill>
                   <a:schemeClr val="tx1">
                     <a:tint val="75000"/>
@@ -2656,27 +2656,27 @@
     </p:spTree>
     <p:extLst>
       <p:ext uri="{BB962C8B-B14F-4D97-AF65-F5344CB8AC3E}">
-        <p14:creationId xmlns:p14="http://schemas.microsoft.com/office/powerpoint/2010/main" val="3231878802"/>
+        <p14:creationId xmlns:p14="http://schemas.microsoft.com/office/powerpoint/2010/main" val="1422321057"/>
       </p:ext>
     </p:extLst>
   </p:cSld>
   <p:clrMap bg1="lt1" tx1="dk1" bg2="lt2" tx2="dk2" accent1="accent1" accent2="accent2" accent3="accent3" accent4="accent4" accent5="accent5" accent6="accent6" hlink="hlink" folHlink="folHlink"/>
   <p:sldLayoutIdLst>
-    <p:sldLayoutId id="2147483757" r:id="rId1"/>
-    <p:sldLayoutId id="2147483758" r:id="rId2"/>
-    <p:sldLayoutId id="2147483759" r:id="rId3"/>
-    <p:sldLayoutId id="2147483760" r:id="rId4"/>
-    <p:sldLayoutId id="2147483761" r:id="rId5"/>
-    <p:sldLayoutId id="2147483762" r:id="rId6"/>
-    <p:sldLayoutId id="2147483763" r:id="rId7"/>
-    <p:sldLayoutId id="2147483764" r:id="rId8"/>
-    <p:sldLayoutId id="2147483765" r:id="rId9"/>
-    <p:sldLayoutId id="2147483766" r:id="rId10"/>
-    <p:sldLayoutId id="2147483767" r:id="rId11"/>
+    <p:sldLayoutId id="2147483805" r:id="rId1"/>
+    <p:sldLayoutId id="2147483806" r:id="rId2"/>
+    <p:sldLayoutId id="2147483807" r:id="rId3"/>
+    <p:sldLayoutId id="2147483808" r:id="rId4"/>
+    <p:sldLayoutId id="2147483809" r:id="rId5"/>
+    <p:sldLayoutId id="2147483810" r:id="rId6"/>
+    <p:sldLayoutId id="2147483811" r:id="rId7"/>
+    <p:sldLayoutId id="2147483812" r:id="rId8"/>
+    <p:sldLayoutId id="2147483813" r:id="rId9"/>
+    <p:sldLayoutId id="2147483814" r:id="rId10"/>
+    <p:sldLayoutId id="2147483815" r:id="rId11"/>
   </p:sldLayoutIdLst>
   <p:txStyles>
     <p:titleStyle>
-      <a:lvl1pPr algn="l" defTabSz="672084" rtl="0" eaLnBrk="1" latinLnBrk="0" hangingPunct="1">
+      <a:lvl1pPr algn="l" defTabSz="683880" rtl="0" eaLnBrk="1" latinLnBrk="0" hangingPunct="1">
         <a:lnSpc>
           <a:spcPct val="90000"/>
         </a:lnSpc>
@@ -2684,7 +2684,7 @@
           <a:spcPct val="0"/>
         </a:spcBef>
         <a:buNone/>
-        <a:defRPr sz="3234" kern="1200">
+        <a:defRPr sz="3291" kern="1200">
           <a:solidFill>
             <a:schemeClr val="tx1"/>
           </a:solidFill>
@@ -2695,16 +2695,16 @@
       </a:lvl1pPr>
     </p:titleStyle>
     <p:bodyStyle>
-      <a:lvl1pPr marL="168021" indent="-168021" algn="l" defTabSz="672084" rtl="0" eaLnBrk="1" latinLnBrk="0" hangingPunct="1">
+      <a:lvl1pPr marL="170970" indent="-170970" algn="l" defTabSz="683880" rtl="0" eaLnBrk="1" latinLnBrk="0" hangingPunct="1">
         <a:lnSpc>
           <a:spcPct val="90000"/>
         </a:lnSpc>
         <a:spcBef>
-          <a:spcPts val="735"/>
+          <a:spcPts val="748"/>
         </a:spcBef>
         <a:buFont typeface="Arial" panose="020B0604020202020204" pitchFamily="34" charset="0"/>
         <a:buChar char="•"/>
-        <a:defRPr sz="2058" kern="1200">
+        <a:defRPr sz="2094" kern="1200">
           <a:solidFill>
             <a:schemeClr val="tx1"/>
           </a:solidFill>
@@ -2713,16 +2713,16 @@
           <a:cs typeface="+mn-cs"/>
         </a:defRPr>
       </a:lvl1pPr>
-      <a:lvl2pPr marL="504063" indent="-168021" algn="l" defTabSz="672084" rtl="0" eaLnBrk="1" latinLnBrk="0" hangingPunct="1">
+      <a:lvl2pPr marL="512910" indent="-170970" algn="l" defTabSz="683880" rtl="0" eaLnBrk="1" latinLnBrk="0" hangingPunct="1">
         <a:lnSpc>
           <a:spcPct val="90000"/>
         </a:lnSpc>
         <a:spcBef>
-          <a:spcPts val="368"/>
+          <a:spcPts val="374"/>
         </a:spcBef>
         <a:buFont typeface="Arial" panose="020B0604020202020204" pitchFamily="34" charset="0"/>
         <a:buChar char="•"/>
-        <a:defRPr sz="1764" kern="1200">
+        <a:defRPr sz="1795" kern="1200">
           <a:solidFill>
             <a:schemeClr val="tx1"/>
           </a:solidFill>
@@ -2731,16 +2731,16 @@
           <a:cs typeface="+mn-cs"/>
         </a:defRPr>
       </a:lvl2pPr>
-      <a:lvl3pPr marL="840105" indent="-168021" algn="l" defTabSz="672084" rtl="0" eaLnBrk="1" latinLnBrk="0" hangingPunct="1">
+      <a:lvl3pPr marL="854850" indent="-170970" algn="l" defTabSz="683880" rtl="0" eaLnBrk="1" latinLnBrk="0" hangingPunct="1">
         <a:lnSpc>
           <a:spcPct val="90000"/>
         </a:lnSpc>
         <a:spcBef>
-          <a:spcPts val="368"/>
+          <a:spcPts val="374"/>
         </a:spcBef>
         <a:buFont typeface="Arial" panose="020B0604020202020204" pitchFamily="34" charset="0"/>
         <a:buChar char="•"/>
-        <a:defRPr sz="1470" kern="1200">
+        <a:defRPr sz="1496" kern="1200">
           <a:solidFill>
             <a:schemeClr val="tx1"/>
           </a:solidFill>
@@ -2749,16 +2749,16 @@
           <a:cs typeface="+mn-cs"/>
         </a:defRPr>
       </a:lvl3pPr>
-      <a:lvl4pPr marL="1176147" indent="-168021" algn="l" defTabSz="672084" rtl="0" eaLnBrk="1" latinLnBrk="0" hangingPunct="1">
+      <a:lvl4pPr marL="1196790" indent="-170970" algn="l" defTabSz="683880" rtl="0" eaLnBrk="1" latinLnBrk="0" hangingPunct="1">
         <a:lnSpc>
           <a:spcPct val="90000"/>
         </a:lnSpc>
         <a:spcBef>
-          <a:spcPts val="368"/>
+          <a:spcPts val="374"/>
         </a:spcBef>
         <a:buFont typeface="Arial" panose="020B0604020202020204" pitchFamily="34" charset="0"/>
         <a:buChar char="•"/>
-        <a:defRPr sz="1323" kern="1200">
+        <a:defRPr sz="1346" kern="1200">
           <a:solidFill>
             <a:schemeClr val="tx1"/>
           </a:solidFill>
@@ -2767,16 +2767,16 @@
           <a:cs typeface="+mn-cs"/>
         </a:defRPr>
       </a:lvl4pPr>
-      <a:lvl5pPr marL="1512189" indent="-168021" algn="l" defTabSz="672084" rtl="0" eaLnBrk="1" latinLnBrk="0" hangingPunct="1">
+      <a:lvl5pPr marL="1538729" indent="-170970" algn="l" defTabSz="683880" rtl="0" eaLnBrk="1" latinLnBrk="0" hangingPunct="1">
         <a:lnSpc>
           <a:spcPct val="90000"/>
         </a:lnSpc>
         <a:spcBef>
-          <a:spcPts val="368"/>
+          <a:spcPts val="374"/>
         </a:spcBef>
         <a:buFont typeface="Arial" panose="020B0604020202020204" pitchFamily="34" charset="0"/>
         <a:buChar char="•"/>
-        <a:defRPr sz="1323" kern="1200">
+        <a:defRPr sz="1346" kern="1200">
           <a:solidFill>
             <a:schemeClr val="tx1"/>
           </a:solidFill>
@@ -2785,16 +2785,16 @@
           <a:cs typeface="+mn-cs"/>
         </a:defRPr>
       </a:lvl5pPr>
-      <a:lvl6pPr marL="1848231" indent="-168021" algn="l" defTabSz="672084" rtl="0" eaLnBrk="1" latinLnBrk="0" hangingPunct="1">
+      <a:lvl6pPr marL="1880669" indent="-170970" algn="l" defTabSz="683880" rtl="0" eaLnBrk="1" latinLnBrk="0" hangingPunct="1">
         <a:lnSpc>
           <a:spcPct val="90000"/>
         </a:lnSpc>
         <a:spcBef>
-          <a:spcPts val="368"/>
+          <a:spcPts val="374"/>
         </a:spcBef>
         <a:buFont typeface="Arial" panose="020B0604020202020204" pitchFamily="34" charset="0"/>
         <a:buChar char="•"/>
-        <a:defRPr sz="1323" kern="1200">
+        <a:defRPr sz="1346" kern="1200">
           <a:solidFill>
             <a:schemeClr val="tx1"/>
           </a:solidFill>
@@ -2803,16 +2803,16 @@
           <a:cs typeface="+mn-cs"/>
         </a:defRPr>
       </a:lvl6pPr>
-      <a:lvl7pPr marL="2184273" indent="-168021" algn="l" defTabSz="672084" rtl="0" eaLnBrk="1" latinLnBrk="0" hangingPunct="1">
+      <a:lvl7pPr marL="2222609" indent="-170970" algn="l" defTabSz="683880" rtl="0" eaLnBrk="1" latinLnBrk="0" hangingPunct="1">
         <a:lnSpc>
           <a:spcPct val="90000"/>
         </a:lnSpc>
         <a:spcBef>
-          <a:spcPts val="368"/>
+          <a:spcPts val="374"/>
         </a:spcBef>
         <a:buFont typeface="Arial" panose="020B0604020202020204" pitchFamily="34" charset="0"/>
         <a:buChar char="•"/>
-        <a:defRPr sz="1323" kern="1200">
+        <a:defRPr sz="1346" kern="1200">
           <a:solidFill>
             <a:schemeClr val="tx1"/>
           </a:solidFill>
@@ -2821,16 +2821,16 @@
           <a:cs typeface="+mn-cs"/>
         </a:defRPr>
       </a:lvl7pPr>
-      <a:lvl8pPr marL="2520315" indent="-168021" algn="l" defTabSz="672084" rtl="0" eaLnBrk="1" latinLnBrk="0" hangingPunct="1">
+      <a:lvl8pPr marL="2564549" indent="-170970" algn="l" defTabSz="683880" rtl="0" eaLnBrk="1" latinLnBrk="0" hangingPunct="1">
         <a:lnSpc>
           <a:spcPct val="90000"/>
         </a:lnSpc>
         <a:spcBef>
-          <a:spcPts val="368"/>
+          <a:spcPts val="374"/>
         </a:spcBef>
         <a:buFont typeface="Arial" panose="020B0604020202020204" pitchFamily="34" charset="0"/>
         <a:buChar char="•"/>
-        <a:defRPr sz="1323" kern="1200">
+        <a:defRPr sz="1346" kern="1200">
           <a:solidFill>
             <a:schemeClr val="tx1"/>
           </a:solidFill>
@@ -2839,16 +2839,16 @@
           <a:cs typeface="+mn-cs"/>
         </a:defRPr>
       </a:lvl8pPr>
-      <a:lvl9pPr marL="2856357" indent="-168021" algn="l" defTabSz="672084" rtl="0" eaLnBrk="1" latinLnBrk="0" hangingPunct="1">
+      <a:lvl9pPr marL="2906489" indent="-170970" algn="l" defTabSz="683880" rtl="0" eaLnBrk="1" latinLnBrk="0" hangingPunct="1">
         <a:lnSpc>
           <a:spcPct val="90000"/>
         </a:lnSpc>
         <a:spcBef>
-          <a:spcPts val="368"/>
+          <a:spcPts val="374"/>
         </a:spcBef>
         <a:buFont typeface="Arial" panose="020B0604020202020204" pitchFamily="34" charset="0"/>
         <a:buChar char="•"/>
-        <a:defRPr sz="1323" kern="1200">
+        <a:defRPr sz="1346" kern="1200">
           <a:solidFill>
             <a:schemeClr val="tx1"/>
           </a:solidFill>
@@ -2862,8 +2862,8 @@
       <a:defPPr>
         <a:defRPr lang="en-US"/>
       </a:defPPr>
-      <a:lvl1pPr marL="0" algn="l" defTabSz="672084" rtl="0" eaLnBrk="1" latinLnBrk="0" hangingPunct="1">
-        <a:defRPr sz="1323" kern="1200">
+      <a:lvl1pPr marL="0" algn="l" defTabSz="683880" rtl="0" eaLnBrk="1" latinLnBrk="0" hangingPunct="1">
+        <a:defRPr sz="1346" kern="1200">
           <a:solidFill>
             <a:schemeClr val="tx1"/>
           </a:solidFill>
@@ -2872,8 +2872,8 @@
           <a:cs typeface="+mn-cs"/>
         </a:defRPr>
       </a:lvl1pPr>
-      <a:lvl2pPr marL="336042" algn="l" defTabSz="672084" rtl="0" eaLnBrk="1" latinLnBrk="0" hangingPunct="1">
-        <a:defRPr sz="1323" kern="1200">
+      <a:lvl2pPr marL="341940" algn="l" defTabSz="683880" rtl="0" eaLnBrk="1" latinLnBrk="0" hangingPunct="1">
+        <a:defRPr sz="1346" kern="1200">
           <a:solidFill>
             <a:schemeClr val="tx1"/>
           </a:solidFill>
@@ -2882,8 +2882,8 @@
           <a:cs typeface="+mn-cs"/>
         </a:defRPr>
       </a:lvl2pPr>
-      <a:lvl3pPr marL="672084" algn="l" defTabSz="672084" rtl="0" eaLnBrk="1" latinLnBrk="0" hangingPunct="1">
-        <a:defRPr sz="1323" kern="1200">
+      <a:lvl3pPr marL="683880" algn="l" defTabSz="683880" rtl="0" eaLnBrk="1" latinLnBrk="0" hangingPunct="1">
+        <a:defRPr sz="1346" kern="1200">
           <a:solidFill>
             <a:schemeClr val="tx1"/>
           </a:solidFill>
@@ -2892,8 +2892,8 @@
           <a:cs typeface="+mn-cs"/>
         </a:defRPr>
       </a:lvl3pPr>
-      <a:lvl4pPr marL="1008126" algn="l" defTabSz="672084" rtl="0" eaLnBrk="1" latinLnBrk="0" hangingPunct="1">
-        <a:defRPr sz="1323" kern="1200">
+      <a:lvl4pPr marL="1025820" algn="l" defTabSz="683880" rtl="0" eaLnBrk="1" latinLnBrk="0" hangingPunct="1">
+        <a:defRPr sz="1346" kern="1200">
           <a:solidFill>
             <a:schemeClr val="tx1"/>
           </a:solidFill>
@@ -2902,8 +2902,8 @@
           <a:cs typeface="+mn-cs"/>
         </a:defRPr>
       </a:lvl4pPr>
-      <a:lvl5pPr marL="1344168" algn="l" defTabSz="672084" rtl="0" eaLnBrk="1" latinLnBrk="0" hangingPunct="1">
-        <a:defRPr sz="1323" kern="1200">
+      <a:lvl5pPr marL="1367760" algn="l" defTabSz="683880" rtl="0" eaLnBrk="1" latinLnBrk="0" hangingPunct="1">
+        <a:defRPr sz="1346" kern="1200">
           <a:solidFill>
             <a:schemeClr val="tx1"/>
           </a:solidFill>
@@ -2912,8 +2912,8 @@
           <a:cs typeface="+mn-cs"/>
         </a:defRPr>
       </a:lvl5pPr>
-      <a:lvl6pPr marL="1680210" algn="l" defTabSz="672084" rtl="0" eaLnBrk="1" latinLnBrk="0" hangingPunct="1">
-        <a:defRPr sz="1323" kern="1200">
+      <a:lvl6pPr marL="1709699" algn="l" defTabSz="683880" rtl="0" eaLnBrk="1" latinLnBrk="0" hangingPunct="1">
+        <a:defRPr sz="1346" kern="1200">
           <a:solidFill>
             <a:schemeClr val="tx1"/>
           </a:solidFill>
@@ -2922,8 +2922,8 @@
           <a:cs typeface="+mn-cs"/>
         </a:defRPr>
       </a:lvl6pPr>
-      <a:lvl7pPr marL="2016252" algn="l" defTabSz="672084" rtl="0" eaLnBrk="1" latinLnBrk="0" hangingPunct="1">
-        <a:defRPr sz="1323" kern="1200">
+      <a:lvl7pPr marL="2051639" algn="l" defTabSz="683880" rtl="0" eaLnBrk="1" latinLnBrk="0" hangingPunct="1">
+        <a:defRPr sz="1346" kern="1200">
           <a:solidFill>
             <a:schemeClr val="tx1"/>
           </a:solidFill>
@@ -2932,8 +2932,8 @@
           <a:cs typeface="+mn-cs"/>
         </a:defRPr>
       </a:lvl7pPr>
-      <a:lvl8pPr marL="2352294" algn="l" defTabSz="672084" rtl="0" eaLnBrk="1" latinLnBrk="0" hangingPunct="1">
-        <a:defRPr sz="1323" kern="1200">
+      <a:lvl8pPr marL="2393579" algn="l" defTabSz="683880" rtl="0" eaLnBrk="1" latinLnBrk="0" hangingPunct="1">
+        <a:defRPr sz="1346" kern="1200">
           <a:solidFill>
             <a:schemeClr val="tx1"/>
           </a:solidFill>
@@ -2942,8 +2942,8 @@
           <a:cs typeface="+mn-cs"/>
         </a:defRPr>
       </a:lvl8pPr>
-      <a:lvl9pPr marL="2688336" algn="l" defTabSz="672084" rtl="0" eaLnBrk="1" latinLnBrk="0" hangingPunct="1">
-        <a:defRPr sz="1323" kern="1200">
+      <a:lvl9pPr marL="2735519" algn="l" defTabSz="683880" rtl="0" eaLnBrk="1" latinLnBrk="0" hangingPunct="1">
+        <a:defRPr sz="1346" kern="1200">
           <a:solidFill>
             <a:schemeClr val="tx1"/>
           </a:solidFill>
@@ -3011,8 +3011,8 @@
         </p:blipFill>
         <p:spPr>
           <a:xfrm>
-            <a:off x="4847432" y="738558"/>
-            <a:ext cx="9279466" cy="3886362"/>
+            <a:off x="3102052" y="1424513"/>
+            <a:ext cx="5938249" cy="2487017"/>
           </a:xfrm>
           <a:prstGeom prst="rect">
             <a:avLst/>
@@ -3051,8 +3051,8 @@
         </p:blipFill>
         <p:spPr>
           <a:xfrm>
-            <a:off x="5065236" y="489798"/>
-            <a:ext cx="2067080" cy="359715"/>
+            <a:off x="3241419" y="1265310"/>
+            <a:ext cx="1322796" cy="230194"/>
           </a:xfrm>
           <a:prstGeom prst="rect">
             <a:avLst/>
@@ -3091,8 +3091,8 @@
         </p:blipFill>
         <p:spPr>
           <a:xfrm>
-            <a:off x="7359080" y="501983"/>
-            <a:ext cx="2067080" cy="335341"/>
+            <a:off x="4709328" y="1273108"/>
+            <a:ext cx="1322796" cy="214596"/>
           </a:xfrm>
           <a:prstGeom prst="rect">
             <a:avLst/>
@@ -3131,8 +3131,8 @@
         </p:blipFill>
         <p:spPr>
           <a:xfrm>
-            <a:off x="9652924" y="503683"/>
-            <a:ext cx="2067080" cy="331918"/>
+            <a:off x="6177238" y="1274195"/>
+            <a:ext cx="1322796" cy="212406"/>
           </a:xfrm>
           <a:prstGeom prst="rect">
             <a:avLst/>
@@ -3171,8 +3171,8 @@
         </p:blipFill>
         <p:spPr>
           <a:xfrm>
-            <a:off x="11946767" y="494042"/>
-            <a:ext cx="2067080" cy="351223"/>
+            <a:off x="7645147" y="1268026"/>
+            <a:ext cx="1322796" cy="224760"/>
           </a:xfrm>
           <a:prstGeom prst="rect">
             <a:avLst/>
@@ -3193,10 +3193,10 @@
         </p:nvGrpSpPr>
         <p:grpSpPr>
           <a:xfrm>
-            <a:off x="1428747" y="814766"/>
-            <a:ext cx="2919455" cy="3709099"/>
+            <a:off x="914305" y="1473268"/>
+            <a:ext cx="1868260" cy="2406858"/>
             <a:chOff x="-215120" y="1723602"/>
-            <a:chExt cx="2919455" cy="3709100"/>
+            <a:chExt cx="2919455" cy="3761102"/>
           </a:xfrm>
         </p:grpSpPr>
         <p:sp>
@@ -3273,7 +3273,7 @@
             <a:lstStyle/>
             <a:p>
               <a:pPr algn="ctr"/>
-              <a:endParaRPr lang="en-US" dirty="0"/>
+              <a:endParaRPr lang="en-US" sz="1152" dirty="0"/>
             </a:p>
           </p:txBody>
         </p:sp>
@@ -3360,7 +3360,7 @@
             <a:lstStyle/>
             <a:p>
               <a:pPr algn="ctr"/>
-              <a:endParaRPr lang="en-US" dirty="0"/>
+              <a:endParaRPr lang="en-US" sz="1152" dirty="0"/>
             </a:p>
           </p:txBody>
         </p:sp>
@@ -3435,7 +3435,7 @@
             <a:lstStyle/>
             <a:p>
               <a:pPr algn="ctr"/>
-              <a:endParaRPr lang="en-US" dirty="0">
+              <a:endParaRPr lang="en-US" sz="1152" dirty="0">
                 <a:solidFill>
                   <a:schemeClr val="tx1"/>
                 </a:solidFill>
@@ -3459,8 +3459,8 @@
               </p:nvSpPr>
               <p:spPr>
                 <a:xfrm>
-                  <a:off x="562584" y="3478280"/>
-                  <a:ext cx="321504" cy="523220"/>
+                  <a:off x="562585" y="3478281"/>
+                  <a:ext cx="321505" cy="575237"/>
                 </a:xfrm>
                 <a:prstGeom prst="rect">
                   <a:avLst/>
@@ -3481,7 +3481,7 @@
                       </m:oMathParaPr>
                       <m:oMath xmlns:m="http://schemas.openxmlformats.org/officeDocument/2006/math">
                         <m:r>
-                          <a:rPr lang="en-US" sz="2800" i="1">
+                          <a:rPr lang="en-US" sz="1792" i="1">
                             <a:solidFill>
                               <a:schemeClr val="accent6">
                                 <a:lumMod val="60000"/>
@@ -3495,7 +3495,7 @@
                       </m:oMath>
                     </m:oMathPara>
                   </a14:m>
-                  <a:endParaRPr lang="en-US" sz="2800" dirty="0">
+                  <a:endParaRPr lang="en-US" sz="1792" dirty="0">
                     <a:solidFill>
                       <a:schemeClr val="accent6">
                         <a:lumMod val="60000"/>
@@ -3524,8 +3524,8 @@
               </p:nvSpPr>
               <p:spPr>
                 <a:xfrm>
-                  <a:off x="562584" y="3478280"/>
-                  <a:ext cx="321504" cy="523220"/>
+                  <a:off x="562585" y="3478281"/>
+                  <a:ext cx="321505" cy="575237"/>
                 </a:xfrm>
                 <a:prstGeom prst="rect">
                   <a:avLst/>
@@ -3533,7 +3533,7 @@
                 <a:blipFill>
                   <a:blip r:embed="rId4"/>
                   <a:stretch>
-                    <a:fillRect/>
+                    <a:fillRect r="-39394"/>
                   </a:stretch>
                 </a:blipFill>
               </p:spPr>
@@ -3568,8 +3568,8 @@
               </p:nvSpPr>
               <p:spPr>
                 <a:xfrm>
-                  <a:off x="312406" y="3281136"/>
-                  <a:ext cx="321505" cy="523220"/>
+                  <a:off x="312406" y="3281135"/>
+                  <a:ext cx="321505" cy="575237"/>
                 </a:xfrm>
                 <a:prstGeom prst="rect">
                   <a:avLst/>
@@ -3590,7 +3590,7 @@
                       </m:oMathParaPr>
                       <m:oMath xmlns:m="http://schemas.openxmlformats.org/officeDocument/2006/math">
                         <m:r>
-                          <a:rPr lang="en-US" sz="2800" i="1">
+                          <a:rPr lang="en-US" sz="1792" i="1">
                             <a:latin typeface="Cambria Math" panose="02040503050406030204" pitchFamily="18" charset="0"/>
                           </a:rPr>
                           <m:t>𝑥</m:t>
@@ -3598,7 +3598,7 @@
                       </m:oMath>
                     </m:oMathPara>
                   </a14:m>
-                  <a:endParaRPr lang="en-US" sz="2800" dirty="0"/>
+                  <a:endParaRPr lang="en-US" sz="1792" dirty="0"/>
                 </a:p>
               </p:txBody>
             </p:sp>
@@ -3620,8 +3620,8 @@
               </p:nvSpPr>
               <p:spPr>
                 <a:xfrm>
-                  <a:off x="312406" y="3281136"/>
-                  <a:ext cx="321505" cy="523220"/>
+                  <a:off x="312406" y="3281135"/>
+                  <a:ext cx="321505" cy="575237"/>
                 </a:xfrm>
                 <a:prstGeom prst="rect">
                   <a:avLst/>
@@ -3629,7 +3629,7 @@
                 <a:blipFill>
                   <a:blip r:embed="rId5"/>
                   <a:stretch>
-                    <a:fillRect/>
+                    <a:fillRect r="-32353"/>
                   </a:stretch>
                 </a:blipFill>
               </p:spPr>
@@ -3664,8 +3664,8 @@
               </p:nvSpPr>
               <p:spPr>
                 <a:xfrm>
-                  <a:off x="1554423" y="3419870"/>
-                  <a:ext cx="321505" cy="523220"/>
+                  <a:off x="1554424" y="3419870"/>
+                  <a:ext cx="321505" cy="575237"/>
                 </a:xfrm>
                 <a:prstGeom prst="rect">
                   <a:avLst/>
@@ -3686,7 +3686,7 @@
                       </m:oMathParaPr>
                       <m:oMath xmlns:m="http://schemas.openxmlformats.org/officeDocument/2006/math">
                         <m:r>
-                          <a:rPr lang="en-US" sz="2800" i="1">
+                          <a:rPr lang="en-US" sz="1792" i="1">
                             <a:latin typeface="Cambria Math" panose="02040503050406030204" pitchFamily="18" charset="0"/>
                           </a:rPr>
                           <m:t>𝑦</m:t>
@@ -3694,7 +3694,7 @@
                       </m:oMath>
                     </m:oMathPara>
                   </a14:m>
-                  <a:endParaRPr lang="en-US" sz="2800" dirty="0"/>
+                  <a:endParaRPr lang="en-US" sz="1792" dirty="0"/>
                 </a:p>
               </p:txBody>
             </p:sp>
@@ -3716,8 +3716,8 @@
               </p:nvSpPr>
               <p:spPr>
                 <a:xfrm>
-                  <a:off x="1554423" y="3419870"/>
-                  <a:ext cx="321505" cy="523220"/>
+                  <a:off x="1554424" y="3419870"/>
+                  <a:ext cx="321505" cy="575237"/>
                 </a:xfrm>
                 <a:prstGeom prst="rect">
                   <a:avLst/>
@@ -3725,7 +3725,7 @@
                 <a:blipFill>
                   <a:blip r:embed="rId6"/>
                   <a:stretch>
-                    <a:fillRect/>
+                    <a:fillRect r="-48485" b="-6667"/>
                   </a:stretch>
                 </a:blipFill>
               </p:spPr>
@@ -3760,8 +3760,8 @@
               </p:nvSpPr>
               <p:spPr>
                 <a:xfrm>
-                  <a:off x="1072734" y="2351692"/>
-                  <a:ext cx="321505" cy="523220"/>
+                  <a:off x="1072734" y="2351691"/>
+                  <a:ext cx="321505" cy="575237"/>
                 </a:xfrm>
                 <a:prstGeom prst="rect">
                   <a:avLst/>
@@ -3782,7 +3782,7 @@
                       </m:oMathParaPr>
                       <m:oMath xmlns:m="http://schemas.openxmlformats.org/officeDocument/2006/math">
                         <m:r>
-                          <a:rPr lang="en-US" sz="2800" i="1">
+                          <a:rPr lang="en-US" sz="1792" i="1">
                             <a:latin typeface="Cambria Math" panose="02040503050406030204" pitchFamily="18" charset="0"/>
                           </a:rPr>
                           <m:t>𝑧</m:t>
@@ -3790,7 +3790,7 @@
                       </m:oMath>
                     </m:oMathPara>
                   </a14:m>
-                  <a:endParaRPr lang="en-US" sz="2800" dirty="0"/>
+                  <a:endParaRPr lang="en-US" sz="1792" dirty="0"/>
                 </a:p>
               </p:txBody>
             </p:sp>
@@ -3812,8 +3812,8 @@
               </p:nvSpPr>
               <p:spPr>
                 <a:xfrm>
-                  <a:off x="1072734" y="2351692"/>
-                  <a:ext cx="321505" cy="523220"/>
+                  <a:off x="1072734" y="2351691"/>
+                  <a:ext cx="321505" cy="575237"/>
                 </a:xfrm>
                 <a:prstGeom prst="rect">
                   <a:avLst/>
@@ -3821,7 +3821,7 @@
                 <a:blipFill>
                   <a:blip r:embed="rId7"/>
                   <a:stretch>
-                    <a:fillRect/>
+                    <a:fillRect r="-26471"/>
                   </a:stretch>
                 </a:blipFill>
               </p:spPr>
@@ -3890,7 +3890,7 @@
             <a:lstStyle/>
             <a:p>
               <a:pPr algn="ctr"/>
-              <a:endParaRPr lang="en-US" dirty="0"/>
+              <a:endParaRPr lang="en-US" sz="1152" dirty="0"/>
             </a:p>
           </p:txBody>
         </p:sp>
@@ -4020,7 +4020,7 @@
             <a:lstStyle/>
             <a:p>
               <a:pPr algn="ctr"/>
-              <a:endParaRPr lang="en-US" dirty="0">
+              <a:endParaRPr lang="en-US" sz="1152" dirty="0">
                 <a:solidFill>
                   <a:schemeClr val="tx1"/>
                 </a:solidFill>
@@ -4088,8 +4088,8 @@
               </p:nvSpPr>
               <p:spPr>
                 <a:xfrm>
-                  <a:off x="1289599" y="2906416"/>
-                  <a:ext cx="321504" cy="523220"/>
+                  <a:off x="1289600" y="2906416"/>
+                  <a:ext cx="321505" cy="575237"/>
                 </a:xfrm>
                 <a:prstGeom prst="rect">
                   <a:avLst/>
@@ -4110,7 +4110,7 @@
                       </m:oMathParaPr>
                       <m:oMath xmlns:m="http://schemas.openxmlformats.org/officeDocument/2006/math">
                         <m:r>
-                          <a:rPr lang="en-US" sz="2800" i="1">
+                          <a:rPr lang="en-US" sz="1792" i="1">
                             <a:solidFill>
                               <a:schemeClr val="accent1">
                                 <a:lumMod val="40000"/>
@@ -4124,7 +4124,7 @@
                       </m:oMath>
                     </m:oMathPara>
                   </a14:m>
-                  <a:endParaRPr lang="en-US" sz="2800" dirty="0">
+                  <a:endParaRPr lang="en-US" sz="1792" dirty="0">
                     <a:solidFill>
                       <a:schemeClr val="accent1">
                         <a:lumMod val="40000"/>
@@ -4153,8 +4153,8 @@
               </p:nvSpPr>
               <p:spPr>
                 <a:xfrm>
-                  <a:off x="1289599" y="2906416"/>
-                  <a:ext cx="321504" cy="523220"/>
+                  <a:off x="1289600" y="2906416"/>
+                  <a:ext cx="321505" cy="575237"/>
                 </a:xfrm>
                 <a:prstGeom prst="rect">
                   <a:avLst/>
@@ -4162,7 +4162,7 @@
                 <a:blipFill>
                   <a:blip r:embed="rId8"/>
                   <a:stretch>
-                    <a:fillRect/>
+                    <a:fillRect l="-8824" r="-58824" b="-13333"/>
                   </a:stretch>
                 </a:blipFill>
               </p:spPr>
@@ -4332,7 +4332,7 @@
               <p:spPr>
                 <a:xfrm>
                   <a:off x="772701" y="5063370"/>
-                  <a:ext cx="938080" cy="369332"/>
+                  <a:ext cx="938080" cy="421334"/>
                 </a:xfrm>
                 <a:prstGeom prst="rect">
                   <a:avLst/>
@@ -4353,7 +4353,7 @@
                       </m:oMathParaPr>
                       <m:oMath xmlns:m="http://schemas.openxmlformats.org/officeDocument/2006/math">
                         <m:r>
-                          <a:rPr lang="en-US" altLang="zh-TW" i="1">
+                          <a:rPr lang="en-US" altLang="zh-TW" sz="1152" i="1">
                             <a:latin typeface="Cambria Math" panose="02040503050406030204" pitchFamily="18" charset="0"/>
                           </a:rPr>
                           <m:t>|</m:t>
@@ -4363,26 +4363,26 @@
                             <m:begChr m:val=""/>
                             <m:endChr m:val="⟩"/>
                             <m:ctrlPr>
-                              <a:rPr lang="en-US" altLang="zh-TW" i="1">
+                              <a:rPr lang="en-US" altLang="zh-TW" sz="1152" i="1">
                                 <a:latin typeface="Cambria Math" panose="02040503050406030204" pitchFamily="18" charset="0"/>
                               </a:rPr>
                             </m:ctrlPr>
                           </m:dPr>
                           <m:e>
                             <m:r>
-                              <a:rPr lang="en-US" altLang="zh-TW" i="1">
+                              <a:rPr lang="en-US" altLang="zh-TW" sz="1152" i="1">
                                 <a:latin typeface="Cambria Math" panose="02040503050406030204" pitchFamily="18" charset="0"/>
                               </a:rPr>
                               <m:t>−</m:t>
                             </m:r>
                             <m:r>
-                              <a:rPr lang="en-US" altLang="zh-TW" i="1">
+                              <a:rPr lang="en-US" altLang="zh-TW" sz="1152" i="1">
                                 <a:latin typeface="Cambria Math" panose="02040503050406030204" pitchFamily="18" charset="0"/>
                               </a:rPr>
                               <m:t>𝜎</m:t>
                             </m:r>
                             <m:r>
-                              <a:rPr lang="en-US" altLang="zh-TW" i="1">
+                              <a:rPr lang="en-US" altLang="zh-TW" sz="1152" i="1">
                                 <a:latin typeface="Cambria Math" panose="02040503050406030204" pitchFamily="18" charset="0"/>
                               </a:rPr>
                               <m:t>,−ℓ</m:t>
@@ -4392,7 +4392,7 @@
                       </m:oMath>
                     </m:oMathPara>
                   </a14:m>
-                  <a:endParaRPr lang="zh-TW" altLang="en-US" dirty="0"/>
+                  <a:endParaRPr lang="zh-TW" altLang="en-US" sz="1152" dirty="0"/>
                 </a:p>
               </p:txBody>
             </p:sp>
@@ -4415,7 +4415,7 @@
               <p:spPr>
                 <a:xfrm>
                   <a:off x="772701" y="5063370"/>
-                  <a:ext cx="938080" cy="369332"/>
+                  <a:ext cx="938080" cy="421334"/>
                 </a:xfrm>
                 <a:prstGeom prst="rect">
                   <a:avLst/>
@@ -4423,7 +4423,7 @@
                 <a:blipFill>
                   <a:blip r:embed="rId9"/>
                   <a:stretch>
-                    <a:fillRect l="-1948" t="-121667" r="-62987" b="-188333"/>
+                    <a:fillRect t="-95556" r="-69388" b="-148889"/>
                   </a:stretch>
                 </a:blipFill>
               </p:spPr>
@@ -4459,7 +4459,7 @@
               <p:spPr>
                 <a:xfrm>
                   <a:off x="772701" y="1723602"/>
-                  <a:ext cx="938080" cy="369332"/>
+                  <a:ext cx="938080" cy="421334"/>
                 </a:xfrm>
                 <a:prstGeom prst="rect">
                   <a:avLst/>
@@ -4480,7 +4480,7 @@
                       </m:oMathParaPr>
                       <m:oMath xmlns:m="http://schemas.openxmlformats.org/officeDocument/2006/math">
                         <m:r>
-                          <a:rPr lang="en-US" altLang="zh-TW" i="1">
+                          <a:rPr lang="en-US" altLang="zh-TW" sz="1152" i="1">
                             <a:latin typeface="Cambria Math" panose="02040503050406030204" pitchFamily="18" charset="0"/>
                           </a:rPr>
                           <m:t>|</m:t>
@@ -4490,20 +4490,20 @@
                             <m:begChr m:val=""/>
                             <m:endChr m:val="⟩"/>
                             <m:ctrlPr>
-                              <a:rPr lang="en-US" altLang="zh-TW" i="1">
+                              <a:rPr lang="en-US" altLang="zh-TW" sz="1152" i="1">
                                 <a:latin typeface="Cambria Math" panose="02040503050406030204" pitchFamily="18" charset="0"/>
                               </a:rPr>
                             </m:ctrlPr>
                           </m:dPr>
                           <m:e>
                             <m:r>
-                              <a:rPr lang="en-US" altLang="zh-TW" i="1">
+                              <a:rPr lang="en-US" altLang="zh-TW" sz="1152" i="1">
                                 <a:latin typeface="Cambria Math" panose="02040503050406030204" pitchFamily="18" charset="0"/>
                               </a:rPr>
                               <m:t>𝜎</m:t>
                             </m:r>
                             <m:r>
-                              <a:rPr lang="en-US" altLang="zh-TW" i="1">
+                              <a:rPr lang="en-US" altLang="zh-TW" sz="1152" i="1">
                                 <a:latin typeface="Cambria Math" panose="02040503050406030204" pitchFamily="18" charset="0"/>
                               </a:rPr>
                               <m:t>, ℓ</m:t>
@@ -4513,7 +4513,7 @@
                       </m:oMath>
                     </m:oMathPara>
                   </a14:m>
-                  <a:endParaRPr lang="zh-TW" altLang="en-US" dirty="0"/>
+                  <a:endParaRPr lang="zh-TW" altLang="en-US" sz="1152" dirty="0"/>
                 </a:p>
               </p:txBody>
             </p:sp>
@@ -4536,7 +4536,7 @@
               <p:spPr>
                 <a:xfrm>
                   <a:off x="772701" y="1723602"/>
-                  <a:ext cx="938080" cy="369332"/>
+                  <a:ext cx="938080" cy="421334"/>
                 </a:xfrm>
                 <a:prstGeom prst="rect">
                   <a:avLst/>
@@ -4544,7 +4544,7 @@
                 <a:blipFill>
                   <a:blip r:embed="rId10"/>
                   <a:stretch>
-                    <a:fillRect t="-121667" r="-40260" b="-188333"/>
+                    <a:fillRect t="-97727" r="-40816" b="-154545"/>
                   </a:stretch>
                 </a:blipFill>
               </p:spPr>
@@ -4599,7 +4599,7 @@
             </a:fontRef>
           </p:style>
           <p:txBody>
-            <a:bodyPr rot="0" spcFirstLastPara="0" vertOverflow="overflow" horzOverflow="overflow" vert="horz" wrap="square" lIns="91439" tIns="45720" rIns="91439" bIns="45720" numCol="1" spcCol="0" rtlCol="0" fromWordArt="0" anchor="ctr" anchorCtr="0" forceAA="0" compatLnSpc="1">
+            <a:bodyPr rot="0" spcFirstLastPara="0" vertOverflow="overflow" horzOverflow="overflow" vert="horz" wrap="square" lIns="58515" tIns="29258" rIns="58515" bIns="29258" numCol="1" spcCol="0" rtlCol="0" fromWordArt="0" anchor="ctr" anchorCtr="0" forceAA="0" compatLnSpc="1">
               <a:prstTxWarp prst="textNoShape">
                 <a:avLst/>
               </a:prstTxWarp>
@@ -4608,7 +4608,7 @@
             <a:lstStyle/>
             <a:p>
               <a:pPr algn="ctr"/>
-              <a:endParaRPr lang="zh-TW" altLang="en-US"/>
+              <a:endParaRPr lang="zh-TW" altLang="en-US" sz="1152"/>
             </a:p>
           </p:txBody>
         </p:sp>
@@ -4692,7 +4692,7 @@
             <a:p>
               <a:pPr algn="ctr"/>
               <a:r>
-                <a:rPr lang="en-US" dirty="0">
+                <a:rPr lang="en-US" sz="1152" dirty="0">
                   <a:solidFill>
                     <a:schemeClr val="tx1"/>
                   </a:solidFill>
@@ -4784,7 +4784,7 @@
             <a:p>
               <a:pPr algn="ctr"/>
               <a:r>
-                <a:rPr lang="en-US" dirty="0">
+                <a:rPr lang="en-US" sz="1152" dirty="0">
                   <a:solidFill>
                     <a:schemeClr val="tx1"/>
                   </a:solidFill>
@@ -4847,7 +4847,7 @@
             <a:lstStyle/>
             <a:p>
               <a:pPr algn="ctr"/>
-              <a:endParaRPr lang="en-US" dirty="0"/>
+              <a:endParaRPr lang="en-US" sz="1152" dirty="0"/>
             </a:p>
           </p:txBody>
         </p:sp>
@@ -4931,7 +4931,7 @@
             <a:p>
               <a:pPr algn="ctr"/>
               <a:r>
-                <a:rPr lang="en-US" dirty="0">
+                <a:rPr lang="en-US" sz="1152" dirty="0">
                   <a:solidFill>
                     <a:schemeClr val="tx1"/>
                   </a:solidFill>
@@ -4958,8 +4958,8 @@
         </p:nvSpPr>
         <p:spPr>
           <a:xfrm>
-            <a:off x="5095137" y="3247390"/>
-            <a:ext cx="295195" cy="305784"/>
+            <a:off x="3260567" y="3029988"/>
+            <a:ext cx="188905" cy="195682"/>
           </a:xfrm>
           <a:prstGeom prst="ellipse">
             <a:avLst/>
@@ -5024,7 +5024,7 @@
           <a:p>
             <a:pPr algn="ctr"/>
             <a:r>
-              <a:rPr lang="en-US" dirty="0">
+              <a:rPr lang="en-US" sz="1152" dirty="0">
                 <a:solidFill>
                   <a:schemeClr val="tx1"/>
                 </a:solidFill>
@@ -5050,8 +5050,8 @@
         </p:nvSpPr>
         <p:spPr>
           <a:xfrm>
-            <a:off x="5095137" y="851806"/>
-            <a:ext cx="295195" cy="305784"/>
+            <a:off x="3260567" y="1496971"/>
+            <a:ext cx="188905" cy="195682"/>
           </a:xfrm>
           <a:prstGeom prst="ellipse">
             <a:avLst/>
@@ -5116,7 +5116,7 @@
           <a:p>
             <a:pPr algn="ctr"/>
             <a:r>
-              <a:rPr lang="en-US" dirty="0">
+              <a:rPr lang="en-US" sz="1152" dirty="0">
                 <a:solidFill>
                   <a:schemeClr val="tx1"/>
                 </a:solidFill>
@@ -5142,8 +5142,8 @@
         </p:nvSpPr>
         <p:spPr>
           <a:xfrm>
-            <a:off x="5095137" y="2042784"/>
-            <a:ext cx="295195" cy="305784"/>
+            <a:off x="3260567" y="2259119"/>
+            <a:ext cx="188905" cy="195682"/>
           </a:xfrm>
           <a:prstGeom prst="ellipse">
             <a:avLst/>
@@ -5208,7 +5208,7 @@
           <a:p>
             <a:pPr algn="ctr"/>
             <a:r>
-              <a:rPr lang="en-US" dirty="0">
+              <a:rPr lang="en-US" sz="1152" dirty="0">
                 <a:solidFill>
                   <a:schemeClr val="tx1"/>
                 </a:solidFill>
@@ -5236,8 +5236,8 @@
             </p:nvSpPr>
             <p:spPr>
               <a:xfrm rot="16200000">
-                <a:off x="4543580" y="3624372"/>
-                <a:ext cx="538983" cy="369332"/>
+                <a:off x="2907593" y="3254593"/>
+                <a:ext cx="344914" cy="269626"/>
               </a:xfrm>
               <a:prstGeom prst="rect">
                 <a:avLst/>
@@ -5261,13 +5261,13 @@
                         <m:rPr>
                           <m:sty m:val="p"/>
                         </m:rPr>
-                        <a:rPr lang="en-US" altLang="zh-TW">
+                        <a:rPr lang="en-US" altLang="zh-TW" sz="1152">
                           <a:latin typeface="Cambria Math" panose="02040503050406030204" pitchFamily="18" charset="0"/>
                         </a:rPr>
                         <m:t>a</m:t>
                       </m:r>
                       <m:r>
-                        <a:rPr lang="en-US" altLang="zh-TW">
+                        <a:rPr lang="en-US" altLang="zh-TW" sz="1152">
                           <a:latin typeface="Cambria Math" panose="02040503050406030204" pitchFamily="18" charset="0"/>
                         </a:rPr>
                         <m:t>.</m:t>
@@ -5276,13 +5276,13 @@
                         <m:rPr>
                           <m:sty m:val="p"/>
                         </m:rPr>
-                        <a:rPr lang="en-US" altLang="zh-TW">
+                        <a:rPr lang="en-US" altLang="zh-TW" sz="1152">
                           <a:latin typeface="Cambria Math" panose="02040503050406030204" pitchFamily="18" charset="0"/>
                         </a:rPr>
                         <m:t>u</m:t>
                       </m:r>
                       <m:r>
-                        <a:rPr lang="en-US" altLang="zh-TW">
+                        <a:rPr lang="en-US" altLang="zh-TW" sz="1152">
                           <a:latin typeface="Cambria Math" panose="02040503050406030204" pitchFamily="18" charset="0"/>
                         </a:rPr>
                         <m:t>.</m:t>
@@ -5290,7 +5290,7 @@
                     </m:oMath>
                   </m:oMathPara>
                 </a14:m>
-                <a:endParaRPr lang="zh-TW" altLang="en-US" dirty="0"/>
+                <a:endParaRPr lang="zh-TW" altLang="en-US" sz="1152" dirty="0"/>
               </a:p>
             </p:txBody>
           </p:sp>
@@ -5312,8 +5312,8 @@
             </p:nvSpPr>
             <p:spPr>
               <a:xfrm rot="16200000">
-                <a:off x="4543580" y="3624372"/>
-                <a:ext cx="538983" cy="369332"/>
+                <a:off x="2907593" y="3254593"/>
+                <a:ext cx="344914" cy="269626"/>
               </a:xfrm>
               <a:prstGeom prst="rect">
                 <a:avLst/>
@@ -5356,8 +5356,8 @@
             </p:nvSpPr>
             <p:spPr>
               <a:xfrm rot="16200000">
-                <a:off x="4543580" y="1242416"/>
-                <a:ext cx="538983" cy="369332"/>
+                <a:off x="2907593" y="1730298"/>
+                <a:ext cx="344914" cy="269626"/>
               </a:xfrm>
               <a:prstGeom prst="rect">
                 <a:avLst/>
@@ -5381,13 +5381,13 @@
                         <m:rPr>
                           <m:sty m:val="p"/>
                         </m:rPr>
-                        <a:rPr lang="en-US" altLang="zh-TW">
+                        <a:rPr lang="en-US" altLang="zh-TW" sz="1152">
                           <a:latin typeface="Cambria Math" panose="02040503050406030204" pitchFamily="18" charset="0"/>
                         </a:rPr>
                         <m:t>a</m:t>
                       </m:r>
                       <m:r>
-                        <a:rPr lang="en-US" altLang="zh-TW">
+                        <a:rPr lang="en-US" altLang="zh-TW" sz="1152">
                           <a:latin typeface="Cambria Math" panose="02040503050406030204" pitchFamily="18" charset="0"/>
                         </a:rPr>
                         <m:t>.</m:t>
@@ -5396,13 +5396,13 @@
                         <m:rPr>
                           <m:sty m:val="p"/>
                         </m:rPr>
-                        <a:rPr lang="en-US" altLang="zh-TW">
+                        <a:rPr lang="en-US" altLang="zh-TW" sz="1152">
                           <a:latin typeface="Cambria Math" panose="02040503050406030204" pitchFamily="18" charset="0"/>
                         </a:rPr>
                         <m:t>u</m:t>
                       </m:r>
                       <m:r>
-                        <a:rPr lang="en-US" altLang="zh-TW">
+                        <a:rPr lang="en-US" altLang="zh-TW" sz="1152">
                           <a:latin typeface="Cambria Math" panose="02040503050406030204" pitchFamily="18" charset="0"/>
                         </a:rPr>
                         <m:t>.</m:t>
@@ -5410,7 +5410,7 @@
                     </m:oMath>
                   </m:oMathPara>
                 </a14:m>
-                <a:endParaRPr lang="zh-TW" altLang="en-US" dirty="0"/>
+                <a:endParaRPr lang="zh-TW" altLang="en-US" sz="1152" dirty="0"/>
               </a:p>
             </p:txBody>
           </p:sp>
@@ -5432,2808 +5432,8 @@
             </p:nvSpPr>
             <p:spPr>
               <a:xfrm rot="16200000">
-                <a:off x="4543580" y="1242416"/>
-                <a:ext cx="538983" cy="369332"/>
-              </a:xfrm>
-              <a:prstGeom prst="rect">
-                <a:avLst/>
-              </a:prstGeom>
-              <a:blipFill>
-                <a:blip r:embed="rId12"/>
-                <a:stretch>
-                  <a:fillRect/>
-                </a:stretch>
-              </a:blipFill>
-            </p:spPr>
-            <p:txBody>
-              <a:bodyPr/>
-              <a:lstStyle/>
-              <a:p>
-                <a:r>
-                  <a:rPr lang="zh-TW" altLang="en-US">
-                    <a:noFill/>
-                  </a:rPr>
-                  <a:t> </a:t>
-                </a:r>
-              </a:p>
-            </p:txBody>
-          </p:sp>
-        </mc:Fallback>
-      </mc:AlternateContent>
-      <mc:AlternateContent xmlns:mc="http://schemas.openxmlformats.org/markup-compatibility/2006" xmlns:a14="http://schemas.microsoft.com/office/drawing/2010/main">
-        <mc:Choice Requires="a14">
-          <p:sp>
-            <p:nvSpPr>
-              <p:cNvPr id="46" name="文字方塊 45">
-                <a:extLst>
-                  <a:ext uri="{FF2B5EF4-FFF2-40B4-BE49-F238E27FC236}">
-                    <a16:creationId xmlns:a16="http://schemas.microsoft.com/office/drawing/2014/main" id="{BF54E20B-EC11-4C89-898D-1B3A4D60F943}"/>
-                  </a:ext>
-                </a:extLst>
-              </p:cNvPr>
-              <p:cNvSpPr txBox="1"/>
-              <p:nvPr/>
-            </p:nvSpPr>
-            <p:spPr>
-              <a:xfrm rot="16200000">
-                <a:off x="4543580" y="2433394"/>
-                <a:ext cx="538983" cy="369332"/>
-              </a:xfrm>
-              <a:prstGeom prst="rect">
-                <a:avLst/>
-              </a:prstGeom>
-              <a:noFill/>
-            </p:spPr>
-            <p:txBody>
-              <a:bodyPr wrap="square" rtlCol="0">
-                <a:spAutoFit/>
-              </a:bodyPr>
-              <a:lstStyle/>
-              <a:p>
-                <a:pPr/>
-                <a14:m>
-                  <m:oMathPara xmlns:m="http://schemas.openxmlformats.org/officeDocument/2006/math">
-                    <m:oMathParaPr>
-                      <m:jc m:val="centerGroup"/>
-                    </m:oMathParaPr>
-                    <m:oMath xmlns:m="http://schemas.openxmlformats.org/officeDocument/2006/math">
-                      <m:r>
-                        <m:rPr>
-                          <m:sty m:val="p"/>
-                        </m:rPr>
-                        <a:rPr lang="en-US" altLang="zh-TW">
-                          <a:latin typeface="Cambria Math" panose="02040503050406030204" pitchFamily="18" charset="0"/>
-                        </a:rPr>
-                        <m:t>a</m:t>
-                      </m:r>
-                      <m:r>
-                        <a:rPr lang="en-US" altLang="zh-TW">
-                          <a:latin typeface="Cambria Math" panose="02040503050406030204" pitchFamily="18" charset="0"/>
-                        </a:rPr>
-                        <m:t>.</m:t>
-                      </m:r>
-                      <m:r>
-                        <m:rPr>
-                          <m:sty m:val="p"/>
-                        </m:rPr>
-                        <a:rPr lang="en-US" altLang="zh-TW">
-                          <a:latin typeface="Cambria Math" panose="02040503050406030204" pitchFamily="18" charset="0"/>
-                        </a:rPr>
-                        <m:t>u</m:t>
-                      </m:r>
-                      <m:r>
-                        <a:rPr lang="en-US" altLang="zh-TW">
-                          <a:latin typeface="Cambria Math" panose="02040503050406030204" pitchFamily="18" charset="0"/>
-                        </a:rPr>
-                        <m:t>.</m:t>
-                      </m:r>
-                    </m:oMath>
-                  </m:oMathPara>
-                </a14:m>
-                <a:endParaRPr lang="zh-TW" altLang="en-US" dirty="0"/>
-              </a:p>
-            </p:txBody>
-          </p:sp>
-        </mc:Choice>
-        <mc:Fallback xmlns="">
-          <p:sp>
-            <p:nvSpPr>
-              <p:cNvPr id="46" name="文字方塊 45">
-                <a:extLst>
-                  <a:ext uri="{FF2B5EF4-FFF2-40B4-BE49-F238E27FC236}">
-                    <a16:creationId xmlns:a16="http://schemas.microsoft.com/office/drawing/2014/main" id="{BF54E20B-EC11-4C89-898D-1B3A4D60F943}"/>
-                  </a:ext>
-                </a:extLst>
-              </p:cNvPr>
-              <p:cNvSpPr txBox="1">
-                <a:spLocks noRot="1" noChangeAspect="1" noMove="1" noResize="1" noEditPoints="1" noAdjustHandles="1" noChangeArrowheads="1" noChangeShapeType="1" noTextEdit="1"/>
-              </p:cNvSpPr>
-              <p:nvPr/>
-            </p:nvSpPr>
-            <p:spPr>
-              <a:xfrm rot="16200000">
-                <a:off x="4543580" y="2433394"/>
-                <a:ext cx="538983" cy="369332"/>
-              </a:xfrm>
-              <a:prstGeom prst="rect">
-                <a:avLst/>
-              </a:prstGeom>
-              <a:blipFill>
-                <a:blip r:embed="rId13"/>
-                <a:stretch>
-                  <a:fillRect/>
-                </a:stretch>
-              </a:blipFill>
-            </p:spPr>
-            <p:txBody>
-              <a:bodyPr/>
-              <a:lstStyle/>
-              <a:p>
-                <a:r>
-                  <a:rPr lang="zh-TW" altLang="en-US">
-                    <a:noFill/>
-                  </a:rPr>
-                  <a:t> </a:t>
-                </a:r>
-              </a:p>
-            </p:txBody>
-          </p:sp>
-        </mc:Fallback>
-      </mc:AlternateContent>
-      <mc:AlternateContent xmlns:mc="http://schemas.openxmlformats.org/markup-compatibility/2006" xmlns:a14="http://schemas.microsoft.com/office/drawing/2010/main">
-        <mc:Choice Requires="a14">
-          <p:sp>
-            <p:nvSpPr>
-              <p:cNvPr id="47" name="文字方塊 46">
-                <a:extLst>
-                  <a:ext uri="{FF2B5EF4-FFF2-40B4-BE49-F238E27FC236}">
-                    <a16:creationId xmlns:a16="http://schemas.microsoft.com/office/drawing/2014/main" id="{15691A11-45C0-4F72-8C42-876060437EB5}"/>
-                  </a:ext>
-                </a:extLst>
-              </p:cNvPr>
-              <p:cNvSpPr txBox="1"/>
-              <p:nvPr/>
-            </p:nvSpPr>
-            <p:spPr>
-              <a:xfrm>
-                <a:off x="5377459" y="3212884"/>
-                <a:ext cx="778016" cy="369332"/>
-              </a:xfrm>
-              <a:prstGeom prst="rect">
-                <a:avLst/>
-              </a:prstGeom>
-              <a:noFill/>
-            </p:spPr>
-            <p:txBody>
-              <a:bodyPr wrap="square" rtlCol="0">
-                <a:spAutoFit/>
-              </a:bodyPr>
-              <a:lstStyle/>
-              <a:p>
-                <a14:m>
-                  <m:oMath xmlns:m="http://schemas.openxmlformats.org/officeDocument/2006/math">
-                    <m:r>
-                      <a:rPr lang="en-US" altLang="zh-TW" i="1">
-                        <a:latin typeface="Cambria Math" panose="02040503050406030204" pitchFamily="18" charset="0"/>
-                      </a:rPr>
-                      <m:t>𝛼</m:t>
-                    </m:r>
-                    <m:r>
-                      <a:rPr lang="en-US" altLang="zh-TW" i="1">
-                        <a:latin typeface="Cambria Math" panose="02040503050406030204" pitchFamily="18" charset="0"/>
-                      </a:rPr>
-                      <m:t>=</m:t>
-                    </m:r>
-                    <m:r>
-                      <a:rPr lang="en-US" altLang="zh-TW" i="1">
-                        <a:latin typeface="Cambria Math" panose="02040503050406030204" pitchFamily="18" charset="0"/>
-                      </a:rPr>
-                      <m:t>𝜋</m:t>
-                    </m:r>
-                  </m:oMath>
-                </a14:m>
-                <a:r>
-                  <a:rPr lang="zh-TW" altLang="en-US" dirty="0"/>
-                  <a:t> </a:t>
-                </a:r>
-              </a:p>
-            </p:txBody>
-          </p:sp>
-        </mc:Choice>
-        <mc:Fallback xmlns="">
-          <p:sp>
-            <p:nvSpPr>
-              <p:cNvPr id="47" name="文字方塊 46">
-                <a:extLst>
-                  <a:ext uri="{FF2B5EF4-FFF2-40B4-BE49-F238E27FC236}">
-                    <a16:creationId xmlns:a16="http://schemas.microsoft.com/office/drawing/2014/main" id="{15691A11-45C0-4F72-8C42-876060437EB5}"/>
-                  </a:ext>
-                </a:extLst>
-              </p:cNvPr>
-              <p:cNvSpPr txBox="1">
-                <a:spLocks noRot="1" noChangeAspect="1" noMove="1" noResize="1" noEditPoints="1" noAdjustHandles="1" noChangeArrowheads="1" noChangeShapeType="1" noTextEdit="1"/>
-              </p:cNvSpPr>
-              <p:nvPr/>
-            </p:nvSpPr>
-            <p:spPr>
-              <a:xfrm>
-                <a:off x="5377459" y="3212884"/>
-                <a:ext cx="778016" cy="369332"/>
-              </a:xfrm>
-              <a:prstGeom prst="rect">
-                <a:avLst/>
-              </a:prstGeom>
-              <a:blipFill>
-                <a:blip r:embed="rId14"/>
-                <a:stretch>
-                  <a:fillRect/>
-                </a:stretch>
-              </a:blipFill>
-            </p:spPr>
-            <p:txBody>
-              <a:bodyPr/>
-              <a:lstStyle/>
-              <a:p>
-                <a:r>
-                  <a:rPr lang="zh-TW" altLang="en-US">
-                    <a:noFill/>
-                  </a:rPr>
-                  <a:t> </a:t>
-                </a:r>
-              </a:p>
-            </p:txBody>
-          </p:sp>
-        </mc:Fallback>
-      </mc:AlternateContent>
-      <mc:AlternateContent xmlns:mc="http://schemas.openxmlformats.org/markup-compatibility/2006" xmlns:a14="http://schemas.microsoft.com/office/drawing/2010/main">
-        <mc:Choice Requires="a14">
-          <p:sp>
-            <p:nvSpPr>
-              <p:cNvPr id="48" name="文字方塊 47">
-                <a:extLst>
-                  <a:ext uri="{FF2B5EF4-FFF2-40B4-BE49-F238E27FC236}">
-                    <a16:creationId xmlns:a16="http://schemas.microsoft.com/office/drawing/2014/main" id="{7E33DDEF-2F12-42EE-93FB-FD59888A6738}"/>
-                  </a:ext>
-                </a:extLst>
-              </p:cNvPr>
-              <p:cNvSpPr txBox="1"/>
-              <p:nvPr/>
-            </p:nvSpPr>
-            <p:spPr>
-              <a:xfrm>
-                <a:off x="5377459" y="817301"/>
-                <a:ext cx="778016" cy="369332"/>
-              </a:xfrm>
-              <a:prstGeom prst="rect">
-                <a:avLst/>
-              </a:prstGeom>
-              <a:noFill/>
-            </p:spPr>
-            <p:txBody>
-              <a:bodyPr wrap="square" rtlCol="0">
-                <a:spAutoFit/>
-              </a:bodyPr>
-              <a:lstStyle/>
-              <a:p>
-                <a14:m>
-                  <m:oMath xmlns:m="http://schemas.openxmlformats.org/officeDocument/2006/math">
-                    <m:r>
-                      <a:rPr lang="en-US" altLang="zh-TW" i="1">
-                        <a:latin typeface="Cambria Math" panose="02040503050406030204" pitchFamily="18" charset="0"/>
-                      </a:rPr>
-                      <m:t>𝛼</m:t>
-                    </m:r>
-                    <m:r>
-                      <a:rPr lang="en-US" altLang="zh-TW" i="1">
-                        <a:latin typeface="Cambria Math" panose="02040503050406030204" pitchFamily="18" charset="0"/>
-                      </a:rPr>
-                      <m:t>=0</m:t>
-                    </m:r>
-                  </m:oMath>
-                </a14:m>
-                <a:r>
-                  <a:rPr lang="zh-TW" altLang="en-US" dirty="0"/>
-                  <a:t> </a:t>
-                </a:r>
-              </a:p>
-            </p:txBody>
-          </p:sp>
-        </mc:Choice>
-        <mc:Fallback xmlns="">
-          <p:sp>
-            <p:nvSpPr>
-              <p:cNvPr id="48" name="文字方塊 47">
-                <a:extLst>
-                  <a:ext uri="{FF2B5EF4-FFF2-40B4-BE49-F238E27FC236}">
-                    <a16:creationId xmlns:a16="http://schemas.microsoft.com/office/drawing/2014/main" id="{7E33DDEF-2F12-42EE-93FB-FD59888A6738}"/>
-                  </a:ext>
-                </a:extLst>
-              </p:cNvPr>
-              <p:cNvSpPr txBox="1">
-                <a:spLocks noRot="1" noChangeAspect="1" noMove="1" noResize="1" noEditPoints="1" noAdjustHandles="1" noChangeArrowheads="1" noChangeShapeType="1" noTextEdit="1"/>
-              </p:cNvSpPr>
-              <p:nvPr/>
-            </p:nvSpPr>
-            <p:spPr>
-              <a:xfrm>
-                <a:off x="5377459" y="817301"/>
-                <a:ext cx="778016" cy="369332"/>
-              </a:xfrm>
-              <a:prstGeom prst="rect">
-                <a:avLst/>
-              </a:prstGeom>
-              <a:blipFill>
-                <a:blip r:embed="rId15"/>
-                <a:stretch>
-                  <a:fillRect/>
-                </a:stretch>
-              </a:blipFill>
-            </p:spPr>
-            <p:txBody>
-              <a:bodyPr/>
-              <a:lstStyle/>
-              <a:p>
-                <a:r>
-                  <a:rPr lang="zh-TW" altLang="en-US">
-                    <a:noFill/>
-                  </a:rPr>
-                  <a:t> </a:t>
-                </a:r>
-              </a:p>
-            </p:txBody>
-          </p:sp>
-        </mc:Fallback>
-      </mc:AlternateContent>
-      <mc:AlternateContent xmlns:mc="http://schemas.openxmlformats.org/markup-compatibility/2006" xmlns:a14="http://schemas.microsoft.com/office/drawing/2010/main">
-        <mc:Choice Requires="a14">
-          <p:sp>
-            <p:nvSpPr>
-              <p:cNvPr id="49" name="文字方塊 48">
-                <a:extLst>
-                  <a:ext uri="{FF2B5EF4-FFF2-40B4-BE49-F238E27FC236}">
-                    <a16:creationId xmlns:a16="http://schemas.microsoft.com/office/drawing/2014/main" id="{C33442D0-2642-4711-B00F-F6CC385BC9F8}"/>
-                  </a:ext>
-                </a:extLst>
-              </p:cNvPr>
-              <p:cNvSpPr txBox="1"/>
-              <p:nvPr/>
-            </p:nvSpPr>
-            <p:spPr>
-              <a:xfrm>
-                <a:off x="5377467" y="2008278"/>
-                <a:ext cx="1019555" cy="369332"/>
-              </a:xfrm>
-              <a:prstGeom prst="rect">
-                <a:avLst/>
-              </a:prstGeom>
-              <a:noFill/>
-            </p:spPr>
-            <p:txBody>
-              <a:bodyPr wrap="square" rtlCol="0">
-                <a:spAutoFit/>
-              </a:bodyPr>
-              <a:lstStyle/>
-              <a:p>
-                <a14:m>
-                  <m:oMath xmlns:m="http://schemas.openxmlformats.org/officeDocument/2006/math">
-                    <m:r>
-                      <a:rPr lang="en-US" altLang="zh-TW" i="1">
-                        <a:latin typeface="Cambria Math" panose="02040503050406030204" pitchFamily="18" charset="0"/>
-                      </a:rPr>
-                      <m:t>𝛼</m:t>
-                    </m:r>
-                    <m:r>
-                      <a:rPr lang="en-US" altLang="zh-TW" i="1">
-                        <a:latin typeface="Cambria Math" panose="02040503050406030204" pitchFamily="18" charset="0"/>
-                      </a:rPr>
-                      <m:t>=</m:t>
-                    </m:r>
-                    <m:r>
-                      <a:rPr lang="en-US" altLang="zh-TW" i="1">
-                        <a:latin typeface="Cambria Math" panose="02040503050406030204" pitchFamily="18" charset="0"/>
-                      </a:rPr>
-                      <m:t>𝜋</m:t>
-                    </m:r>
-                    <m:r>
-                      <a:rPr lang="en-US" altLang="zh-TW" i="1">
-                        <a:latin typeface="Cambria Math" panose="02040503050406030204" pitchFamily="18" charset="0"/>
-                      </a:rPr>
-                      <m:t>/2</m:t>
-                    </m:r>
-                  </m:oMath>
-                </a14:m>
-                <a:r>
-                  <a:rPr lang="zh-TW" altLang="en-US" dirty="0"/>
-                  <a:t> </a:t>
-                </a:r>
-              </a:p>
-            </p:txBody>
-          </p:sp>
-        </mc:Choice>
-        <mc:Fallback xmlns="">
-          <p:sp>
-            <p:nvSpPr>
-              <p:cNvPr id="49" name="文字方塊 48">
-                <a:extLst>
-                  <a:ext uri="{FF2B5EF4-FFF2-40B4-BE49-F238E27FC236}">
-                    <a16:creationId xmlns:a16="http://schemas.microsoft.com/office/drawing/2014/main" id="{C33442D0-2642-4711-B00F-F6CC385BC9F8}"/>
-                  </a:ext>
-                </a:extLst>
-              </p:cNvPr>
-              <p:cNvSpPr txBox="1">
-                <a:spLocks noRot="1" noChangeAspect="1" noMove="1" noResize="1" noEditPoints="1" noAdjustHandles="1" noChangeArrowheads="1" noChangeShapeType="1" noTextEdit="1"/>
-              </p:cNvSpPr>
-              <p:nvPr/>
-            </p:nvSpPr>
-            <p:spPr>
-              <a:xfrm>
-                <a:off x="5377467" y="2008278"/>
-                <a:ext cx="1019555" cy="369332"/>
-              </a:xfrm>
-              <a:prstGeom prst="rect">
-                <a:avLst/>
-              </a:prstGeom>
-              <a:blipFill>
-                <a:blip r:embed="rId16"/>
-                <a:stretch>
-                  <a:fillRect b="-13115"/>
-                </a:stretch>
-              </a:blipFill>
-            </p:spPr>
-            <p:txBody>
-              <a:bodyPr/>
-              <a:lstStyle/>
-              <a:p>
-                <a:r>
-                  <a:rPr lang="zh-TW" altLang="en-US">
-                    <a:noFill/>
-                  </a:rPr>
-                  <a:t> </a:t>
-                </a:r>
-              </a:p>
-            </p:txBody>
-          </p:sp>
-        </mc:Fallback>
-      </mc:AlternateContent>
-    </p:spTree>
-    <p:extLst>
-      <p:ext uri="{BB962C8B-B14F-4D97-AF65-F5344CB8AC3E}">
-        <p14:creationId xmlns:p14="http://schemas.microsoft.com/office/powerpoint/2010/main" val="3253449683"/>
-      </p:ext>
-    </p:extLst>
-  </p:cSld>
-  <p:clrMapOvr>
-    <a:masterClrMapping/>
-  </p:clrMapOvr>
-</p:sld>
-</file>
-
-<file path=ppt/slides/slide2.xml><?xml version="1.0" encoding="utf-8"?>
-<p:sld xmlns:a="http://schemas.openxmlformats.org/drawingml/2006/main" xmlns:r="http://schemas.openxmlformats.org/officeDocument/2006/relationships" xmlns:p="http://schemas.openxmlformats.org/presentationml/2006/main">
-  <p:cSld>
-    <p:spTree>
-      <p:nvGrpSpPr>
-        <p:cNvPr id="1" name=""/>
-        <p:cNvGrpSpPr/>
-        <p:nvPr/>
-      </p:nvGrpSpPr>
-      <p:grpSpPr>
-        <a:xfrm>
-          <a:off x="0" y="0"/>
-          <a:ext cx="0" cy="0"/>
-          <a:chOff x="0" y="0"/>
-          <a:chExt cx="0" cy="0"/>
-        </a:xfrm>
-      </p:grpSpPr>
-      <p:sp>
-        <p:nvSpPr>
-          <p:cNvPr id="61" name="矩形: 圓角 60">
-            <a:extLst>
-              <a:ext uri="{FF2B5EF4-FFF2-40B4-BE49-F238E27FC236}">
-                <a16:creationId xmlns:a16="http://schemas.microsoft.com/office/drawing/2014/main" id="{244D7CEB-3C44-4825-8D2E-BC6422286AA3}"/>
-              </a:ext>
-            </a:extLst>
-          </p:cNvPr>
-          <p:cNvSpPr/>
-          <p:nvPr/>
-        </p:nvSpPr>
-        <p:spPr>
-          <a:xfrm>
-            <a:off x="18256" y="43656"/>
-            <a:ext cx="15443200" cy="4953000"/>
-          </a:xfrm>
-          <a:prstGeom prst="roundRect">
-            <a:avLst>
-              <a:gd name="adj" fmla="val 7772"/>
-            </a:avLst>
-          </a:prstGeom>
-        </p:spPr>
-        <p:style>
-          <a:lnRef idx="1">
-            <a:schemeClr val="accent3"/>
-          </a:lnRef>
-          <a:fillRef idx="2">
-            <a:schemeClr val="accent3"/>
-          </a:fillRef>
-          <a:effectRef idx="1">
-            <a:schemeClr val="accent3"/>
-          </a:effectRef>
-          <a:fontRef idx="minor">
-            <a:schemeClr val="dk1"/>
-          </a:fontRef>
-        </p:style>
-        <p:txBody>
-          <a:bodyPr rot="0" spcFirstLastPara="0" vertOverflow="overflow" horzOverflow="overflow" vert="horz" wrap="square" lIns="58066" tIns="29033" rIns="58066" bIns="29033" numCol="1" spcCol="0" rtlCol="0" fromWordArt="0" anchor="ctr" anchorCtr="0" forceAA="0" compatLnSpc="1">
-            <a:prstTxWarp prst="textNoShape">
-              <a:avLst/>
-            </a:prstTxWarp>
-            <a:noAutofit/>
-          </a:bodyPr>
-          <a:lstStyle/>
-          <a:p>
-            <a:pPr algn="ctr"/>
-            <a:endParaRPr lang="zh-TW" altLang="en-US" sz="1143" dirty="0"/>
-          </a:p>
-        </p:txBody>
-      </p:sp>
-      <p:sp>
-        <p:nvSpPr>
-          <p:cNvPr id="70" name="箭號: 向右 69">
-            <a:extLst>
-              <a:ext uri="{FF2B5EF4-FFF2-40B4-BE49-F238E27FC236}">
-                <a16:creationId xmlns:a16="http://schemas.microsoft.com/office/drawing/2014/main" id="{DFFDAE7A-3B0A-4808-88A0-C328B468C4EF}"/>
-              </a:ext>
-            </a:extLst>
-          </p:cNvPr>
-          <p:cNvSpPr/>
-          <p:nvPr/>
-        </p:nvSpPr>
-        <p:spPr>
-          <a:xfrm rot="5400000">
-            <a:off x="2296203" y="2440883"/>
-            <a:ext cx="4116815" cy="761059"/>
-          </a:xfrm>
-          <a:prstGeom prst="rightArrow">
-            <a:avLst/>
-          </a:prstGeom>
-        </p:spPr>
-        <p:style>
-          <a:lnRef idx="0">
-            <a:schemeClr val="accent2"/>
-          </a:lnRef>
-          <a:fillRef idx="3">
-            <a:schemeClr val="accent2"/>
-          </a:fillRef>
-          <a:effectRef idx="3">
-            <a:schemeClr val="accent2"/>
-          </a:effectRef>
-          <a:fontRef idx="minor">
-            <a:schemeClr val="lt1"/>
-          </a:fontRef>
-        </p:style>
-        <p:txBody>
-          <a:bodyPr rot="0" spcFirstLastPara="0" vertOverflow="overflow" horzOverflow="overflow" vert="horz" wrap="square" lIns="91440" tIns="45720" rIns="91440" bIns="45720" numCol="1" spcCol="0" rtlCol="0" fromWordArt="0" anchor="ctr" anchorCtr="0" forceAA="0" compatLnSpc="1">
-            <a:prstTxWarp prst="textNoShape">
-              <a:avLst/>
-            </a:prstTxWarp>
-            <a:noAutofit/>
-          </a:bodyPr>
-          <a:lstStyle/>
-          <a:p>
-            <a:pPr algn="ctr"/>
-            <a:endParaRPr lang="zh-TW" altLang="en-US" dirty="0"/>
-          </a:p>
-        </p:txBody>
-      </p:sp>
-      <p:sp>
-        <p:nvSpPr>
-          <p:cNvPr id="62" name="矩形: 圓角 61">
-            <a:extLst>
-              <a:ext uri="{FF2B5EF4-FFF2-40B4-BE49-F238E27FC236}">
-                <a16:creationId xmlns:a16="http://schemas.microsoft.com/office/drawing/2014/main" id="{11160685-28B3-46DE-9AC0-6E0BD39730FC}"/>
-              </a:ext>
-            </a:extLst>
-          </p:cNvPr>
-          <p:cNvSpPr/>
-          <p:nvPr/>
-        </p:nvSpPr>
-        <p:spPr>
-          <a:xfrm>
-            <a:off x="4221481" y="731838"/>
-            <a:ext cx="10956438" cy="1188000"/>
-          </a:xfrm>
-          <a:prstGeom prst="roundRect">
-            <a:avLst>
-              <a:gd name="adj" fmla="val 7772"/>
-            </a:avLst>
-          </a:prstGeom>
-          <a:gradFill>
-            <a:gsLst>
-              <a:gs pos="0">
-                <a:schemeClr val="accent3">
-                  <a:satMod val="103000"/>
-                  <a:tint val="94000"/>
-                  <a:lumMod val="75000"/>
-                  <a:lumOff val="25000"/>
-                </a:schemeClr>
-              </a:gs>
-              <a:gs pos="50000">
-                <a:schemeClr val="accent3">
-                  <a:satMod val="110000"/>
-                  <a:shade val="100000"/>
-                  <a:lumMod val="77000"/>
-                  <a:lumOff val="23000"/>
-                </a:schemeClr>
-              </a:gs>
-              <a:gs pos="100000">
-                <a:schemeClr val="accent3">
-                  <a:satMod val="120000"/>
-                  <a:shade val="78000"/>
-                  <a:lumMod val="78000"/>
-                  <a:lumOff val="22000"/>
-                </a:schemeClr>
-              </a:gs>
-            </a:gsLst>
-          </a:gradFill>
-        </p:spPr>
-        <p:style>
-          <a:lnRef idx="0">
-            <a:schemeClr val="accent3"/>
-          </a:lnRef>
-          <a:fillRef idx="3">
-            <a:schemeClr val="accent3"/>
-          </a:fillRef>
-          <a:effectRef idx="3">
-            <a:schemeClr val="accent3"/>
-          </a:effectRef>
-          <a:fontRef idx="minor">
-            <a:schemeClr val="lt1"/>
-          </a:fontRef>
-        </p:style>
-        <p:txBody>
-          <a:bodyPr rot="0" spcFirstLastPara="0" vertOverflow="overflow" horzOverflow="overflow" vert="horz" wrap="square" lIns="58066" tIns="29033" rIns="58066" bIns="29033" numCol="1" spcCol="0" rtlCol="0" fromWordArt="0" anchor="ctr" anchorCtr="0" forceAA="0" compatLnSpc="1">
-            <a:prstTxWarp prst="textNoShape">
-              <a:avLst/>
-            </a:prstTxWarp>
-            <a:noAutofit/>
-          </a:bodyPr>
-          <a:lstStyle/>
-          <a:p>
-            <a:pPr algn="ctr"/>
-            <a:endParaRPr lang="zh-TW" altLang="en-US" sz="1143" dirty="0"/>
-          </a:p>
-        </p:txBody>
-      </p:sp>
-      <p:sp>
-        <p:nvSpPr>
-          <p:cNvPr id="63" name="矩形: 圓角 62">
-            <a:extLst>
-              <a:ext uri="{FF2B5EF4-FFF2-40B4-BE49-F238E27FC236}">
-                <a16:creationId xmlns:a16="http://schemas.microsoft.com/office/drawing/2014/main" id="{861DB147-DCBF-4E9C-9160-E65B5023FF4D}"/>
-              </a:ext>
-            </a:extLst>
-          </p:cNvPr>
-          <p:cNvSpPr/>
-          <p:nvPr/>
-        </p:nvSpPr>
-        <p:spPr>
-          <a:xfrm>
-            <a:off x="4221481" y="1945855"/>
-            <a:ext cx="10956438" cy="1188000"/>
-          </a:xfrm>
-          <a:prstGeom prst="roundRect">
-            <a:avLst>
-              <a:gd name="adj" fmla="val 7772"/>
-            </a:avLst>
-          </a:prstGeom>
-          <a:gradFill>
-            <a:gsLst>
-              <a:gs pos="0">
-                <a:schemeClr val="accent3">
-                  <a:satMod val="103000"/>
-                  <a:tint val="94000"/>
-                  <a:lumMod val="85000"/>
-                  <a:lumOff val="15000"/>
-                </a:schemeClr>
-              </a:gs>
-              <a:gs pos="50000">
-                <a:schemeClr val="accent3">
-                  <a:satMod val="110000"/>
-                  <a:shade val="100000"/>
-                  <a:lumMod val="87000"/>
-                  <a:lumOff val="13000"/>
-                </a:schemeClr>
-              </a:gs>
-              <a:gs pos="100000">
-                <a:schemeClr val="accent3">
-                  <a:satMod val="120000"/>
-                  <a:shade val="78000"/>
-                  <a:lumMod val="88000"/>
-                  <a:lumOff val="12000"/>
-                </a:schemeClr>
-              </a:gs>
-            </a:gsLst>
-          </a:gradFill>
-        </p:spPr>
-        <p:style>
-          <a:lnRef idx="0">
-            <a:schemeClr val="accent3"/>
-          </a:lnRef>
-          <a:fillRef idx="3">
-            <a:schemeClr val="accent3"/>
-          </a:fillRef>
-          <a:effectRef idx="3">
-            <a:schemeClr val="accent3"/>
-          </a:effectRef>
-          <a:fontRef idx="minor">
-            <a:schemeClr val="lt1"/>
-          </a:fontRef>
-        </p:style>
-        <p:txBody>
-          <a:bodyPr rot="0" spcFirstLastPara="0" vertOverflow="overflow" horzOverflow="overflow" vert="horz" wrap="square" lIns="58066" tIns="29033" rIns="58066" bIns="29033" numCol="1" spcCol="0" rtlCol="0" fromWordArt="0" anchor="ctr" anchorCtr="0" forceAA="0" compatLnSpc="1">
-            <a:prstTxWarp prst="textNoShape">
-              <a:avLst/>
-            </a:prstTxWarp>
-            <a:noAutofit/>
-          </a:bodyPr>
-          <a:lstStyle/>
-          <a:p>
-            <a:pPr algn="ctr"/>
-            <a:endParaRPr lang="zh-TW" altLang="en-US" sz="1143" dirty="0"/>
-          </a:p>
-        </p:txBody>
-      </p:sp>
-      <p:sp>
-        <p:nvSpPr>
-          <p:cNvPr id="64" name="矩形: 圓角 63">
-            <a:extLst>
-              <a:ext uri="{FF2B5EF4-FFF2-40B4-BE49-F238E27FC236}">
-                <a16:creationId xmlns:a16="http://schemas.microsoft.com/office/drawing/2014/main" id="{1D634348-8785-449F-BCEB-C99459E881AA}"/>
-              </a:ext>
-            </a:extLst>
-          </p:cNvPr>
-          <p:cNvSpPr/>
-          <p:nvPr/>
-        </p:nvSpPr>
-        <p:spPr>
-          <a:xfrm>
-            <a:off x="4221481" y="3159871"/>
-            <a:ext cx="10956438" cy="1188000"/>
-          </a:xfrm>
-          <a:prstGeom prst="roundRect">
-            <a:avLst>
-              <a:gd name="adj" fmla="val 7772"/>
-            </a:avLst>
-          </a:prstGeom>
-          <a:gradFill>
-            <a:gsLst>
-              <a:gs pos="0">
-                <a:schemeClr val="accent3">
-                  <a:satMod val="103000"/>
-                  <a:tint val="94000"/>
-                  <a:lumMod val="85000"/>
-                  <a:lumOff val="15000"/>
-                </a:schemeClr>
-              </a:gs>
-              <a:gs pos="50000">
-                <a:schemeClr val="accent3">
-                  <a:satMod val="110000"/>
-                  <a:shade val="100000"/>
-                  <a:lumMod val="87000"/>
-                  <a:lumOff val="13000"/>
-                </a:schemeClr>
-              </a:gs>
-              <a:gs pos="100000">
-                <a:schemeClr val="accent3">
-                  <a:satMod val="120000"/>
-                  <a:shade val="78000"/>
-                  <a:lumMod val="88000"/>
-                  <a:lumOff val="12000"/>
-                </a:schemeClr>
-              </a:gs>
-            </a:gsLst>
-          </a:gradFill>
-        </p:spPr>
-        <p:style>
-          <a:lnRef idx="0">
-            <a:schemeClr val="accent3"/>
-          </a:lnRef>
-          <a:fillRef idx="3">
-            <a:schemeClr val="accent3"/>
-          </a:fillRef>
-          <a:effectRef idx="3">
-            <a:schemeClr val="accent3"/>
-          </a:effectRef>
-          <a:fontRef idx="minor">
-            <a:schemeClr val="lt1"/>
-          </a:fontRef>
-        </p:style>
-        <p:txBody>
-          <a:bodyPr rot="0" spcFirstLastPara="0" vertOverflow="overflow" horzOverflow="overflow" vert="horz" wrap="square" lIns="58066" tIns="29033" rIns="58066" bIns="29033" numCol="1" spcCol="0" rtlCol="0" fromWordArt="0" anchor="ctr" anchorCtr="0" forceAA="0" compatLnSpc="1">
-            <a:prstTxWarp prst="textNoShape">
-              <a:avLst/>
-            </a:prstTxWarp>
-            <a:noAutofit/>
-          </a:bodyPr>
-          <a:lstStyle/>
-          <a:p>
-            <a:pPr algn="ctr"/>
-            <a:endParaRPr lang="zh-TW" altLang="en-US" sz="1143" dirty="0"/>
-          </a:p>
-        </p:txBody>
-      </p:sp>
-      <p:pic>
-        <p:nvPicPr>
-          <p:cNvPr id="4" name="圖片 3">
-            <a:extLst>
-              <a:ext uri="{FF2B5EF4-FFF2-40B4-BE49-F238E27FC236}">
-                <a16:creationId xmlns:a16="http://schemas.microsoft.com/office/drawing/2014/main" id="{703681DA-8D73-4EDD-B659-0228C2F974E9}"/>
-              </a:ext>
-            </a:extLst>
-          </p:cNvPr>
-          <p:cNvPicPr>
-            <a:picLocks noChangeAspect="1"/>
-          </p:cNvPicPr>
-          <p:nvPr/>
-        </p:nvPicPr>
-        <p:blipFill rotWithShape="1">
-          <a:blip r:embed="rId2">
-            <a:clrChange>
-              <a:clrFrom>
-                <a:srgbClr val="FFFFFF"/>
-              </a:clrFrom>
-              <a:clrTo>
-                <a:srgbClr val="FFFFFF">
-                  <a:alpha val="0"/>
-                </a:srgbClr>
-              </a:clrTo>
-            </a:clrChange>
-            <a:extLst>
-              <a:ext uri="{28A0092B-C50C-407E-A947-70E740481C1C}">
-                <a14:useLocalDpi xmlns:a14="http://schemas.microsoft.com/office/drawing/2010/main" val="0"/>
-              </a:ext>
-            </a:extLst>
-          </a:blip>
-          <a:srcRect l="8050" t="7424" r="9027" b="3292"/>
-          <a:stretch/>
-        </p:blipFill>
-        <p:spPr>
-          <a:xfrm>
-            <a:off x="5732116" y="617619"/>
-            <a:ext cx="9384906" cy="4041847"/>
-          </a:xfrm>
-          <a:prstGeom prst="rect">
-            <a:avLst/>
-          </a:prstGeom>
-        </p:spPr>
-      </p:pic>
-      <p:grpSp>
-        <p:nvGrpSpPr>
-          <p:cNvPr id="42" name="群組 41">
-            <a:extLst>
-              <a:ext uri="{FF2B5EF4-FFF2-40B4-BE49-F238E27FC236}">
-                <a16:creationId xmlns:a16="http://schemas.microsoft.com/office/drawing/2014/main" id="{95C87AA4-744E-416C-87D9-C6B4D503C2A5}"/>
-              </a:ext>
-            </a:extLst>
-          </p:cNvPr>
-          <p:cNvGrpSpPr/>
-          <p:nvPr/>
-        </p:nvGrpSpPr>
-        <p:grpSpPr>
-          <a:xfrm>
-            <a:off x="481165" y="921395"/>
-            <a:ext cx="2919455" cy="3709100"/>
-            <a:chOff x="-215120" y="1723602"/>
-            <a:chExt cx="2919455" cy="3709100"/>
-          </a:xfrm>
-        </p:grpSpPr>
-        <p:sp>
-          <p:nvSpPr>
-            <p:cNvPr id="17" name="Oval 4">
-              <a:extLst>
-                <a:ext uri="{FF2B5EF4-FFF2-40B4-BE49-F238E27FC236}">
-                  <a16:creationId xmlns:a16="http://schemas.microsoft.com/office/drawing/2014/main" id="{AC7CFE6F-6E39-45E7-84BA-7F134569105A}"/>
-                </a:ext>
-              </a:extLst>
-            </p:cNvPr>
-            <p:cNvSpPr/>
-            <p:nvPr/>
-          </p:nvSpPr>
-          <p:spPr>
-            <a:xfrm>
-              <a:off x="-65943" y="2210658"/>
-              <a:ext cx="2623960" cy="2718084"/>
-            </a:xfrm>
-            <a:prstGeom prst="ellipse">
-              <a:avLst/>
-            </a:prstGeom>
-            <a:gradFill flip="none" rotWithShape="1">
-              <a:gsLst>
-                <a:gs pos="100000">
-                  <a:schemeClr val="accent3">
-                    <a:lumMod val="60000"/>
-                    <a:lumOff val="40000"/>
-                    <a:alpha val="60000"/>
-                  </a:schemeClr>
-                </a:gs>
-                <a:gs pos="55000">
-                  <a:schemeClr val="accent3">
-                    <a:lumMod val="40000"/>
-                    <a:lumOff val="60000"/>
-                    <a:alpha val="60000"/>
-                  </a:schemeClr>
-                </a:gs>
-                <a:gs pos="0">
-                  <a:schemeClr val="bg1">
-                    <a:alpha val="60000"/>
-                  </a:schemeClr>
-                </a:gs>
-              </a:gsLst>
-              <a:path path="circle">
-                <a:fillToRect l="100000" b="100000"/>
-              </a:path>
-              <a:tileRect t="-100000" r="-100000"/>
-            </a:gradFill>
-            <a:ln w="57150">
-              <a:solidFill>
-                <a:srgbClr val="D5D7DA"/>
-              </a:solidFill>
-            </a:ln>
-          </p:spPr>
-          <p:style>
-            <a:lnRef idx="2">
-              <a:schemeClr val="accent1">
-                <a:shade val="50000"/>
-              </a:schemeClr>
-            </a:lnRef>
-            <a:fillRef idx="1">
-              <a:schemeClr val="accent1"/>
-            </a:fillRef>
-            <a:effectRef idx="0">
-              <a:schemeClr val="accent1"/>
-            </a:effectRef>
-            <a:fontRef idx="minor">
-              <a:schemeClr val="lt1"/>
-            </a:fontRef>
-          </p:style>
-          <p:txBody>
-            <a:bodyPr rtlCol="0" anchor="ctr"/>
-            <a:lstStyle/>
-            <a:p>
-              <a:pPr algn="ctr"/>
-              <a:endParaRPr lang="en-US" dirty="0"/>
-            </a:p>
-          </p:txBody>
-        </p:sp>
-        <p:sp>
-          <p:nvSpPr>
-            <p:cNvPr id="34" name="SHO">
-              <a:extLst>
-                <a:ext uri="{FF2B5EF4-FFF2-40B4-BE49-F238E27FC236}">
-                  <a16:creationId xmlns:a16="http://schemas.microsoft.com/office/drawing/2014/main" id="{EABFAF74-4902-4691-91A0-D2CE01856B8D}"/>
-                </a:ext>
-              </a:extLst>
-            </p:cNvPr>
-            <p:cNvSpPr/>
-            <p:nvPr/>
-          </p:nvSpPr>
-          <p:spPr>
-            <a:xfrm rot="16200000">
-              <a:off x="676291" y="2258629"/>
-              <a:ext cx="1131525" cy="2623960"/>
-            </a:xfrm>
-            <a:prstGeom prst="arc">
-              <a:avLst>
-                <a:gd name="adj1" fmla="val 5396867"/>
-                <a:gd name="adj2" fmla="val 5395779"/>
-              </a:avLst>
-            </a:prstGeom>
-            <a:gradFill flip="none" rotWithShape="1">
-              <a:gsLst>
-                <a:gs pos="0">
-                  <a:schemeClr val="bg1">
-                    <a:lumMod val="65000"/>
-                  </a:schemeClr>
-                </a:gs>
-                <a:gs pos="47000">
-                  <a:schemeClr val="bg1">
-                    <a:lumMod val="50000"/>
-                  </a:schemeClr>
-                </a:gs>
-                <a:gs pos="97000">
-                  <a:srgbClr val="5E5E5E"/>
-                </a:gs>
-              </a:gsLst>
-              <a:path path="circle">
-                <a:fillToRect l="50000" t="50000" r="50000" b="50000"/>
-              </a:path>
-              <a:tileRect/>
-            </a:gradFill>
-            <a:ln w="31750">
-              <a:gradFill>
-                <a:gsLst>
-                  <a:gs pos="49000">
-                    <a:srgbClr val="EC711E"/>
-                  </a:gs>
-                  <a:gs pos="51000">
-                    <a:schemeClr val="tx1"/>
-                  </a:gs>
-                  <a:gs pos="0">
-                    <a:srgbClr val="EC711E"/>
-                  </a:gs>
-                  <a:gs pos="100000">
-                    <a:schemeClr val="tx1"/>
-                  </a:gs>
-                </a:gsLst>
-                <a:lin ang="0" scaled="0"/>
-              </a:gradFill>
-            </a:ln>
-          </p:spPr>
-          <p:style>
-            <a:lnRef idx="1">
-              <a:schemeClr val="accent1"/>
-            </a:lnRef>
-            <a:fillRef idx="0">
-              <a:schemeClr val="accent1"/>
-            </a:fillRef>
-            <a:effectRef idx="0">
-              <a:schemeClr val="accent1"/>
-            </a:effectRef>
-            <a:fontRef idx="minor">
-              <a:schemeClr val="tx1"/>
-            </a:fontRef>
-          </p:style>
-          <p:txBody>
-            <a:bodyPr rtlCol="0" anchor="ctr"/>
-            <a:lstStyle/>
-            <a:p>
-              <a:pPr algn="ctr"/>
-              <a:endParaRPr lang="en-US" dirty="0"/>
-            </a:p>
-          </p:txBody>
-        </p:sp>
-        <p:sp>
-          <p:nvSpPr>
-            <p:cNvPr id="21" name="Partial Circle 9">
-              <a:extLst>
-                <a:ext uri="{FF2B5EF4-FFF2-40B4-BE49-F238E27FC236}">
-                  <a16:creationId xmlns:a16="http://schemas.microsoft.com/office/drawing/2014/main" id="{E4C4771C-4CCB-40E2-9C70-ECFA3B3F5A7D}"/>
-                </a:ext>
-              </a:extLst>
-            </p:cNvPr>
-            <p:cNvSpPr>
-              <a:spLocks noChangeAspect="1"/>
-            </p:cNvSpPr>
-            <p:nvPr/>
-          </p:nvSpPr>
-          <p:spPr>
-            <a:xfrm rot="16200000" flipH="1">
-              <a:off x="1022031" y="3143539"/>
-              <a:ext cx="431715" cy="833530"/>
-            </a:xfrm>
-            <a:prstGeom prst="pie">
-              <a:avLst>
-                <a:gd name="adj1" fmla="val 16258856"/>
-                <a:gd name="adj2" fmla="val 19252600"/>
-              </a:avLst>
-            </a:prstGeom>
-            <a:gradFill flip="none" rotWithShape="1">
-              <a:gsLst>
-                <a:gs pos="0">
-                  <a:schemeClr val="tx1"/>
-                </a:gs>
-                <a:gs pos="50000">
-                  <a:schemeClr val="tx1">
-                    <a:lumMod val="50000"/>
-                    <a:lumOff val="50000"/>
-                  </a:schemeClr>
-                </a:gs>
-                <a:gs pos="100000">
-                  <a:schemeClr val="bg1">
-                    <a:lumMod val="50000"/>
-                  </a:schemeClr>
-                </a:gs>
-              </a:gsLst>
-              <a:lin ang="2700000" scaled="1"/>
-              <a:tileRect/>
-            </a:gradFill>
-            <a:ln w="19050">
-              <a:solidFill>
-                <a:schemeClr val="tx1"/>
-              </a:solidFill>
-            </a:ln>
-          </p:spPr>
-          <p:style>
-            <a:lnRef idx="2">
-              <a:schemeClr val="accent1">
-                <a:shade val="50000"/>
-              </a:schemeClr>
-            </a:lnRef>
-            <a:fillRef idx="1">
-              <a:schemeClr val="accent1"/>
-            </a:fillRef>
-            <a:effectRef idx="0">
-              <a:schemeClr val="accent1"/>
-            </a:effectRef>
-            <a:fontRef idx="minor">
-              <a:schemeClr val="lt1"/>
-            </a:fontRef>
-          </p:style>
-          <p:txBody>
-            <a:bodyPr rtlCol="0" anchor="ctr"/>
-            <a:lstStyle/>
-            <a:p>
-              <a:pPr algn="ctr"/>
-              <a:endParaRPr lang="en-US" dirty="0">
-                <a:solidFill>
-                  <a:schemeClr val="tx1"/>
-                </a:solidFill>
-              </a:endParaRPr>
-            </a:p>
-          </p:txBody>
-        </p:sp>
-        <mc:AlternateContent xmlns:mc="http://schemas.openxmlformats.org/markup-compatibility/2006" xmlns:a14="http://schemas.microsoft.com/office/drawing/2010/main">
-          <mc:Choice Requires="a14">
-            <p:sp>
-              <p:nvSpPr>
-                <p:cNvPr id="22" name="TextBox 10">
-                  <a:extLst>
-                    <a:ext uri="{FF2B5EF4-FFF2-40B4-BE49-F238E27FC236}">
-                      <a16:creationId xmlns:a16="http://schemas.microsoft.com/office/drawing/2014/main" id="{1255F81D-C5BA-4875-836D-8B38E016E253}"/>
-                    </a:ext>
-                  </a:extLst>
-                </p:cNvPr>
-                <p:cNvSpPr txBox="1"/>
-                <p:nvPr/>
-              </p:nvSpPr>
-              <p:spPr>
-                <a:xfrm>
-                  <a:off x="562584" y="3478280"/>
-                  <a:ext cx="321504" cy="523220"/>
-                </a:xfrm>
-                <a:prstGeom prst="rect">
-                  <a:avLst/>
-                </a:prstGeom>
-                <a:noFill/>
-              </p:spPr>
-              <p:txBody>
-                <a:bodyPr wrap="square" rtlCol="0">
-                  <a:spAutoFit/>
-                </a:bodyPr>
-                <a:lstStyle/>
-                <a:p>
-                  <a:pPr/>
-                  <a14:m>
-                    <m:oMathPara xmlns:m="http://schemas.openxmlformats.org/officeDocument/2006/math">
-                      <m:oMathParaPr>
-                        <m:jc m:val="centerGroup"/>
-                      </m:oMathParaPr>
-                      <m:oMath xmlns:m="http://schemas.openxmlformats.org/officeDocument/2006/math">
-                        <m:r>
-                          <a:rPr lang="en-US" sz="2800" i="1">
-                            <a:latin typeface="Cambria Math" panose="02040503050406030204" pitchFamily="18" charset="0"/>
-                          </a:rPr>
-                          <m:t>𝛼</m:t>
-                        </m:r>
-                      </m:oMath>
-                    </m:oMathPara>
-                  </a14:m>
-                  <a:endParaRPr lang="en-US" sz="2800" dirty="0"/>
-                </a:p>
-              </p:txBody>
-            </p:sp>
-          </mc:Choice>
-          <mc:Fallback xmlns="">
-            <p:sp>
-              <p:nvSpPr>
-                <p:cNvPr id="22" name="TextBox 10">
-                  <a:extLst>
-                    <a:ext uri="{FF2B5EF4-FFF2-40B4-BE49-F238E27FC236}">
-                      <a16:creationId xmlns:a16="http://schemas.microsoft.com/office/drawing/2014/main" id="{1255F81D-C5BA-4875-836D-8B38E016E253}"/>
-                    </a:ext>
-                  </a:extLst>
-                </p:cNvPr>
-                <p:cNvSpPr txBox="1">
-                  <a:spLocks noRot="1" noChangeAspect="1" noMove="1" noResize="1" noEditPoints="1" noAdjustHandles="1" noChangeArrowheads="1" noChangeShapeType="1" noTextEdit="1"/>
-                </p:cNvSpPr>
-                <p:nvPr/>
-              </p:nvSpPr>
-              <p:spPr>
-                <a:xfrm>
-                  <a:off x="562584" y="3478280"/>
-                  <a:ext cx="321504" cy="523220"/>
-                </a:xfrm>
-                <a:prstGeom prst="rect">
-                  <a:avLst/>
-                </a:prstGeom>
-                <a:blipFill>
-                  <a:blip r:embed="rId3"/>
-                  <a:stretch>
-                    <a:fillRect/>
-                  </a:stretch>
-                </a:blipFill>
-              </p:spPr>
-              <p:txBody>
-                <a:bodyPr/>
-                <a:lstStyle/>
-                <a:p>
-                  <a:r>
-                    <a:rPr lang="zh-TW" altLang="en-US">
-                      <a:noFill/>
-                    </a:rPr>
-                    <a:t> </a:t>
-                  </a:r>
-                </a:p>
-              </p:txBody>
-            </p:sp>
-          </mc:Fallback>
-        </mc:AlternateContent>
-        <mc:AlternateContent xmlns:mc="http://schemas.openxmlformats.org/markup-compatibility/2006" xmlns:a14="http://schemas.microsoft.com/office/drawing/2010/main">
-          <mc:Choice Requires="a14">
-            <p:sp>
-              <p:nvSpPr>
-                <p:cNvPr id="23" name="TextBox 11">
-                  <a:extLst>
-                    <a:ext uri="{FF2B5EF4-FFF2-40B4-BE49-F238E27FC236}">
-                      <a16:creationId xmlns:a16="http://schemas.microsoft.com/office/drawing/2014/main" id="{CB894404-8457-4B95-B0FC-E86775D8F692}"/>
-                    </a:ext>
-                  </a:extLst>
-                </p:cNvPr>
-                <p:cNvSpPr txBox="1"/>
-                <p:nvPr/>
-              </p:nvSpPr>
-              <p:spPr>
-                <a:xfrm>
-                  <a:off x="312406" y="3281137"/>
-                  <a:ext cx="321505" cy="523220"/>
-                </a:xfrm>
-                <a:prstGeom prst="rect">
-                  <a:avLst/>
-                </a:prstGeom>
-                <a:noFill/>
-              </p:spPr>
-              <p:txBody>
-                <a:bodyPr wrap="square" rtlCol="0">
-                  <a:spAutoFit/>
-                </a:bodyPr>
-                <a:lstStyle/>
-                <a:p>
-                  <a:pPr/>
-                  <a14:m>
-                    <m:oMathPara xmlns:m="http://schemas.openxmlformats.org/officeDocument/2006/math">
-                      <m:oMathParaPr>
-                        <m:jc m:val="centerGroup"/>
-                      </m:oMathParaPr>
-                      <m:oMath xmlns:m="http://schemas.openxmlformats.org/officeDocument/2006/math">
-                        <m:r>
-                          <a:rPr lang="en-US" sz="2800" i="1">
-                            <a:latin typeface="Cambria Math" panose="02040503050406030204" pitchFamily="18" charset="0"/>
-                          </a:rPr>
-                          <m:t>𝑥</m:t>
-                        </m:r>
-                      </m:oMath>
-                    </m:oMathPara>
-                  </a14:m>
-                  <a:endParaRPr lang="en-US" sz="2800" dirty="0"/>
-                </a:p>
-              </p:txBody>
-            </p:sp>
-          </mc:Choice>
-          <mc:Fallback xmlns="">
-            <p:sp>
-              <p:nvSpPr>
-                <p:cNvPr id="23" name="TextBox 11">
-                  <a:extLst>
-                    <a:ext uri="{FF2B5EF4-FFF2-40B4-BE49-F238E27FC236}">
-                      <a16:creationId xmlns:a16="http://schemas.microsoft.com/office/drawing/2014/main" id="{CB894404-8457-4B95-B0FC-E86775D8F692}"/>
-                    </a:ext>
-                  </a:extLst>
-                </p:cNvPr>
-                <p:cNvSpPr txBox="1">
-                  <a:spLocks noRot="1" noChangeAspect="1" noMove="1" noResize="1" noEditPoints="1" noAdjustHandles="1" noChangeArrowheads="1" noChangeShapeType="1" noTextEdit="1"/>
-                </p:cNvSpPr>
-                <p:nvPr/>
-              </p:nvSpPr>
-              <p:spPr>
-                <a:xfrm>
-                  <a:off x="312406" y="3281137"/>
-                  <a:ext cx="321505" cy="523220"/>
-                </a:xfrm>
-                <a:prstGeom prst="rect">
-                  <a:avLst/>
-                </a:prstGeom>
-                <a:blipFill>
-                  <a:blip r:embed="rId4"/>
-                  <a:stretch>
-                    <a:fillRect/>
-                  </a:stretch>
-                </a:blipFill>
-              </p:spPr>
-              <p:txBody>
-                <a:bodyPr/>
-                <a:lstStyle/>
-                <a:p>
-                  <a:r>
-                    <a:rPr lang="zh-TW" altLang="en-US">
-                      <a:noFill/>
-                    </a:rPr>
-                    <a:t> </a:t>
-                  </a:r>
-                </a:p>
-              </p:txBody>
-            </p:sp>
-          </mc:Fallback>
-        </mc:AlternateContent>
-        <mc:AlternateContent xmlns:mc="http://schemas.openxmlformats.org/markup-compatibility/2006" xmlns:a14="http://schemas.microsoft.com/office/drawing/2010/main">
-          <mc:Choice Requires="a14">
-            <p:sp>
-              <p:nvSpPr>
-                <p:cNvPr id="24" name="TextBox 12">
-                  <a:extLst>
-                    <a:ext uri="{FF2B5EF4-FFF2-40B4-BE49-F238E27FC236}">
-                      <a16:creationId xmlns:a16="http://schemas.microsoft.com/office/drawing/2014/main" id="{C85F2D75-858C-4DA4-89C4-4EA3F465D57D}"/>
-                    </a:ext>
-                  </a:extLst>
-                </p:cNvPr>
-                <p:cNvSpPr txBox="1"/>
-                <p:nvPr/>
-              </p:nvSpPr>
-              <p:spPr>
-                <a:xfrm>
-                  <a:off x="1554423" y="3419871"/>
-                  <a:ext cx="321505" cy="523220"/>
-                </a:xfrm>
-                <a:prstGeom prst="rect">
-                  <a:avLst/>
-                </a:prstGeom>
-                <a:noFill/>
-              </p:spPr>
-              <p:txBody>
-                <a:bodyPr wrap="square" rtlCol="0">
-                  <a:spAutoFit/>
-                </a:bodyPr>
-                <a:lstStyle/>
-                <a:p>
-                  <a:pPr/>
-                  <a14:m>
-                    <m:oMathPara xmlns:m="http://schemas.openxmlformats.org/officeDocument/2006/math">
-                      <m:oMathParaPr>
-                        <m:jc m:val="centerGroup"/>
-                      </m:oMathParaPr>
-                      <m:oMath xmlns:m="http://schemas.openxmlformats.org/officeDocument/2006/math">
-                        <m:r>
-                          <a:rPr lang="en-US" sz="2800" i="1">
-                            <a:latin typeface="Cambria Math" panose="02040503050406030204" pitchFamily="18" charset="0"/>
-                          </a:rPr>
-                          <m:t>𝑦</m:t>
-                        </m:r>
-                      </m:oMath>
-                    </m:oMathPara>
-                  </a14:m>
-                  <a:endParaRPr lang="en-US" sz="2800" dirty="0"/>
-                </a:p>
-              </p:txBody>
-            </p:sp>
-          </mc:Choice>
-          <mc:Fallback xmlns="">
-            <p:sp>
-              <p:nvSpPr>
-                <p:cNvPr id="24" name="TextBox 12">
-                  <a:extLst>
-                    <a:ext uri="{FF2B5EF4-FFF2-40B4-BE49-F238E27FC236}">
-                      <a16:creationId xmlns:a16="http://schemas.microsoft.com/office/drawing/2014/main" id="{C85F2D75-858C-4DA4-89C4-4EA3F465D57D}"/>
-                    </a:ext>
-                  </a:extLst>
-                </p:cNvPr>
-                <p:cNvSpPr txBox="1">
-                  <a:spLocks noRot="1" noChangeAspect="1" noMove="1" noResize="1" noEditPoints="1" noAdjustHandles="1" noChangeArrowheads="1" noChangeShapeType="1" noTextEdit="1"/>
-                </p:cNvSpPr>
-                <p:nvPr/>
-              </p:nvSpPr>
-              <p:spPr>
-                <a:xfrm>
-                  <a:off x="1554423" y="3419871"/>
-                  <a:ext cx="321505" cy="523220"/>
-                </a:xfrm>
-                <a:prstGeom prst="rect">
-                  <a:avLst/>
-                </a:prstGeom>
-                <a:blipFill>
-                  <a:blip r:embed="rId5"/>
-                  <a:stretch>
-                    <a:fillRect/>
-                  </a:stretch>
-                </a:blipFill>
-              </p:spPr>
-              <p:txBody>
-                <a:bodyPr/>
-                <a:lstStyle/>
-                <a:p>
-                  <a:r>
-                    <a:rPr lang="zh-TW" altLang="en-US">
-                      <a:noFill/>
-                    </a:rPr>
-                    <a:t> </a:t>
-                  </a:r>
-                </a:p>
-              </p:txBody>
-            </p:sp>
-          </mc:Fallback>
-        </mc:AlternateContent>
-        <mc:AlternateContent xmlns:mc="http://schemas.openxmlformats.org/markup-compatibility/2006" xmlns:a14="http://schemas.microsoft.com/office/drawing/2010/main">
-          <mc:Choice Requires="a14">
-            <p:sp>
-              <p:nvSpPr>
-                <p:cNvPr id="25" name="TextBox 13">
-                  <a:extLst>
-                    <a:ext uri="{FF2B5EF4-FFF2-40B4-BE49-F238E27FC236}">
-                      <a16:creationId xmlns:a16="http://schemas.microsoft.com/office/drawing/2014/main" id="{50E193F0-8822-4CC9-AF26-14BEF0DCDEF4}"/>
-                    </a:ext>
-                  </a:extLst>
-                </p:cNvPr>
-                <p:cNvSpPr txBox="1"/>
-                <p:nvPr/>
-              </p:nvSpPr>
-              <p:spPr>
-                <a:xfrm>
-                  <a:off x="1072734" y="2351692"/>
-                  <a:ext cx="321505" cy="523220"/>
-                </a:xfrm>
-                <a:prstGeom prst="rect">
-                  <a:avLst/>
-                </a:prstGeom>
-                <a:noFill/>
-              </p:spPr>
-              <p:txBody>
-                <a:bodyPr wrap="square" rtlCol="0">
-                  <a:spAutoFit/>
-                </a:bodyPr>
-                <a:lstStyle/>
-                <a:p>
-                  <a:pPr/>
-                  <a14:m>
-                    <m:oMathPara xmlns:m="http://schemas.openxmlformats.org/officeDocument/2006/math">
-                      <m:oMathParaPr>
-                        <m:jc m:val="centerGroup"/>
-                      </m:oMathParaPr>
-                      <m:oMath xmlns:m="http://schemas.openxmlformats.org/officeDocument/2006/math">
-                        <m:r>
-                          <a:rPr lang="en-US" sz="2800" i="1">
-                            <a:latin typeface="Cambria Math" panose="02040503050406030204" pitchFamily="18" charset="0"/>
-                          </a:rPr>
-                          <m:t>𝑧</m:t>
-                        </m:r>
-                      </m:oMath>
-                    </m:oMathPara>
-                  </a14:m>
-                  <a:endParaRPr lang="en-US" sz="2800" dirty="0"/>
-                </a:p>
-              </p:txBody>
-            </p:sp>
-          </mc:Choice>
-          <mc:Fallback xmlns="">
-            <p:sp>
-              <p:nvSpPr>
-                <p:cNvPr id="25" name="TextBox 13">
-                  <a:extLst>
-                    <a:ext uri="{FF2B5EF4-FFF2-40B4-BE49-F238E27FC236}">
-                      <a16:creationId xmlns:a16="http://schemas.microsoft.com/office/drawing/2014/main" id="{50E193F0-8822-4CC9-AF26-14BEF0DCDEF4}"/>
-                    </a:ext>
-                  </a:extLst>
-                </p:cNvPr>
-                <p:cNvSpPr txBox="1">
-                  <a:spLocks noRot="1" noChangeAspect="1" noMove="1" noResize="1" noEditPoints="1" noAdjustHandles="1" noChangeArrowheads="1" noChangeShapeType="1" noTextEdit="1"/>
-                </p:cNvSpPr>
-                <p:nvPr/>
-              </p:nvSpPr>
-              <p:spPr>
-                <a:xfrm>
-                  <a:off x="1072734" y="2351692"/>
-                  <a:ext cx="321505" cy="523220"/>
-                </a:xfrm>
-                <a:prstGeom prst="rect">
-                  <a:avLst/>
-                </a:prstGeom>
-                <a:blipFill>
-                  <a:blip r:embed="rId6"/>
-                  <a:stretch>
-                    <a:fillRect/>
-                  </a:stretch>
-                </a:blipFill>
-              </p:spPr>
-              <p:txBody>
-                <a:bodyPr/>
-                <a:lstStyle/>
-                <a:p>
-                  <a:r>
-                    <a:rPr lang="zh-TW" altLang="en-US">
-                      <a:noFill/>
-                    </a:rPr>
-                    <a:t> </a:t>
-                  </a:r>
-                </a:p>
-              </p:txBody>
-            </p:sp>
-          </mc:Fallback>
-        </mc:AlternateContent>
-        <p:sp>
-          <p:nvSpPr>
-            <p:cNvPr id="26" name="DVO">
-              <a:extLst>
-                <a:ext uri="{FF2B5EF4-FFF2-40B4-BE49-F238E27FC236}">
-                  <a16:creationId xmlns:a16="http://schemas.microsoft.com/office/drawing/2014/main" id="{F5A3C81D-28AC-45C8-BA99-8F15EC8DDCDD}"/>
-                </a:ext>
-              </a:extLst>
-            </p:cNvPr>
-            <p:cNvSpPr/>
-            <p:nvPr/>
-          </p:nvSpPr>
-          <p:spPr>
-            <a:xfrm flipH="1">
-              <a:off x="584429" y="2211567"/>
-              <a:ext cx="1311980" cy="2718084"/>
-            </a:xfrm>
-            <a:prstGeom prst="arc">
-              <a:avLst>
-                <a:gd name="adj1" fmla="val 5396867"/>
-                <a:gd name="adj2" fmla="val 16170484"/>
-              </a:avLst>
-            </a:prstGeom>
-            <a:ln w="25400">
-              <a:solidFill>
-                <a:schemeClr val="bg1">
-                  <a:lumMod val="50000"/>
-                </a:schemeClr>
-              </a:solidFill>
-            </a:ln>
-          </p:spPr>
-          <p:style>
-            <a:lnRef idx="1">
-              <a:schemeClr val="accent1"/>
-            </a:lnRef>
-            <a:fillRef idx="0">
-              <a:schemeClr val="accent1"/>
-            </a:fillRef>
-            <a:effectRef idx="0">
-              <a:schemeClr val="accent1"/>
-            </a:effectRef>
-            <a:fontRef idx="minor">
-              <a:schemeClr val="tx1"/>
-            </a:fontRef>
-          </p:style>
-          <p:txBody>
-            <a:bodyPr rtlCol="0" anchor="ctr"/>
-            <a:lstStyle/>
-            <a:p>
-              <a:pPr algn="ctr"/>
-              <a:endParaRPr lang="en-US" dirty="0"/>
-            </a:p>
-          </p:txBody>
-        </p:sp>
-        <p:cxnSp>
-          <p:nvCxnSpPr>
-            <p:cNvPr id="27" name="Straight Arrow Connector 17">
-              <a:extLst>
-                <a:ext uri="{FF2B5EF4-FFF2-40B4-BE49-F238E27FC236}">
-                  <a16:creationId xmlns:a16="http://schemas.microsoft.com/office/drawing/2014/main" id="{C15310FA-FA8C-4C91-9AAE-A23FF18D76C4}"/>
-                </a:ext>
-              </a:extLst>
-            </p:cNvPr>
-            <p:cNvCxnSpPr>
-              <a:cxnSpLocks/>
-            </p:cNvCxnSpPr>
-            <p:nvPr/>
-          </p:nvCxnSpPr>
-          <p:spPr>
-            <a:xfrm flipH="1">
-              <a:off x="835596" y="3561814"/>
-              <a:ext cx="402652" cy="520683"/>
-            </a:xfrm>
-            <a:prstGeom prst="straightConnector1">
-              <a:avLst/>
-            </a:prstGeom>
-            <a:ln w="53975">
-              <a:solidFill>
-                <a:schemeClr val="tx1"/>
-              </a:solidFill>
-              <a:tailEnd type="stealth" w="lg" len="lg"/>
-            </a:ln>
-          </p:spPr>
-          <p:style>
-            <a:lnRef idx="3">
-              <a:schemeClr val="accent6"/>
-            </a:lnRef>
-            <a:fillRef idx="0">
-              <a:schemeClr val="accent6"/>
-            </a:fillRef>
-            <a:effectRef idx="2">
-              <a:schemeClr val="accent6"/>
-            </a:effectRef>
-            <a:fontRef idx="minor">
-              <a:schemeClr val="tx1"/>
-            </a:fontRef>
-          </p:style>
-        </p:cxnSp>
-        <p:sp>
-          <p:nvSpPr>
-            <p:cNvPr id="28" name="Partial Circle 9">
-              <a:extLst>
-                <a:ext uri="{FF2B5EF4-FFF2-40B4-BE49-F238E27FC236}">
-                  <a16:creationId xmlns:a16="http://schemas.microsoft.com/office/drawing/2014/main" id="{6C11BF45-0CF5-4A7D-BE02-6A564F851708}"/>
-                </a:ext>
-              </a:extLst>
-            </p:cNvPr>
-            <p:cNvSpPr>
-              <a:spLocks noChangeAspect="1"/>
-            </p:cNvSpPr>
-            <p:nvPr/>
-          </p:nvSpPr>
-          <p:spPr>
-            <a:xfrm>
-              <a:off x="1085770" y="3250906"/>
-              <a:ext cx="301557" cy="609055"/>
-            </a:xfrm>
-            <a:prstGeom prst="pie">
-              <a:avLst>
-                <a:gd name="adj1" fmla="val 16258856"/>
-                <a:gd name="adj2" fmla="val 19252600"/>
-              </a:avLst>
-            </a:prstGeom>
-            <a:gradFill flip="none" rotWithShape="1">
-              <a:gsLst>
-                <a:gs pos="0">
-                  <a:schemeClr val="tx1"/>
-                </a:gs>
-                <a:gs pos="50000">
-                  <a:schemeClr val="tx1">
-                    <a:lumMod val="50000"/>
-                    <a:lumOff val="50000"/>
-                  </a:schemeClr>
-                </a:gs>
-                <a:gs pos="100000">
-                  <a:schemeClr val="bg1">
-                    <a:lumMod val="50000"/>
-                  </a:schemeClr>
-                </a:gs>
-              </a:gsLst>
-              <a:lin ang="2700000" scaled="1"/>
-              <a:tileRect/>
-            </a:gradFill>
-            <a:ln w="19050">
-              <a:solidFill>
-                <a:schemeClr val="tx1"/>
-              </a:solidFill>
-            </a:ln>
-          </p:spPr>
-          <p:style>
-            <a:lnRef idx="2">
-              <a:schemeClr val="accent1">
-                <a:shade val="50000"/>
-              </a:schemeClr>
-            </a:lnRef>
-            <a:fillRef idx="1">
-              <a:schemeClr val="accent1"/>
-            </a:fillRef>
-            <a:effectRef idx="0">
-              <a:schemeClr val="accent1"/>
-            </a:effectRef>
-            <a:fontRef idx="minor">
-              <a:schemeClr val="lt1"/>
-            </a:fontRef>
-          </p:style>
-          <p:txBody>
-            <a:bodyPr rtlCol="0" anchor="ctr"/>
-            <a:lstStyle/>
-            <a:p>
-              <a:pPr algn="ctr"/>
-              <a:endParaRPr lang="en-US" dirty="0">
-                <a:solidFill>
-                  <a:schemeClr val="tx1"/>
-                </a:solidFill>
-              </a:endParaRPr>
-            </a:p>
-          </p:txBody>
-        </p:sp>
-        <p:cxnSp>
-          <p:nvCxnSpPr>
-            <p:cNvPr id="29" name="Straight Arrow Connector 7">
-              <a:extLst>
-                <a:ext uri="{FF2B5EF4-FFF2-40B4-BE49-F238E27FC236}">
-                  <a16:creationId xmlns:a16="http://schemas.microsoft.com/office/drawing/2014/main" id="{E7AFAF12-0748-465E-8ACC-CD14E1F6AC50}"/>
-                </a:ext>
-              </a:extLst>
-            </p:cNvPr>
-            <p:cNvCxnSpPr>
-              <a:cxnSpLocks/>
-            </p:cNvCxnSpPr>
-            <p:nvPr/>
-          </p:nvCxnSpPr>
-          <p:spPr>
-            <a:xfrm flipV="1">
-              <a:off x="1234909" y="2756380"/>
-              <a:ext cx="3083" cy="810248"/>
-            </a:xfrm>
-            <a:prstGeom prst="straightConnector1">
-              <a:avLst/>
-            </a:prstGeom>
-            <a:ln w="12700">
-              <a:solidFill>
-                <a:schemeClr val="tx1"/>
-              </a:solidFill>
-              <a:tailEnd type="triangle" w="lg" len="lg"/>
-            </a:ln>
-          </p:spPr>
-          <p:style>
-            <a:lnRef idx="1">
-              <a:schemeClr val="accent1"/>
-            </a:lnRef>
-            <a:fillRef idx="0">
-              <a:schemeClr val="accent1"/>
-            </a:fillRef>
-            <a:effectRef idx="0">
-              <a:schemeClr val="accent1"/>
-            </a:effectRef>
-            <a:fontRef idx="minor">
-              <a:schemeClr val="tx1"/>
-            </a:fontRef>
-          </p:style>
-        </p:cxnSp>
-        <mc:AlternateContent xmlns:mc="http://schemas.openxmlformats.org/markup-compatibility/2006" xmlns:a14="http://schemas.microsoft.com/office/drawing/2010/main">
-          <mc:Choice Requires="a14">
-            <p:sp>
-              <p:nvSpPr>
-                <p:cNvPr id="30" name="TextBox 10">
-                  <a:extLst>
-                    <a:ext uri="{FF2B5EF4-FFF2-40B4-BE49-F238E27FC236}">
-                      <a16:creationId xmlns:a16="http://schemas.microsoft.com/office/drawing/2014/main" id="{699EDCDA-17DA-4E79-A3B4-CFA956E006D0}"/>
-                    </a:ext>
-                  </a:extLst>
-                </p:cNvPr>
-                <p:cNvSpPr txBox="1"/>
-                <p:nvPr/>
-              </p:nvSpPr>
-              <p:spPr>
-                <a:xfrm>
-                  <a:off x="1289599" y="2906416"/>
-                  <a:ext cx="321504" cy="523220"/>
-                </a:xfrm>
-                <a:prstGeom prst="rect">
-                  <a:avLst/>
-                </a:prstGeom>
-                <a:noFill/>
-              </p:spPr>
-              <p:txBody>
-                <a:bodyPr wrap="square" rtlCol="0">
-                  <a:spAutoFit/>
-                </a:bodyPr>
-                <a:lstStyle/>
-                <a:p>
-                  <a:pPr/>
-                  <a14:m>
-                    <m:oMathPara xmlns:m="http://schemas.openxmlformats.org/officeDocument/2006/math">
-                      <m:oMathParaPr>
-                        <m:jc m:val="centerGroup"/>
-                      </m:oMathParaPr>
-                      <m:oMath xmlns:m="http://schemas.openxmlformats.org/officeDocument/2006/math">
-                        <m:r>
-                          <a:rPr lang="en-US" sz="2800" i="1">
-                            <a:latin typeface="Cambria Math" panose="02040503050406030204" pitchFamily="18" charset="0"/>
-                          </a:rPr>
-                          <m:t>𝛽</m:t>
-                        </m:r>
-                      </m:oMath>
-                    </m:oMathPara>
-                  </a14:m>
-                  <a:endParaRPr lang="en-US" sz="2800" dirty="0"/>
-                </a:p>
-              </p:txBody>
-            </p:sp>
-          </mc:Choice>
-          <mc:Fallback xmlns="">
-            <p:sp>
-              <p:nvSpPr>
-                <p:cNvPr id="30" name="TextBox 10">
-                  <a:extLst>
-                    <a:ext uri="{FF2B5EF4-FFF2-40B4-BE49-F238E27FC236}">
-                      <a16:creationId xmlns:a16="http://schemas.microsoft.com/office/drawing/2014/main" id="{699EDCDA-17DA-4E79-A3B4-CFA956E006D0}"/>
-                    </a:ext>
-                  </a:extLst>
-                </p:cNvPr>
-                <p:cNvSpPr txBox="1">
-                  <a:spLocks noRot="1" noChangeAspect="1" noMove="1" noResize="1" noEditPoints="1" noAdjustHandles="1" noChangeArrowheads="1" noChangeShapeType="1" noTextEdit="1"/>
-                </p:cNvSpPr>
-                <p:nvPr/>
-              </p:nvSpPr>
-              <p:spPr>
-                <a:xfrm>
-                  <a:off x="1289599" y="2906416"/>
-                  <a:ext cx="321504" cy="523220"/>
-                </a:xfrm>
-                <a:prstGeom prst="rect">
-                  <a:avLst/>
-                </a:prstGeom>
-                <a:blipFill>
-                  <a:blip r:embed="rId7"/>
-                  <a:stretch>
-                    <a:fillRect/>
-                  </a:stretch>
-                </a:blipFill>
-              </p:spPr>
-              <p:txBody>
-                <a:bodyPr/>
-                <a:lstStyle/>
-                <a:p>
-                  <a:r>
-                    <a:rPr lang="zh-TW" altLang="en-US">
-                      <a:noFill/>
-                    </a:rPr>
-                    <a:t> </a:t>
-                  </a:r>
-                </a:p>
-              </p:txBody>
-            </p:sp>
-          </mc:Fallback>
-        </mc:AlternateContent>
-        <p:cxnSp>
-          <p:nvCxnSpPr>
-            <p:cNvPr id="31" name="Straight Arrow Connector 19">
-              <a:extLst>
-                <a:ext uri="{FF2B5EF4-FFF2-40B4-BE49-F238E27FC236}">
-                  <a16:creationId xmlns:a16="http://schemas.microsoft.com/office/drawing/2014/main" id="{E7AD9431-0739-48AA-9E9A-507AB0346CBE}"/>
-                </a:ext>
-              </a:extLst>
-            </p:cNvPr>
-            <p:cNvCxnSpPr>
-              <a:cxnSpLocks/>
-            </p:cNvCxnSpPr>
-            <p:nvPr/>
-          </p:nvCxnSpPr>
-          <p:spPr>
-            <a:xfrm>
-              <a:off x="1240334" y="3562657"/>
-              <a:ext cx="355802" cy="284861"/>
-            </a:xfrm>
-            <a:prstGeom prst="straightConnector1">
-              <a:avLst/>
-            </a:prstGeom>
-            <a:ln w="12700">
-              <a:solidFill>
-                <a:schemeClr val="tx1"/>
-              </a:solidFill>
-              <a:tailEnd type="triangle" w="lg" len="lg"/>
-            </a:ln>
-          </p:spPr>
-          <p:style>
-            <a:lnRef idx="1">
-              <a:schemeClr val="accent1"/>
-            </a:lnRef>
-            <a:fillRef idx="0">
-              <a:schemeClr val="accent1"/>
-            </a:fillRef>
-            <a:effectRef idx="0">
-              <a:schemeClr val="accent1"/>
-            </a:effectRef>
-            <a:fontRef idx="minor">
-              <a:schemeClr val="tx1"/>
-            </a:fontRef>
-          </p:style>
-        </p:cxnSp>
-        <p:cxnSp>
-          <p:nvCxnSpPr>
-            <p:cNvPr id="32" name="Straight Arrow Connector 18">
-              <a:extLst>
-                <a:ext uri="{FF2B5EF4-FFF2-40B4-BE49-F238E27FC236}">
-                  <a16:creationId xmlns:a16="http://schemas.microsoft.com/office/drawing/2014/main" id="{24BFF6B3-7336-4FFA-A753-5ACD3ECF9392}"/>
-                </a:ext>
-              </a:extLst>
-            </p:cNvPr>
-            <p:cNvCxnSpPr>
-              <a:cxnSpLocks/>
-            </p:cNvCxnSpPr>
-            <p:nvPr/>
-          </p:nvCxnSpPr>
-          <p:spPr>
-            <a:xfrm rot="16200000" flipH="1" flipV="1">
-              <a:off x="929016" y="3251062"/>
-              <a:ext cx="0" cy="623190"/>
-            </a:xfrm>
-            <a:prstGeom prst="straightConnector1">
-              <a:avLst/>
-            </a:prstGeom>
-            <a:ln w="12700">
-              <a:solidFill>
-                <a:schemeClr val="tx1"/>
-              </a:solidFill>
-              <a:tailEnd type="triangle" w="lg" len="lg"/>
-            </a:ln>
-          </p:spPr>
-          <p:style>
-            <a:lnRef idx="1">
-              <a:schemeClr val="accent1"/>
-            </a:lnRef>
-            <a:fillRef idx="0">
-              <a:schemeClr val="accent1"/>
-            </a:fillRef>
-            <a:effectRef idx="0">
-              <a:schemeClr val="accent1"/>
-            </a:effectRef>
-            <a:fontRef idx="minor">
-              <a:schemeClr val="tx1"/>
-            </a:fontRef>
-          </p:style>
-        </p:cxnSp>
-        <p:cxnSp>
-          <p:nvCxnSpPr>
-            <p:cNvPr id="33" name="Straight Arrow Connector 17">
-              <a:extLst>
-                <a:ext uri="{FF2B5EF4-FFF2-40B4-BE49-F238E27FC236}">
-                  <a16:creationId xmlns:a16="http://schemas.microsoft.com/office/drawing/2014/main" id="{1084C470-EE2F-4BF3-8588-7B6DDA2889E1}"/>
-                </a:ext>
-              </a:extLst>
-            </p:cNvPr>
-            <p:cNvCxnSpPr>
-              <a:cxnSpLocks/>
-            </p:cNvCxnSpPr>
-            <p:nvPr/>
-          </p:nvCxnSpPr>
-          <p:spPr>
-            <a:xfrm flipV="1">
-              <a:off x="1223553" y="2751867"/>
-              <a:ext cx="1039268" cy="817070"/>
-            </a:xfrm>
-            <a:prstGeom prst="straightConnector1">
-              <a:avLst/>
-            </a:prstGeom>
-            <a:ln w="53975">
-              <a:solidFill>
-                <a:schemeClr val="tx1"/>
-              </a:solidFill>
-              <a:tailEnd type="stealth" w="lg" len="lg"/>
-            </a:ln>
-          </p:spPr>
-          <p:style>
-            <a:lnRef idx="3">
-              <a:schemeClr val="accent6"/>
-            </a:lnRef>
-            <a:fillRef idx="0">
-              <a:schemeClr val="accent6"/>
-            </a:fillRef>
-            <a:effectRef idx="2">
-              <a:schemeClr val="accent6"/>
-            </a:effectRef>
-            <a:fontRef idx="minor">
-              <a:schemeClr val="tx1"/>
-            </a:fontRef>
-          </p:style>
-        </p:cxnSp>
-        <mc:AlternateContent xmlns:mc="http://schemas.openxmlformats.org/markup-compatibility/2006" xmlns:a14="http://schemas.microsoft.com/office/drawing/2010/main">
-          <mc:Choice Requires="a14">
-            <p:sp>
-              <p:nvSpPr>
-                <p:cNvPr id="13" name="文字方塊 12">
-                  <a:extLst>
-                    <a:ext uri="{FF2B5EF4-FFF2-40B4-BE49-F238E27FC236}">
-                      <a16:creationId xmlns:a16="http://schemas.microsoft.com/office/drawing/2014/main" id="{8D65A2DC-85E8-4DDB-9015-B0C095B8BB57}"/>
-                    </a:ext>
-                  </a:extLst>
-                </p:cNvPr>
-                <p:cNvSpPr txBox="1"/>
-                <p:nvPr/>
-              </p:nvSpPr>
-              <p:spPr>
-                <a:xfrm>
-                  <a:off x="772701" y="5063370"/>
-                  <a:ext cx="938080" cy="369332"/>
-                </a:xfrm>
-                <a:prstGeom prst="rect">
-                  <a:avLst/>
-                </a:prstGeom>
-                <a:noFill/>
-              </p:spPr>
-              <p:txBody>
-                <a:bodyPr wrap="square" rtlCol="0">
-                  <a:spAutoFit/>
-                </a:bodyPr>
-                <a:lstStyle/>
-                <a:p>
-                  <a:pPr/>
-                  <a14:m>
-                    <m:oMathPara xmlns:m="http://schemas.openxmlformats.org/officeDocument/2006/math">
-                      <m:oMathParaPr>
-                        <m:jc m:val="centerGroup"/>
-                      </m:oMathParaPr>
-                      <m:oMath xmlns:m="http://schemas.openxmlformats.org/officeDocument/2006/math">
-                        <m:r>
-                          <a:rPr lang="en-US" altLang="zh-TW" i="1" smtClean="0">
-                            <a:latin typeface="Cambria Math" panose="02040503050406030204" pitchFamily="18" charset="0"/>
-                          </a:rPr>
-                          <m:t>|</m:t>
-                        </m:r>
-                        <m:d>
-                          <m:dPr>
-                            <m:begChr m:val=""/>
-                            <m:endChr m:val="⟩"/>
-                            <m:ctrlPr>
-                              <a:rPr lang="en-US" altLang="zh-TW" i="1">
-                                <a:latin typeface="Cambria Math" panose="02040503050406030204" pitchFamily="18" charset="0"/>
-                              </a:rPr>
-                            </m:ctrlPr>
-                          </m:dPr>
-                          <m:e>
-                            <m:r>
-                              <a:rPr lang="en-US" altLang="zh-TW" i="1">
-                                <a:latin typeface="Cambria Math" panose="02040503050406030204" pitchFamily="18" charset="0"/>
-                              </a:rPr>
-                              <m:t>−</m:t>
-                            </m:r>
-                            <m:r>
-                              <a:rPr lang="en-US" altLang="zh-TW" b="0" i="1" smtClean="0">
-                                <a:latin typeface="Cambria Math" panose="02040503050406030204" pitchFamily="18" charset="0"/>
-                              </a:rPr>
-                              <m:t>1</m:t>
-                            </m:r>
-                            <m:r>
-                              <a:rPr lang="en-US" altLang="zh-TW" i="1">
-                                <a:latin typeface="Cambria Math" panose="02040503050406030204" pitchFamily="18" charset="0"/>
-                              </a:rPr>
-                              <m:t>,−ℓ</m:t>
-                            </m:r>
-                          </m:e>
-                        </m:d>
-                      </m:oMath>
-                    </m:oMathPara>
-                  </a14:m>
-                  <a:endParaRPr lang="zh-TW" altLang="en-US" dirty="0"/>
-                </a:p>
-              </p:txBody>
-            </p:sp>
-          </mc:Choice>
-          <mc:Fallback xmlns="">
-            <p:sp>
-              <p:nvSpPr>
-                <p:cNvPr id="13" name="文字方塊 12">
-                  <a:extLst>
-                    <a:ext uri="{FF2B5EF4-FFF2-40B4-BE49-F238E27FC236}">
-                      <a16:creationId xmlns:a16="http://schemas.microsoft.com/office/drawing/2014/main" id="{8D65A2DC-85E8-4DDB-9015-B0C095B8BB57}"/>
-                    </a:ext>
-                  </a:extLst>
-                </p:cNvPr>
-                <p:cNvSpPr txBox="1">
-                  <a:spLocks noRot="1" noChangeAspect="1" noMove="1" noResize="1" noEditPoints="1" noAdjustHandles="1" noChangeArrowheads="1" noChangeShapeType="1" noTextEdit="1"/>
-                </p:cNvSpPr>
-                <p:nvPr/>
-              </p:nvSpPr>
-              <p:spPr>
-                <a:xfrm>
-                  <a:off x="772701" y="5063370"/>
-                  <a:ext cx="938080" cy="369332"/>
-                </a:xfrm>
-                <a:prstGeom prst="rect">
-                  <a:avLst/>
-                </a:prstGeom>
-                <a:blipFill>
-                  <a:blip r:embed="rId8"/>
-                  <a:stretch>
-                    <a:fillRect l="-1948" t="-119672" r="-61039" b="-183607"/>
-                  </a:stretch>
-                </a:blipFill>
-              </p:spPr>
-              <p:txBody>
-                <a:bodyPr/>
-                <a:lstStyle/>
-                <a:p>
-                  <a:r>
-                    <a:rPr lang="zh-TW" altLang="en-US">
-                      <a:noFill/>
-                    </a:rPr>
-                    <a:t> </a:t>
-                  </a:r>
-                </a:p>
-              </p:txBody>
-            </p:sp>
-          </mc:Fallback>
-        </mc:AlternateContent>
-        <mc:AlternateContent xmlns:mc="http://schemas.openxmlformats.org/markup-compatibility/2006" xmlns:a14="http://schemas.microsoft.com/office/drawing/2010/main">
-          <mc:Choice Requires="a14">
-            <p:sp>
-              <p:nvSpPr>
-                <p:cNvPr id="14" name="文字方塊 13">
-                  <a:extLst>
-                    <a:ext uri="{FF2B5EF4-FFF2-40B4-BE49-F238E27FC236}">
-                      <a16:creationId xmlns:a16="http://schemas.microsoft.com/office/drawing/2014/main" id="{31B16C9F-FEB9-4154-8591-78F8EE0D2D76}"/>
-                    </a:ext>
-                  </a:extLst>
-                </p:cNvPr>
-                <p:cNvSpPr txBox="1"/>
-                <p:nvPr/>
-              </p:nvSpPr>
-              <p:spPr>
-                <a:xfrm>
-                  <a:off x="772701" y="1723602"/>
-                  <a:ext cx="938080" cy="369332"/>
-                </a:xfrm>
-                <a:prstGeom prst="rect">
-                  <a:avLst/>
-                </a:prstGeom>
-                <a:noFill/>
-              </p:spPr>
-              <p:txBody>
-                <a:bodyPr wrap="square" rtlCol="0">
-                  <a:spAutoFit/>
-                </a:bodyPr>
-                <a:lstStyle/>
-                <a:p>
-                  <a:pPr/>
-                  <a14:m>
-                    <m:oMathPara xmlns:m="http://schemas.openxmlformats.org/officeDocument/2006/math">
-                      <m:oMathParaPr>
-                        <m:jc m:val="centerGroup"/>
-                      </m:oMathParaPr>
-                      <m:oMath xmlns:m="http://schemas.openxmlformats.org/officeDocument/2006/math">
-                        <m:r>
-                          <a:rPr lang="en-US" altLang="zh-TW" i="1" smtClean="0">
-                            <a:latin typeface="Cambria Math" panose="02040503050406030204" pitchFamily="18" charset="0"/>
-                          </a:rPr>
-                          <m:t>|</m:t>
-                        </m:r>
-                        <m:d>
-                          <m:dPr>
-                            <m:begChr m:val=""/>
-                            <m:endChr m:val="⟩"/>
-                            <m:ctrlPr>
-                              <a:rPr lang="en-US" altLang="zh-TW" i="1">
-                                <a:latin typeface="Cambria Math" panose="02040503050406030204" pitchFamily="18" charset="0"/>
-                              </a:rPr>
-                            </m:ctrlPr>
-                          </m:dPr>
-                          <m:e>
-                            <m:r>
-                              <a:rPr lang="en-US" altLang="zh-TW" b="0" i="1" smtClean="0">
-                                <a:latin typeface="Cambria Math" panose="02040503050406030204" pitchFamily="18" charset="0"/>
-                              </a:rPr>
-                              <m:t>1</m:t>
-                            </m:r>
-                            <m:r>
-                              <a:rPr lang="en-US" altLang="zh-TW" i="1">
-                                <a:latin typeface="Cambria Math" panose="02040503050406030204" pitchFamily="18" charset="0"/>
-                              </a:rPr>
-                              <m:t>, ℓ</m:t>
-                            </m:r>
-                          </m:e>
-                        </m:d>
-                      </m:oMath>
-                    </m:oMathPara>
-                  </a14:m>
-                  <a:endParaRPr lang="zh-TW" altLang="en-US" dirty="0"/>
-                </a:p>
-              </p:txBody>
-            </p:sp>
-          </mc:Choice>
-          <mc:Fallback xmlns="">
-            <p:sp>
-              <p:nvSpPr>
-                <p:cNvPr id="14" name="文字方塊 13">
-                  <a:extLst>
-                    <a:ext uri="{FF2B5EF4-FFF2-40B4-BE49-F238E27FC236}">
-                      <a16:creationId xmlns:a16="http://schemas.microsoft.com/office/drawing/2014/main" id="{31B16C9F-FEB9-4154-8591-78F8EE0D2D76}"/>
-                    </a:ext>
-                  </a:extLst>
-                </p:cNvPr>
-                <p:cNvSpPr txBox="1">
-                  <a:spLocks noRot="1" noChangeAspect="1" noMove="1" noResize="1" noEditPoints="1" noAdjustHandles="1" noChangeArrowheads="1" noChangeShapeType="1" noTextEdit="1"/>
-                </p:cNvSpPr>
-                <p:nvPr/>
-              </p:nvSpPr>
-              <p:spPr>
-                <a:xfrm>
-                  <a:off x="772701" y="1723602"/>
-                  <a:ext cx="938080" cy="369332"/>
-                </a:xfrm>
-                <a:prstGeom prst="rect">
-                  <a:avLst/>
-                </a:prstGeom>
-                <a:blipFill>
-                  <a:blip r:embed="rId9"/>
-                  <a:stretch>
-                    <a:fillRect t="-119672" r="-38961" b="-183607"/>
-                  </a:stretch>
-                </a:blipFill>
-              </p:spPr>
-              <p:txBody>
-                <a:bodyPr/>
-                <a:lstStyle/>
-                <a:p>
-                  <a:r>
-                    <a:rPr lang="zh-TW" altLang="en-US">
-                      <a:noFill/>
-                    </a:rPr>
-                    <a:t> </a:t>
-                  </a:r>
-                </a:p>
-              </p:txBody>
-            </p:sp>
-          </mc:Fallback>
-        </mc:AlternateContent>
-        <p:sp>
-          <p:nvSpPr>
-            <p:cNvPr id="16" name="等腰三角形 15">
-              <a:extLst>
-                <a:ext uri="{FF2B5EF4-FFF2-40B4-BE49-F238E27FC236}">
-                  <a16:creationId xmlns:a16="http://schemas.microsoft.com/office/drawing/2014/main" id="{D7A35C84-BDFA-4763-AB3E-90E6689A498B}"/>
-                </a:ext>
-              </a:extLst>
-            </p:cNvPr>
-            <p:cNvSpPr/>
-            <p:nvPr/>
-          </p:nvSpPr>
-          <p:spPr>
-            <a:xfrm rot="5400000">
-              <a:off x="984085" y="3917717"/>
-              <a:ext cx="641264" cy="430016"/>
-            </a:xfrm>
-            <a:prstGeom prst="triangle">
-              <a:avLst/>
-            </a:prstGeom>
-          </p:spPr>
-          <p:style>
-            <a:lnRef idx="0">
-              <a:schemeClr val="accent2"/>
-            </a:lnRef>
-            <a:fillRef idx="3">
-              <a:schemeClr val="accent2"/>
-            </a:fillRef>
-            <a:effectRef idx="3">
-              <a:schemeClr val="accent2"/>
-            </a:effectRef>
-            <a:fontRef idx="minor">
-              <a:schemeClr val="lt1"/>
-            </a:fontRef>
-          </p:style>
-          <p:txBody>
-            <a:bodyPr rot="0" spcFirstLastPara="0" vertOverflow="overflow" horzOverflow="overflow" vert="horz" wrap="square" lIns="91439" tIns="45720" rIns="91439" bIns="45720" numCol="1" spcCol="0" rtlCol="0" fromWordArt="0" anchor="ctr" anchorCtr="0" forceAA="0" compatLnSpc="1">
-              <a:prstTxWarp prst="textNoShape">
-                <a:avLst/>
-              </a:prstTxWarp>
-              <a:noAutofit/>
-            </a:bodyPr>
-            <a:lstStyle/>
-            <a:p>
-              <a:pPr algn="ctr"/>
-              <a:endParaRPr lang="zh-TW" altLang="en-US" dirty="0"/>
-            </a:p>
-          </p:txBody>
-        </p:sp>
-        <p:sp>
-          <p:nvSpPr>
-            <p:cNvPr id="10" name="Oval 23">
-              <a:extLst>
-                <a:ext uri="{FF2B5EF4-FFF2-40B4-BE49-F238E27FC236}">
-                  <a16:creationId xmlns:a16="http://schemas.microsoft.com/office/drawing/2014/main" id="{179D3563-D67E-4323-B7B8-A3DC650ABAA6}"/>
-                </a:ext>
-              </a:extLst>
-            </p:cNvPr>
-            <p:cNvSpPr/>
-            <p:nvPr/>
-          </p:nvSpPr>
-          <p:spPr>
-            <a:xfrm>
-              <a:off x="2409140" y="3413458"/>
-              <a:ext cx="295195" cy="305784"/>
-            </a:xfrm>
-            <a:prstGeom prst="ellipse">
-              <a:avLst/>
-            </a:prstGeom>
-            <a:gradFill flip="none" rotWithShape="1">
-              <a:gsLst>
-                <a:gs pos="100000">
-                  <a:schemeClr val="tx1">
-                    <a:lumMod val="85000"/>
-                    <a:lumOff val="15000"/>
-                  </a:schemeClr>
-                </a:gs>
-                <a:gs pos="50000">
-                  <a:schemeClr val="tx1">
-                    <a:lumMod val="65000"/>
-                    <a:lumOff val="35000"/>
-                    <a:tint val="44500"/>
-                    <a:satMod val="160000"/>
-                  </a:schemeClr>
-                </a:gs>
-                <a:gs pos="0">
-                  <a:schemeClr val="tx1">
-                    <a:lumMod val="65000"/>
-                    <a:lumOff val="35000"/>
-                    <a:tint val="23500"/>
-                    <a:satMod val="160000"/>
-                  </a:schemeClr>
-                </a:gs>
-              </a:gsLst>
-              <a:path path="circle">
-                <a:fillToRect l="50000" t="50000" r="50000" b="50000"/>
-              </a:path>
-              <a:tileRect/>
-            </a:gradFill>
-            <a:ln>
-              <a:solidFill>
-                <a:schemeClr val="tx1"/>
-              </a:solidFill>
-            </a:ln>
-          </p:spPr>
-          <p:style>
-            <a:lnRef idx="2">
-              <a:schemeClr val="accent1">
-                <a:shade val="50000"/>
-              </a:schemeClr>
-            </a:lnRef>
-            <a:fillRef idx="1">
-              <a:schemeClr val="accent1"/>
-            </a:fillRef>
-            <a:effectRef idx="0">
-              <a:schemeClr val="accent1"/>
-            </a:effectRef>
-            <a:fontRef idx="minor">
-              <a:schemeClr val="lt1"/>
-            </a:fontRef>
-          </p:style>
-          <p:txBody>
-            <a:bodyPr rtlCol="0" anchor="ctr"/>
-            <a:lstStyle/>
-            <a:p>
-              <a:pPr algn="ctr"/>
-              <a:endParaRPr lang="en-US" dirty="0">
-                <a:solidFill>
-                  <a:schemeClr val="tx1"/>
-                </a:solidFill>
-                <a:latin typeface="Times New Roman" panose="02020603050405020304" pitchFamily="18" charset="0"/>
-                <a:cs typeface="Times New Roman" panose="02020603050405020304" pitchFamily="18" charset="0"/>
-              </a:endParaRPr>
-            </a:p>
-          </p:txBody>
-        </p:sp>
-        <p:sp>
-          <p:nvSpPr>
-            <p:cNvPr id="11" name="Oval 20">
-              <a:extLst>
-                <a:ext uri="{FF2B5EF4-FFF2-40B4-BE49-F238E27FC236}">
-                  <a16:creationId xmlns:a16="http://schemas.microsoft.com/office/drawing/2014/main" id="{488E8B5C-39FC-4924-B912-85F1C4D9FBA1}"/>
-                </a:ext>
-              </a:extLst>
-            </p:cNvPr>
-            <p:cNvSpPr/>
-            <p:nvPr/>
-          </p:nvSpPr>
-          <p:spPr>
-            <a:xfrm>
-              <a:off x="-215120" y="3413458"/>
-              <a:ext cx="295195" cy="305784"/>
-            </a:xfrm>
-            <a:prstGeom prst="ellipse">
-              <a:avLst/>
-            </a:prstGeom>
-            <a:gradFill flip="none" rotWithShape="1">
-              <a:gsLst>
-                <a:gs pos="100000">
-                  <a:schemeClr val="tx1">
-                    <a:lumMod val="85000"/>
-                    <a:lumOff val="15000"/>
-                  </a:schemeClr>
-                </a:gs>
-                <a:gs pos="50000">
-                  <a:schemeClr val="tx1">
-                    <a:lumMod val="65000"/>
-                    <a:lumOff val="35000"/>
-                    <a:tint val="44500"/>
-                    <a:satMod val="160000"/>
-                  </a:schemeClr>
-                </a:gs>
-                <a:gs pos="0">
-                  <a:schemeClr val="tx1">
-                    <a:lumMod val="65000"/>
-                    <a:lumOff val="35000"/>
-                    <a:tint val="23500"/>
-                    <a:satMod val="160000"/>
-                  </a:schemeClr>
-                </a:gs>
-              </a:gsLst>
-              <a:path path="circle">
-                <a:fillToRect l="50000" t="50000" r="50000" b="50000"/>
-              </a:path>
-              <a:tileRect/>
-            </a:gradFill>
-            <a:ln>
-              <a:solidFill>
-                <a:schemeClr val="tx1"/>
-              </a:solidFill>
-            </a:ln>
-          </p:spPr>
-          <p:style>
-            <a:lnRef idx="2">
-              <a:schemeClr val="accent1">
-                <a:shade val="50000"/>
-              </a:schemeClr>
-            </a:lnRef>
-            <a:fillRef idx="1">
-              <a:schemeClr val="accent1"/>
-            </a:fillRef>
-            <a:effectRef idx="0">
-              <a:schemeClr val="accent1"/>
-            </a:effectRef>
-            <a:fontRef idx="minor">
-              <a:schemeClr val="lt1"/>
-            </a:fontRef>
-          </p:style>
-          <p:txBody>
-            <a:bodyPr rtlCol="0" anchor="ctr"/>
-            <a:lstStyle/>
-            <a:p>
-              <a:pPr algn="ctr"/>
-              <a:endParaRPr lang="en-US" dirty="0">
-                <a:solidFill>
-                  <a:schemeClr val="tx1"/>
-                </a:solidFill>
-                <a:latin typeface="Times New Roman" panose="02020603050405020304" pitchFamily="18" charset="0"/>
-                <a:cs typeface="Times New Roman" panose="02020603050405020304" pitchFamily="18" charset="0"/>
-              </a:endParaRPr>
-            </a:p>
-          </p:txBody>
-        </p:sp>
-        <p:sp>
-          <p:nvSpPr>
-            <p:cNvPr id="19" name="SVO">
-              <a:extLst>
-                <a:ext uri="{FF2B5EF4-FFF2-40B4-BE49-F238E27FC236}">
-                  <a16:creationId xmlns:a16="http://schemas.microsoft.com/office/drawing/2014/main" id="{55573B33-9BFC-4504-A639-268A738D7B41}"/>
-                </a:ext>
-              </a:extLst>
-            </p:cNvPr>
-            <p:cNvSpPr/>
-            <p:nvPr/>
-          </p:nvSpPr>
-          <p:spPr>
-            <a:xfrm>
-              <a:off x="584429" y="2211567"/>
-              <a:ext cx="1311980" cy="2718084"/>
-            </a:xfrm>
-            <a:prstGeom prst="ellipse">
-              <a:avLst/>
-            </a:prstGeom>
-            <a:noFill/>
-            <a:ln w="25400">
-              <a:solidFill>
-                <a:schemeClr val="bg1">
-                  <a:lumMod val="50000"/>
-                </a:schemeClr>
-              </a:solidFill>
-              <a:prstDash val="dash"/>
-            </a:ln>
-          </p:spPr>
-          <p:style>
-            <a:lnRef idx="2">
-              <a:schemeClr val="accent1">
-                <a:shade val="50000"/>
-              </a:schemeClr>
-            </a:lnRef>
-            <a:fillRef idx="1">
-              <a:schemeClr val="accent1"/>
-            </a:fillRef>
-            <a:effectRef idx="0">
-              <a:schemeClr val="accent1"/>
-            </a:effectRef>
-            <a:fontRef idx="minor">
-              <a:schemeClr val="lt1"/>
-            </a:fontRef>
-          </p:style>
-          <p:txBody>
-            <a:bodyPr rtlCol="0" anchor="ctr"/>
-            <a:lstStyle/>
-            <a:p>
-              <a:pPr algn="ctr"/>
-              <a:endParaRPr lang="en-US" dirty="0"/>
-            </a:p>
-          </p:txBody>
-        </p:sp>
-        <p:sp>
-          <p:nvSpPr>
-            <p:cNvPr id="9" name="Oval 22">
-              <a:extLst>
-                <a:ext uri="{FF2B5EF4-FFF2-40B4-BE49-F238E27FC236}">
-                  <a16:creationId xmlns:a16="http://schemas.microsoft.com/office/drawing/2014/main" id="{062E3D45-5D85-434C-9C6F-D23B44DE6745}"/>
-                </a:ext>
-              </a:extLst>
-            </p:cNvPr>
-            <p:cNvSpPr/>
-            <p:nvPr/>
-          </p:nvSpPr>
-          <p:spPr>
-            <a:xfrm>
-              <a:off x="1711553" y="3931865"/>
-              <a:ext cx="295195" cy="305784"/>
-            </a:xfrm>
-            <a:prstGeom prst="ellipse">
-              <a:avLst/>
-            </a:prstGeom>
-            <a:gradFill flip="none" rotWithShape="1">
-              <a:gsLst>
-                <a:gs pos="100000">
-                  <a:schemeClr val="tx1">
-                    <a:lumMod val="85000"/>
-                    <a:lumOff val="15000"/>
-                  </a:schemeClr>
-                </a:gs>
-                <a:gs pos="50000">
-                  <a:schemeClr val="tx1">
-                    <a:lumMod val="65000"/>
-                    <a:lumOff val="35000"/>
-                    <a:tint val="44500"/>
-                    <a:satMod val="160000"/>
-                  </a:schemeClr>
-                </a:gs>
-                <a:gs pos="0">
-                  <a:schemeClr val="tx1">
-                    <a:lumMod val="65000"/>
-                    <a:lumOff val="35000"/>
-                    <a:tint val="23500"/>
-                    <a:satMod val="160000"/>
-                  </a:schemeClr>
-                </a:gs>
-              </a:gsLst>
-              <a:path path="circle">
-                <a:fillToRect l="50000" t="50000" r="50000" b="50000"/>
-              </a:path>
-              <a:tileRect/>
-            </a:gradFill>
-            <a:ln>
-              <a:solidFill>
-                <a:schemeClr val="tx1"/>
-              </a:solidFill>
-            </a:ln>
-          </p:spPr>
-          <p:style>
-            <a:lnRef idx="2">
-              <a:schemeClr val="accent1">
-                <a:shade val="50000"/>
-              </a:schemeClr>
-            </a:lnRef>
-            <a:fillRef idx="1">
-              <a:schemeClr val="accent1"/>
-            </a:fillRef>
-            <a:effectRef idx="0">
-              <a:schemeClr val="accent1"/>
-            </a:effectRef>
-            <a:fontRef idx="minor">
-              <a:schemeClr val="lt1"/>
-            </a:fontRef>
-          </p:style>
-          <p:txBody>
-            <a:bodyPr rtlCol="0" anchor="ctr"/>
-            <a:lstStyle/>
-            <a:p>
-              <a:pPr algn="ctr"/>
-              <a:endParaRPr lang="en-US" dirty="0">
-                <a:solidFill>
-                  <a:schemeClr val="tx1"/>
-                </a:solidFill>
-                <a:latin typeface="Times New Roman" panose="02020603050405020304" pitchFamily="18" charset="0"/>
-                <a:cs typeface="Times New Roman" panose="02020603050405020304" pitchFamily="18" charset="0"/>
-              </a:endParaRPr>
-            </a:p>
-          </p:txBody>
-        </p:sp>
-      </p:grpSp>
-      <mc:AlternateContent xmlns:mc="http://schemas.openxmlformats.org/markup-compatibility/2006" xmlns:a14="http://schemas.microsoft.com/office/drawing/2010/main">
-        <mc:Choice Requires="a14">
-          <p:sp>
-            <p:nvSpPr>
-              <p:cNvPr id="43" name="文字方塊 42">
-                <a:extLst>
-                  <a:ext uri="{FF2B5EF4-FFF2-40B4-BE49-F238E27FC236}">
-                    <a16:creationId xmlns:a16="http://schemas.microsoft.com/office/drawing/2014/main" id="{66D7E432-829E-4FA4-A6C7-DECCE799C731}"/>
-                  </a:ext>
-                </a:extLst>
-              </p:cNvPr>
-              <p:cNvSpPr txBox="1"/>
-              <p:nvPr/>
-            </p:nvSpPr>
-            <p:spPr>
-              <a:xfrm rot="16200000">
-                <a:off x="5439840" y="3950927"/>
-                <a:ext cx="538983" cy="369332"/>
-              </a:xfrm>
-              <a:prstGeom prst="rect">
-                <a:avLst/>
-              </a:prstGeom>
-              <a:noFill/>
-            </p:spPr>
-            <p:txBody>
-              <a:bodyPr wrap="square" rtlCol="0">
-                <a:spAutoFit/>
-              </a:bodyPr>
-              <a:lstStyle/>
-              <a:p>
-                <a:pPr/>
-                <a14:m>
-                  <m:oMathPara xmlns:m="http://schemas.openxmlformats.org/officeDocument/2006/math">
-                    <m:oMathParaPr>
-                      <m:jc m:val="centerGroup"/>
-                    </m:oMathParaPr>
-                    <m:oMath xmlns:m="http://schemas.openxmlformats.org/officeDocument/2006/math">
-                      <m:r>
-                        <m:rPr>
-                          <m:sty m:val="p"/>
-                        </m:rPr>
-                        <a:rPr lang="en-US" altLang="zh-TW">
-                          <a:latin typeface="Cambria Math" panose="02040503050406030204" pitchFamily="18" charset="0"/>
-                        </a:rPr>
-                        <m:t>a</m:t>
-                      </m:r>
-                      <m:r>
-                        <a:rPr lang="en-US" altLang="zh-TW">
-                          <a:latin typeface="Cambria Math" panose="02040503050406030204" pitchFamily="18" charset="0"/>
-                        </a:rPr>
-                        <m:t>.</m:t>
-                      </m:r>
-                      <m:r>
-                        <m:rPr>
-                          <m:sty m:val="p"/>
-                        </m:rPr>
-                        <a:rPr lang="en-US" altLang="zh-TW">
-                          <a:latin typeface="Cambria Math" panose="02040503050406030204" pitchFamily="18" charset="0"/>
-                        </a:rPr>
-                        <m:t>u</m:t>
-                      </m:r>
-                      <m:r>
-                        <a:rPr lang="en-US" altLang="zh-TW">
-                          <a:latin typeface="Cambria Math" panose="02040503050406030204" pitchFamily="18" charset="0"/>
-                        </a:rPr>
-                        <m:t>.</m:t>
-                      </m:r>
-                    </m:oMath>
-                  </m:oMathPara>
-                </a14:m>
-                <a:endParaRPr lang="zh-TW" altLang="en-US" dirty="0"/>
-              </a:p>
-            </p:txBody>
-          </p:sp>
-        </mc:Choice>
-        <mc:Fallback xmlns="">
-          <p:sp>
-            <p:nvSpPr>
-              <p:cNvPr id="43" name="文字方塊 42">
-                <a:extLst>
-                  <a:ext uri="{FF2B5EF4-FFF2-40B4-BE49-F238E27FC236}">
-                    <a16:creationId xmlns:a16="http://schemas.microsoft.com/office/drawing/2014/main" id="{66D7E432-829E-4FA4-A6C7-DECCE799C731}"/>
-                  </a:ext>
-                </a:extLst>
-              </p:cNvPr>
-              <p:cNvSpPr txBox="1">
-                <a:spLocks noRot="1" noChangeAspect="1" noMove="1" noResize="1" noEditPoints="1" noAdjustHandles="1" noChangeArrowheads="1" noChangeShapeType="1" noTextEdit="1"/>
-              </p:cNvSpPr>
-              <p:nvPr/>
-            </p:nvSpPr>
-            <p:spPr>
-              <a:xfrm rot="16200000">
-                <a:off x="5439840" y="3950927"/>
-                <a:ext cx="538983" cy="369332"/>
-              </a:xfrm>
-              <a:prstGeom prst="rect">
-                <a:avLst/>
-              </a:prstGeom>
-              <a:blipFill>
-                <a:blip r:embed="rId10"/>
-                <a:stretch>
-                  <a:fillRect/>
-                </a:stretch>
-              </a:blipFill>
-            </p:spPr>
-            <p:txBody>
-              <a:bodyPr/>
-              <a:lstStyle/>
-              <a:p>
-                <a:r>
-                  <a:rPr lang="zh-TW" altLang="en-US">
-                    <a:noFill/>
-                  </a:rPr>
-                  <a:t> </a:t>
-                </a:r>
-              </a:p>
-            </p:txBody>
-          </p:sp>
-        </mc:Fallback>
-      </mc:AlternateContent>
-      <mc:AlternateContent xmlns:mc="http://schemas.openxmlformats.org/markup-compatibility/2006" xmlns:a14="http://schemas.microsoft.com/office/drawing/2010/main">
-        <mc:Choice Requires="a14">
-          <p:sp>
-            <p:nvSpPr>
-              <p:cNvPr id="44" name="文字方塊 43">
-                <a:extLst>
-                  <a:ext uri="{FF2B5EF4-FFF2-40B4-BE49-F238E27FC236}">
-                    <a16:creationId xmlns:a16="http://schemas.microsoft.com/office/drawing/2014/main" id="{75D42583-E55F-4E75-94A9-07D6F15D46CE}"/>
-                  </a:ext>
-                </a:extLst>
-              </p:cNvPr>
-              <p:cNvSpPr txBox="1"/>
-              <p:nvPr/>
-            </p:nvSpPr>
-            <p:spPr>
-              <a:xfrm rot="16200000">
-                <a:off x="5439842" y="1538942"/>
-                <a:ext cx="538983" cy="369332"/>
-              </a:xfrm>
-              <a:prstGeom prst="rect">
-                <a:avLst/>
-              </a:prstGeom>
-              <a:noFill/>
-            </p:spPr>
-            <p:txBody>
-              <a:bodyPr wrap="square" rtlCol="0">
-                <a:spAutoFit/>
-              </a:bodyPr>
-              <a:lstStyle/>
-              <a:p>
-                <a:pPr/>
-                <a14:m>
-                  <m:oMathPara xmlns:m="http://schemas.openxmlformats.org/officeDocument/2006/math">
-                    <m:oMathParaPr>
-                      <m:jc m:val="centerGroup"/>
-                    </m:oMathParaPr>
-                    <m:oMath xmlns:m="http://schemas.openxmlformats.org/officeDocument/2006/math">
-                      <m:r>
-                        <m:rPr>
-                          <m:sty m:val="p"/>
-                        </m:rPr>
-                        <a:rPr lang="en-US" altLang="zh-TW">
-                          <a:latin typeface="Cambria Math" panose="02040503050406030204" pitchFamily="18" charset="0"/>
-                        </a:rPr>
-                        <m:t>a</m:t>
-                      </m:r>
-                      <m:r>
-                        <a:rPr lang="en-US" altLang="zh-TW">
-                          <a:latin typeface="Cambria Math" panose="02040503050406030204" pitchFamily="18" charset="0"/>
-                        </a:rPr>
-                        <m:t>.</m:t>
-                      </m:r>
-                      <m:r>
-                        <m:rPr>
-                          <m:sty m:val="p"/>
-                        </m:rPr>
-                        <a:rPr lang="en-US" altLang="zh-TW">
-                          <a:latin typeface="Cambria Math" panose="02040503050406030204" pitchFamily="18" charset="0"/>
-                        </a:rPr>
-                        <m:t>u</m:t>
-                      </m:r>
-                      <m:r>
-                        <a:rPr lang="en-US" altLang="zh-TW">
-                          <a:latin typeface="Cambria Math" panose="02040503050406030204" pitchFamily="18" charset="0"/>
-                        </a:rPr>
-                        <m:t>.</m:t>
-                      </m:r>
-                    </m:oMath>
-                  </m:oMathPara>
-                </a14:m>
-                <a:endParaRPr lang="zh-TW" altLang="en-US" dirty="0"/>
-              </a:p>
-            </p:txBody>
-          </p:sp>
-        </mc:Choice>
-        <mc:Fallback xmlns="">
-          <p:sp>
-            <p:nvSpPr>
-              <p:cNvPr id="44" name="文字方塊 43">
-                <a:extLst>
-                  <a:ext uri="{FF2B5EF4-FFF2-40B4-BE49-F238E27FC236}">
-                    <a16:creationId xmlns:a16="http://schemas.microsoft.com/office/drawing/2014/main" id="{75D42583-E55F-4E75-94A9-07D6F15D46CE}"/>
-                  </a:ext>
-                </a:extLst>
-              </p:cNvPr>
-              <p:cNvSpPr txBox="1">
-                <a:spLocks noRot="1" noChangeAspect="1" noMove="1" noResize="1" noEditPoints="1" noAdjustHandles="1" noChangeArrowheads="1" noChangeShapeType="1" noTextEdit="1"/>
-              </p:cNvSpPr>
-              <p:nvPr/>
-            </p:nvSpPr>
-            <p:spPr>
-              <a:xfrm rot="16200000">
-                <a:off x="5439842" y="1538942"/>
-                <a:ext cx="538983" cy="369332"/>
+                <a:off x="2907593" y="1730298"/>
+                <a:ext cx="344914" cy="269626"/>
               </a:xfrm>
               <a:prstGeom prst="rect">
                 <a:avLst/>
@@ -8276,8 +5476,8 @@
             </p:nvSpPr>
             <p:spPr>
               <a:xfrm rot="16200000">
-                <a:off x="5439840" y="2745662"/>
-                <a:ext cx="538983" cy="369332"/>
+                <a:off x="2907593" y="2492446"/>
+                <a:ext cx="344914" cy="269626"/>
               </a:xfrm>
               <a:prstGeom prst="rect">
                 <a:avLst/>
@@ -8301,13 +5501,13 @@
                         <m:rPr>
                           <m:sty m:val="p"/>
                         </m:rPr>
-                        <a:rPr lang="en-US" altLang="zh-TW">
+                        <a:rPr lang="en-US" altLang="zh-TW" sz="1152">
                           <a:latin typeface="Cambria Math" panose="02040503050406030204" pitchFamily="18" charset="0"/>
                         </a:rPr>
                         <m:t>a</m:t>
                       </m:r>
                       <m:r>
-                        <a:rPr lang="en-US" altLang="zh-TW">
+                        <a:rPr lang="en-US" altLang="zh-TW" sz="1152">
                           <a:latin typeface="Cambria Math" panose="02040503050406030204" pitchFamily="18" charset="0"/>
                         </a:rPr>
                         <m:t>.</m:t>
@@ -8316,13 +5516,13 @@
                         <m:rPr>
                           <m:sty m:val="p"/>
                         </m:rPr>
-                        <a:rPr lang="en-US" altLang="zh-TW">
+                        <a:rPr lang="en-US" altLang="zh-TW" sz="1152">
                           <a:latin typeface="Cambria Math" panose="02040503050406030204" pitchFamily="18" charset="0"/>
                         </a:rPr>
                         <m:t>u</m:t>
                       </m:r>
                       <m:r>
-                        <a:rPr lang="en-US" altLang="zh-TW">
+                        <a:rPr lang="en-US" altLang="zh-TW" sz="1152">
                           <a:latin typeface="Cambria Math" panose="02040503050406030204" pitchFamily="18" charset="0"/>
                         </a:rPr>
                         <m:t>.</m:t>
@@ -8330,7 +5530,7 @@
                     </m:oMath>
                   </m:oMathPara>
                 </a14:m>
-                <a:endParaRPr lang="zh-TW" altLang="en-US" dirty="0"/>
+                <a:endParaRPr lang="zh-TW" altLang="en-US" sz="1152" dirty="0"/>
               </a:p>
             </p:txBody>
           </p:sp>
@@ -8352,14 +5552,14 @@
             </p:nvSpPr>
             <p:spPr>
               <a:xfrm rot="16200000">
-                <a:off x="5439840" y="2745662"/>
-                <a:ext cx="538983" cy="369332"/>
+                <a:off x="2907593" y="2492446"/>
+                <a:ext cx="344914" cy="269626"/>
               </a:xfrm>
               <a:prstGeom prst="rect">
                 <a:avLst/>
               </a:prstGeom>
               <a:blipFill>
-                <a:blip r:embed="rId12"/>
+                <a:blip r:embed="rId11"/>
                 <a:stretch>
                   <a:fillRect/>
                 </a:stretch>
@@ -8396,8 +5596,8 @@
             </p:nvSpPr>
             <p:spPr>
               <a:xfrm>
-                <a:off x="4669574" y="3529682"/>
-                <a:ext cx="778015" cy="369332"/>
+                <a:off x="3441234" y="3007919"/>
+                <a:ext cx="497879" cy="442493"/>
               </a:xfrm>
               <a:prstGeom prst="rect">
                 <a:avLst/>
@@ -8410,23 +5610,22 @@
               </a:bodyPr>
               <a:lstStyle/>
               <a:p>
-                <a:pPr algn="ctr"/>
                 <a14:m>
                   <m:oMath xmlns:m="http://schemas.openxmlformats.org/officeDocument/2006/math">
                     <m:r>
-                      <a:rPr lang="en-US" altLang="zh-TW" i="1">
+                      <a:rPr lang="en-US" altLang="zh-TW" sz="1152" i="1">
                         <a:latin typeface="Cambria Math" panose="02040503050406030204" pitchFamily="18" charset="0"/>
                       </a:rPr>
                       <m:t>𝛼</m:t>
                     </m:r>
                     <m:r>
-                      <a:rPr lang="en-US" altLang="zh-TW" i="1">
+                      <a:rPr lang="en-US" altLang="zh-TW" sz="1152" i="1">
                         <a:latin typeface="Cambria Math" panose="02040503050406030204" pitchFamily="18" charset="0"/>
                       </a:rPr>
                       <m:t>=</m:t>
                     </m:r>
                     <m:r>
-                      <a:rPr lang="en-US" altLang="zh-TW" i="1">
+                      <a:rPr lang="en-US" altLang="zh-TW" sz="1152" i="1">
                         <a:latin typeface="Cambria Math" panose="02040503050406030204" pitchFamily="18" charset="0"/>
                       </a:rPr>
                       <m:t>𝜋</m:t>
@@ -8434,7 +5633,7 @@
                   </m:oMath>
                 </a14:m>
                 <a:r>
-                  <a:rPr lang="zh-TW" altLang="en-US" dirty="0"/>
+                  <a:rPr lang="zh-TW" altLang="en-US" sz="1152" dirty="0"/>
                   <a:t> </a:t>
                 </a:r>
               </a:p>
@@ -8458,14 +5657,14 @@
             </p:nvSpPr>
             <p:spPr>
               <a:xfrm>
-                <a:off x="4669574" y="3529682"/>
-                <a:ext cx="778015" cy="369332"/>
+                <a:off x="3441234" y="3007919"/>
+                <a:ext cx="497879" cy="442493"/>
               </a:xfrm>
               <a:prstGeom prst="rect">
                 <a:avLst/>
               </a:prstGeom>
               <a:blipFill>
-                <a:blip r:embed="rId13"/>
+                <a:blip r:embed="rId12"/>
                 <a:stretch>
                   <a:fillRect/>
                 </a:stretch>
@@ -8502,8 +5701,8 @@
             </p:nvSpPr>
             <p:spPr>
               <a:xfrm>
-                <a:off x="4669574" y="1127749"/>
-                <a:ext cx="778015" cy="369332"/>
+                <a:off x="3441234" y="1474904"/>
+                <a:ext cx="497879" cy="442493"/>
               </a:xfrm>
               <a:prstGeom prst="rect">
                 <a:avLst/>
@@ -8516,17 +5715,16 @@
               </a:bodyPr>
               <a:lstStyle/>
               <a:p>
-                <a:pPr algn="ctr"/>
                 <a14:m>
                   <m:oMath xmlns:m="http://schemas.openxmlformats.org/officeDocument/2006/math">
                     <m:r>
-                      <a:rPr lang="en-US" altLang="zh-TW" i="1">
+                      <a:rPr lang="en-US" altLang="zh-TW" sz="1152" i="1">
                         <a:latin typeface="Cambria Math" panose="02040503050406030204" pitchFamily="18" charset="0"/>
                       </a:rPr>
                       <m:t>𝛼</m:t>
                     </m:r>
                     <m:r>
-                      <a:rPr lang="en-US" altLang="zh-TW" i="1">
+                      <a:rPr lang="en-US" altLang="zh-TW" sz="1152" i="1">
                         <a:latin typeface="Cambria Math" panose="02040503050406030204" pitchFamily="18" charset="0"/>
                       </a:rPr>
                       <m:t>=0</m:t>
@@ -8534,7 +5732,7 @@
                   </m:oMath>
                 </a14:m>
                 <a:r>
-                  <a:rPr lang="zh-TW" altLang="en-US" dirty="0"/>
+                  <a:rPr lang="zh-TW" altLang="en-US" sz="1152" dirty="0"/>
                   <a:t> </a:t>
                 </a:r>
               </a:p>
@@ -8558,14 +5756,14 @@
             </p:nvSpPr>
             <p:spPr>
               <a:xfrm>
-                <a:off x="4669574" y="1127749"/>
-                <a:ext cx="778015" cy="369332"/>
+                <a:off x="3441234" y="1474904"/>
+                <a:ext cx="497879" cy="442493"/>
               </a:xfrm>
               <a:prstGeom prst="rect">
                 <a:avLst/>
               </a:prstGeom>
               <a:blipFill>
-                <a:blip r:embed="rId14"/>
+                <a:blip r:embed="rId13"/>
                 <a:stretch>
                   <a:fillRect/>
                 </a:stretch>
@@ -8602,8 +5800,8 @@
             </p:nvSpPr>
             <p:spPr>
               <a:xfrm>
-                <a:off x="4548804" y="2325077"/>
-                <a:ext cx="1019555" cy="369332"/>
+                <a:off x="3441227" y="2237051"/>
+                <a:ext cx="652448" cy="442493"/>
               </a:xfrm>
               <a:prstGeom prst="rect">
                 <a:avLst/>
@@ -8616,29 +5814,28 @@
               </a:bodyPr>
               <a:lstStyle/>
               <a:p>
-                <a:pPr algn="ctr"/>
                 <a14:m>
                   <m:oMath xmlns:m="http://schemas.openxmlformats.org/officeDocument/2006/math">
                     <m:r>
-                      <a:rPr lang="en-US" altLang="zh-TW" i="1">
+                      <a:rPr lang="en-US" altLang="zh-TW" sz="1152" i="1">
                         <a:latin typeface="Cambria Math" panose="02040503050406030204" pitchFamily="18" charset="0"/>
                       </a:rPr>
                       <m:t>𝛼</m:t>
                     </m:r>
                     <m:r>
-                      <a:rPr lang="en-US" altLang="zh-TW" i="1">
+                      <a:rPr lang="en-US" altLang="zh-TW" sz="1152" i="1">
                         <a:latin typeface="Cambria Math" panose="02040503050406030204" pitchFamily="18" charset="0"/>
                       </a:rPr>
                       <m:t>=</m:t>
                     </m:r>
                     <m:r>
-                      <a:rPr lang="en-US" altLang="zh-TW" i="1">
+                      <a:rPr lang="en-US" altLang="zh-TW" sz="1152" i="1">
                         <a:latin typeface="Cambria Math" panose="02040503050406030204" pitchFamily="18" charset="0"/>
                       </a:rPr>
                       <m:t>𝜋</m:t>
                     </m:r>
                     <m:r>
-                      <a:rPr lang="en-US" altLang="zh-TW" i="1">
+                      <a:rPr lang="en-US" altLang="zh-TW" sz="1152" i="1">
                         <a:latin typeface="Cambria Math" panose="02040503050406030204" pitchFamily="18" charset="0"/>
                       </a:rPr>
                       <m:t>/2</m:t>
@@ -8646,7 +5843,7 @@
                   </m:oMath>
                 </a14:m>
                 <a:r>
-                  <a:rPr lang="zh-TW" altLang="en-US" dirty="0"/>
+                  <a:rPr lang="zh-TW" altLang="en-US" sz="1152" dirty="0"/>
                   <a:t> </a:t>
                 </a:r>
               </a:p>
@@ -8670,400 +5867,16 @@
             </p:nvSpPr>
             <p:spPr>
               <a:xfrm>
-                <a:off x="4548804" y="2325077"/>
-                <a:ext cx="1019555" cy="369332"/>
+                <a:off x="3441227" y="2237051"/>
+                <a:ext cx="652448" cy="442493"/>
               </a:xfrm>
               <a:prstGeom prst="rect">
                 <a:avLst/>
               </a:prstGeom>
               <a:blipFill>
-                <a:blip r:embed="rId15"/>
+                <a:blip r:embed="rId14"/>
                 <a:stretch>
-                  <a:fillRect b="-13115"/>
-                </a:stretch>
-              </a:blipFill>
-            </p:spPr>
-            <p:txBody>
-              <a:bodyPr/>
-              <a:lstStyle/>
-              <a:p>
-                <a:r>
-                  <a:rPr lang="zh-TW" altLang="en-US">
-                    <a:noFill/>
-                  </a:rPr>
-                  <a:t> </a:t>
-                </a:r>
-              </a:p>
-            </p:txBody>
-          </p:sp>
-        </mc:Fallback>
-      </mc:AlternateContent>
-      <mc:AlternateContent xmlns:mc="http://schemas.openxmlformats.org/markup-compatibility/2006" xmlns:a14="http://schemas.microsoft.com/office/drawing/2010/main">
-        <mc:Choice Requires="a14">
-          <p:sp>
-            <p:nvSpPr>
-              <p:cNvPr id="65" name="文字方塊 64">
-                <a:extLst>
-                  <a:ext uri="{FF2B5EF4-FFF2-40B4-BE49-F238E27FC236}">
-                    <a16:creationId xmlns:a16="http://schemas.microsoft.com/office/drawing/2014/main" id="{12227D7D-795D-4A5B-982D-19FD8C9D579C}"/>
-                  </a:ext>
-                </a:extLst>
-              </p:cNvPr>
-              <p:cNvSpPr txBox="1"/>
-              <p:nvPr/>
-            </p:nvSpPr>
-            <p:spPr>
-              <a:xfrm>
-                <a:off x="6533570" y="4452759"/>
-                <a:ext cx="938080" cy="369332"/>
-              </a:xfrm>
-              <a:prstGeom prst="rect">
-                <a:avLst/>
-              </a:prstGeom>
-              <a:noFill/>
-            </p:spPr>
-            <p:txBody>
-              <a:bodyPr wrap="square" rtlCol="0">
-                <a:spAutoFit/>
-              </a:bodyPr>
-              <a:lstStyle/>
-              <a:p>
-                <a:pPr/>
-                <a14:m>
-                  <m:oMathPara xmlns:m="http://schemas.openxmlformats.org/officeDocument/2006/math">
-                    <m:oMathParaPr>
-                      <m:jc m:val="centerGroup"/>
-                    </m:oMathParaPr>
-                    <m:oMath xmlns:m="http://schemas.openxmlformats.org/officeDocument/2006/math">
-                      <m:r>
-                        <a:rPr lang="en-US" altLang="zh-TW" i="1">
-                          <a:latin typeface="Cambria Math" panose="02040503050406030204" pitchFamily="18" charset="0"/>
-                        </a:rPr>
-                        <m:t>ℓ</m:t>
-                      </m:r>
-                    </m:oMath>
-                  </m:oMathPara>
-                </a14:m>
-                <a:endParaRPr lang="zh-TW" altLang="en-US" dirty="0"/>
-              </a:p>
-            </p:txBody>
-          </p:sp>
-        </mc:Choice>
-        <mc:Fallback xmlns="">
-          <p:sp>
-            <p:nvSpPr>
-              <p:cNvPr id="65" name="文字方塊 64">
-                <a:extLst>
-                  <a:ext uri="{FF2B5EF4-FFF2-40B4-BE49-F238E27FC236}">
-                    <a16:creationId xmlns:a16="http://schemas.microsoft.com/office/drawing/2014/main" id="{12227D7D-795D-4A5B-982D-19FD8C9D579C}"/>
-                  </a:ext>
-                </a:extLst>
-              </p:cNvPr>
-              <p:cNvSpPr txBox="1">
-                <a:spLocks noRot="1" noChangeAspect="1" noMove="1" noResize="1" noEditPoints="1" noAdjustHandles="1" noChangeArrowheads="1" noChangeShapeType="1" noTextEdit="1"/>
-              </p:cNvSpPr>
-              <p:nvPr/>
-            </p:nvSpPr>
-            <p:spPr>
-              <a:xfrm>
-                <a:off x="6533570" y="4452759"/>
-                <a:ext cx="938080" cy="369332"/>
-              </a:xfrm>
-              <a:prstGeom prst="rect">
-                <a:avLst/>
-              </a:prstGeom>
-              <a:blipFill>
-                <a:blip r:embed="rId16"/>
-                <a:stretch>
-                  <a:fillRect/>
-                </a:stretch>
-              </a:blipFill>
-            </p:spPr>
-            <p:txBody>
-              <a:bodyPr/>
-              <a:lstStyle/>
-              <a:p>
-                <a:r>
-                  <a:rPr lang="zh-TW" altLang="en-US">
-                    <a:noFill/>
-                  </a:rPr>
-                  <a:t> </a:t>
-                </a:r>
-              </a:p>
-            </p:txBody>
-          </p:sp>
-        </mc:Fallback>
-      </mc:AlternateContent>
-      <mc:AlternateContent xmlns:mc="http://schemas.openxmlformats.org/markup-compatibility/2006" xmlns:a14="http://schemas.microsoft.com/office/drawing/2010/main">
-        <mc:Choice Requires="a14">
-          <p:sp>
-            <p:nvSpPr>
-              <p:cNvPr id="66" name="文字方塊 65">
-                <a:extLst>
-                  <a:ext uri="{FF2B5EF4-FFF2-40B4-BE49-F238E27FC236}">
-                    <a16:creationId xmlns:a16="http://schemas.microsoft.com/office/drawing/2014/main" id="{4D82635B-412F-4294-9D01-8D1D291F9573}"/>
-                  </a:ext>
-                </a:extLst>
-              </p:cNvPr>
-              <p:cNvSpPr txBox="1"/>
-              <p:nvPr/>
-            </p:nvSpPr>
-            <p:spPr>
-              <a:xfrm>
-                <a:off x="13492456" y="4452759"/>
-                <a:ext cx="938080" cy="369332"/>
-              </a:xfrm>
-              <a:prstGeom prst="rect">
-                <a:avLst/>
-              </a:prstGeom>
-              <a:noFill/>
-            </p:spPr>
-            <p:txBody>
-              <a:bodyPr wrap="square" rtlCol="0">
-                <a:spAutoFit/>
-              </a:bodyPr>
-              <a:lstStyle/>
-              <a:p>
-                <a:pPr/>
-                <a14:m>
-                  <m:oMathPara xmlns:m="http://schemas.openxmlformats.org/officeDocument/2006/math">
-                    <m:oMathParaPr>
-                      <m:jc m:val="centerGroup"/>
-                    </m:oMathParaPr>
-                    <m:oMath xmlns:m="http://schemas.openxmlformats.org/officeDocument/2006/math">
-                      <m:r>
-                        <a:rPr lang="en-US" altLang="zh-TW" i="1">
-                          <a:latin typeface="Cambria Math" panose="02040503050406030204" pitchFamily="18" charset="0"/>
-                        </a:rPr>
-                        <m:t>ℓ</m:t>
-                      </m:r>
-                    </m:oMath>
-                  </m:oMathPara>
-                </a14:m>
-                <a:endParaRPr lang="zh-TW" altLang="en-US" dirty="0"/>
-              </a:p>
-            </p:txBody>
-          </p:sp>
-        </mc:Choice>
-        <mc:Fallback xmlns="">
-          <p:sp>
-            <p:nvSpPr>
-              <p:cNvPr id="66" name="文字方塊 65">
-                <a:extLst>
-                  <a:ext uri="{FF2B5EF4-FFF2-40B4-BE49-F238E27FC236}">
-                    <a16:creationId xmlns:a16="http://schemas.microsoft.com/office/drawing/2014/main" id="{4D82635B-412F-4294-9D01-8D1D291F9573}"/>
-                  </a:ext>
-                </a:extLst>
-              </p:cNvPr>
-              <p:cNvSpPr txBox="1">
-                <a:spLocks noRot="1" noChangeAspect="1" noMove="1" noResize="1" noEditPoints="1" noAdjustHandles="1" noChangeArrowheads="1" noChangeShapeType="1" noTextEdit="1"/>
-              </p:cNvSpPr>
-              <p:nvPr/>
-            </p:nvSpPr>
-            <p:spPr>
-              <a:xfrm>
-                <a:off x="13492456" y="4452759"/>
-                <a:ext cx="938080" cy="369332"/>
-              </a:xfrm>
-              <a:prstGeom prst="rect">
-                <a:avLst/>
-              </a:prstGeom>
-              <a:blipFill>
-                <a:blip r:embed="rId17"/>
-                <a:stretch>
-                  <a:fillRect/>
-                </a:stretch>
-              </a:blipFill>
-            </p:spPr>
-            <p:txBody>
-              <a:bodyPr/>
-              <a:lstStyle/>
-              <a:p>
-                <a:r>
-                  <a:rPr lang="zh-TW" altLang="en-US">
-                    <a:noFill/>
-                  </a:rPr>
-                  <a:t> </a:t>
-                </a:r>
-              </a:p>
-            </p:txBody>
-          </p:sp>
-        </mc:Fallback>
-      </mc:AlternateContent>
-      <mc:AlternateContent xmlns:mc="http://schemas.openxmlformats.org/markup-compatibility/2006" xmlns:a14="http://schemas.microsoft.com/office/drawing/2010/main">
-        <mc:Choice Requires="a14">
-          <p:sp>
-            <p:nvSpPr>
-              <p:cNvPr id="67" name="文字方塊 66">
-                <a:extLst>
-                  <a:ext uri="{FF2B5EF4-FFF2-40B4-BE49-F238E27FC236}">
-                    <a16:creationId xmlns:a16="http://schemas.microsoft.com/office/drawing/2014/main" id="{59A0B5A8-317E-4CC4-BEC5-A584D03F477A}"/>
-                  </a:ext>
-                </a:extLst>
-              </p:cNvPr>
-              <p:cNvSpPr txBox="1"/>
-              <p:nvPr/>
-            </p:nvSpPr>
-            <p:spPr>
-              <a:xfrm>
-                <a:off x="8849421" y="4452759"/>
-                <a:ext cx="938080" cy="369332"/>
-              </a:xfrm>
-              <a:prstGeom prst="rect">
-                <a:avLst/>
-              </a:prstGeom>
-              <a:noFill/>
-            </p:spPr>
-            <p:txBody>
-              <a:bodyPr wrap="square" rtlCol="0">
-                <a:spAutoFit/>
-              </a:bodyPr>
-              <a:lstStyle/>
-              <a:p>
-                <a:pPr/>
-                <a14:m>
-                  <m:oMathPara xmlns:m="http://schemas.openxmlformats.org/officeDocument/2006/math">
-                    <m:oMathParaPr>
-                      <m:jc m:val="centerGroup"/>
-                    </m:oMathParaPr>
-                    <m:oMath xmlns:m="http://schemas.openxmlformats.org/officeDocument/2006/math">
-                      <m:r>
-                        <a:rPr lang="en-US" altLang="zh-TW" i="1">
-                          <a:latin typeface="Cambria Math" panose="02040503050406030204" pitchFamily="18" charset="0"/>
-                        </a:rPr>
-                        <m:t>ℓ</m:t>
-                      </m:r>
-                    </m:oMath>
-                  </m:oMathPara>
-                </a14:m>
-                <a:endParaRPr lang="zh-TW" altLang="en-US" dirty="0"/>
-              </a:p>
-            </p:txBody>
-          </p:sp>
-        </mc:Choice>
-        <mc:Fallback xmlns="">
-          <p:sp>
-            <p:nvSpPr>
-              <p:cNvPr id="67" name="文字方塊 66">
-                <a:extLst>
-                  <a:ext uri="{FF2B5EF4-FFF2-40B4-BE49-F238E27FC236}">
-                    <a16:creationId xmlns:a16="http://schemas.microsoft.com/office/drawing/2014/main" id="{59A0B5A8-317E-4CC4-BEC5-A584D03F477A}"/>
-                  </a:ext>
-                </a:extLst>
-              </p:cNvPr>
-              <p:cNvSpPr txBox="1">
-                <a:spLocks noRot="1" noChangeAspect="1" noMove="1" noResize="1" noEditPoints="1" noAdjustHandles="1" noChangeArrowheads="1" noChangeShapeType="1" noTextEdit="1"/>
-              </p:cNvSpPr>
-              <p:nvPr/>
-            </p:nvSpPr>
-            <p:spPr>
-              <a:xfrm>
-                <a:off x="8849421" y="4452759"/>
-                <a:ext cx="938080" cy="369332"/>
-              </a:xfrm>
-              <a:prstGeom prst="rect">
-                <a:avLst/>
-              </a:prstGeom>
-              <a:blipFill>
-                <a:blip r:embed="rId18"/>
-                <a:stretch>
-                  <a:fillRect/>
-                </a:stretch>
-              </a:blipFill>
-            </p:spPr>
-            <p:txBody>
-              <a:bodyPr/>
-              <a:lstStyle/>
-              <a:p>
-                <a:r>
-                  <a:rPr lang="zh-TW" altLang="en-US">
-                    <a:noFill/>
-                  </a:rPr>
-                  <a:t> </a:t>
-                </a:r>
-              </a:p>
-            </p:txBody>
-          </p:sp>
-        </mc:Fallback>
-      </mc:AlternateContent>
-      <mc:AlternateContent xmlns:mc="http://schemas.openxmlformats.org/markup-compatibility/2006" xmlns:a14="http://schemas.microsoft.com/office/drawing/2010/main">
-        <mc:Choice Requires="a14">
-          <p:sp>
-            <p:nvSpPr>
-              <p:cNvPr id="68" name="文字方塊 67">
-                <a:extLst>
-                  <a:ext uri="{FF2B5EF4-FFF2-40B4-BE49-F238E27FC236}">
-                    <a16:creationId xmlns:a16="http://schemas.microsoft.com/office/drawing/2014/main" id="{E6CD585A-C15D-460D-835D-4042EF42616B}"/>
-                  </a:ext>
-                </a:extLst>
-              </p:cNvPr>
-              <p:cNvSpPr txBox="1"/>
-              <p:nvPr/>
-            </p:nvSpPr>
-            <p:spPr>
-              <a:xfrm>
-                <a:off x="11151842" y="4452759"/>
-                <a:ext cx="938080" cy="369332"/>
-              </a:xfrm>
-              <a:prstGeom prst="rect">
-                <a:avLst/>
-              </a:prstGeom>
-              <a:noFill/>
-            </p:spPr>
-            <p:txBody>
-              <a:bodyPr wrap="square" rtlCol="0">
-                <a:spAutoFit/>
-              </a:bodyPr>
-              <a:lstStyle/>
-              <a:p>
-                <a:pPr/>
-                <a14:m>
-                  <m:oMathPara xmlns:m="http://schemas.openxmlformats.org/officeDocument/2006/math">
-                    <m:oMathParaPr>
-                      <m:jc m:val="centerGroup"/>
-                    </m:oMathParaPr>
-                    <m:oMath xmlns:m="http://schemas.openxmlformats.org/officeDocument/2006/math">
-                      <m:r>
-                        <a:rPr lang="en-US" altLang="zh-TW" i="1">
-                          <a:latin typeface="Cambria Math" panose="02040503050406030204" pitchFamily="18" charset="0"/>
-                        </a:rPr>
-                        <m:t>ℓ</m:t>
-                      </m:r>
-                    </m:oMath>
-                  </m:oMathPara>
-                </a14:m>
-                <a:endParaRPr lang="zh-TW" altLang="en-US" dirty="0"/>
-              </a:p>
-            </p:txBody>
-          </p:sp>
-        </mc:Choice>
-        <mc:Fallback xmlns="">
-          <p:sp>
-            <p:nvSpPr>
-              <p:cNvPr id="68" name="文字方塊 67">
-                <a:extLst>
-                  <a:ext uri="{FF2B5EF4-FFF2-40B4-BE49-F238E27FC236}">
-                    <a16:creationId xmlns:a16="http://schemas.microsoft.com/office/drawing/2014/main" id="{E6CD585A-C15D-460D-835D-4042EF42616B}"/>
-                  </a:ext>
-                </a:extLst>
-              </p:cNvPr>
-              <p:cNvSpPr txBox="1">
-                <a:spLocks noRot="1" noChangeAspect="1" noMove="1" noResize="1" noEditPoints="1" noAdjustHandles="1" noChangeArrowheads="1" noChangeShapeType="1" noTextEdit="1"/>
-              </p:cNvSpPr>
-              <p:nvPr/>
-            </p:nvSpPr>
-            <p:spPr>
-              <a:xfrm>
-                <a:off x="11151842" y="4452759"/>
-                <a:ext cx="938080" cy="369332"/>
-              </a:xfrm>
-              <a:prstGeom prst="rect">
-                <a:avLst/>
-              </a:prstGeom>
-              <a:blipFill>
-                <a:blip r:embed="rId19"/>
-                <a:stretch>
-                  <a:fillRect/>
+                  <a:fillRect b="-2740"/>
                 </a:stretch>
               </a:blipFill>
             </p:spPr>
@@ -9084,55 +5897,1098 @@
       </mc:AlternateContent>
       <p:sp>
         <p:nvSpPr>
-          <p:cNvPr id="69" name="文字方塊 68">
+          <p:cNvPr id="45" name="Oval 6">
             <a:extLst>
               <a:ext uri="{FF2B5EF4-FFF2-40B4-BE49-F238E27FC236}">
-                <a16:creationId xmlns:a16="http://schemas.microsoft.com/office/drawing/2014/main" id="{1F2F9EFB-F318-4A51-883A-29F8A8BB5188}"/>
+                <a16:creationId xmlns:a16="http://schemas.microsoft.com/office/drawing/2014/main" id="{4196289E-5F04-4D61-B2B1-CB9A94CFD3EC}"/>
               </a:ext>
             </a:extLst>
           </p:cNvPr>
-          <p:cNvSpPr txBox="1"/>
+          <p:cNvSpPr/>
           <p:nvPr/>
         </p:nvSpPr>
         <p:spPr>
-          <a:xfrm>
-            <a:off x="237653" y="138824"/>
-            <a:ext cx="3406478" cy="584775"/>
+          <a:xfrm rot="16200000">
+            <a:off x="1756399" y="-919560"/>
+            <a:ext cx="622693" cy="1443999"/>
           </a:xfrm>
-          <a:prstGeom prst="rect">
+          <a:prstGeom prst="ellipse">
             <a:avLst/>
           </a:prstGeom>
           <a:noFill/>
+          <a:ln w="38100">
+            <a:solidFill>
+              <a:schemeClr val="tx1">
+                <a:alpha val="60000"/>
+              </a:schemeClr>
+            </a:solidFill>
+            <a:prstDash val="solid"/>
+          </a:ln>
         </p:spPr>
+        <p:style>
+          <a:lnRef idx="2">
+            <a:schemeClr val="accent1">
+              <a:shade val="50000"/>
+            </a:schemeClr>
+          </a:lnRef>
+          <a:fillRef idx="1">
+            <a:schemeClr val="accent1"/>
+          </a:fillRef>
+          <a:effectRef idx="0">
+            <a:schemeClr val="accent1"/>
+          </a:effectRef>
+          <a:fontRef idx="minor">
+            <a:schemeClr val="lt1"/>
+          </a:fontRef>
+        </p:style>
         <p:txBody>
-          <a:bodyPr wrap="square" rtlCol="0">
-            <a:spAutoFit/>
-          </a:bodyPr>
+          <a:bodyPr rtlCol="0" anchor="ctr"/>
           <a:lstStyle/>
           <a:p>
             <a:pPr algn="ctr"/>
-            <a:r>
-              <a:rPr lang="en-US" altLang="zh-TW" sz="3200" dirty="0">
-                <a:latin typeface="Times New Roman" panose="02020603050405020304" pitchFamily="18" charset="0"/>
-                <a:cs typeface="Times New Roman" panose="02020603050405020304" pitchFamily="18" charset="0"/>
-              </a:rPr>
-              <a:t>Total transition rate</a:t>
-            </a:r>
-            <a:endParaRPr lang="zh-TW" altLang="en-US" sz="3200" dirty="0">
+            <a:endParaRPr lang="en-US" sz="1600" dirty="0">
               <a:latin typeface="Times New Roman" panose="02020603050405020304" pitchFamily="18" charset="0"/>
               <a:cs typeface="Times New Roman" panose="02020603050405020304" pitchFamily="18" charset="0"/>
             </a:endParaRPr>
           </a:p>
         </p:txBody>
       </p:sp>
-      <mc:AlternateContent xmlns:mc="http://schemas.openxmlformats.org/markup-compatibility/2006" xmlns:a14="http://schemas.microsoft.com/office/drawing/2010/main">
-        <mc:Choice Requires="a14">
+    </p:spTree>
+    <p:extLst>
+      <p:ext uri="{BB962C8B-B14F-4D97-AF65-F5344CB8AC3E}">
+        <p14:creationId xmlns:p14="http://schemas.microsoft.com/office/powerpoint/2010/main" val="3253449683"/>
+      </p:ext>
+    </p:extLst>
+  </p:cSld>
+  <p:clrMapOvr>
+    <a:masterClrMapping/>
+  </p:clrMapOvr>
+</p:sld>
+</file>
+
+<file path=ppt/slides/slide2.xml><?xml version="1.0" encoding="utf-8"?>
+<p:sld xmlns:a="http://schemas.openxmlformats.org/drawingml/2006/main" xmlns:r="http://schemas.openxmlformats.org/officeDocument/2006/relationships" xmlns:p="http://schemas.openxmlformats.org/presentationml/2006/main">
+  <p:cSld>
+    <p:spTree>
+      <p:nvGrpSpPr>
+        <p:cNvPr id="1" name=""/>
+        <p:cNvGrpSpPr/>
+        <p:nvPr/>
+      </p:nvGrpSpPr>
+      <p:grpSpPr>
+        <a:xfrm>
+          <a:off x="0" y="0"/>
+          <a:ext cx="0" cy="0"/>
+          <a:chOff x="0" y="0"/>
+          <a:chExt cx="0" cy="0"/>
+        </a:xfrm>
+      </p:grpSpPr>
+      <p:grpSp>
+        <p:nvGrpSpPr>
+          <p:cNvPr id="101" name="群組 100">
+            <a:extLst>
+              <a:ext uri="{FF2B5EF4-FFF2-40B4-BE49-F238E27FC236}">
+                <a16:creationId xmlns:a16="http://schemas.microsoft.com/office/drawing/2014/main" id="{CB082311-F63C-4CE4-AE52-060B16A85D80}"/>
+              </a:ext>
+            </a:extLst>
+          </p:cNvPr>
+          <p:cNvGrpSpPr/>
+          <p:nvPr/>
+        </p:nvGrpSpPr>
+        <p:grpSpPr>
+          <a:xfrm>
+            <a:off x="11683" y="22348"/>
+            <a:ext cx="9882634" cy="5084523"/>
+            <a:chOff x="40258" y="1268689"/>
+            <a:chExt cx="9882634" cy="5084523"/>
+          </a:xfrm>
+        </p:grpSpPr>
+        <p:sp>
+          <p:nvSpPr>
+            <p:cNvPr id="61" name="矩形: 圓角 60">
+              <a:extLst>
+                <a:ext uri="{FF2B5EF4-FFF2-40B4-BE49-F238E27FC236}">
+                  <a16:creationId xmlns:a16="http://schemas.microsoft.com/office/drawing/2014/main" id="{244D7CEB-3C44-4825-8D2E-BC6422286AA3}"/>
+                </a:ext>
+              </a:extLst>
+            </p:cNvPr>
+            <p:cNvSpPr/>
+            <p:nvPr/>
+          </p:nvSpPr>
+          <p:spPr>
+            <a:xfrm>
+              <a:off x="40258" y="1283970"/>
+              <a:ext cx="9882634" cy="5041264"/>
+            </a:xfrm>
+            <a:prstGeom prst="roundRect">
+              <a:avLst>
+                <a:gd name="adj" fmla="val 4125"/>
+              </a:avLst>
+            </a:prstGeom>
+            <a:gradFill flip="none" rotWithShape="1">
+              <a:gsLst>
+                <a:gs pos="0">
+                  <a:schemeClr val="bg1">
+                    <a:lumMod val="95000"/>
+                  </a:schemeClr>
+                </a:gs>
+                <a:gs pos="100000">
+                  <a:schemeClr val="bg1">
+                    <a:lumMod val="95000"/>
+                  </a:schemeClr>
+                </a:gs>
+              </a:gsLst>
+              <a:lin ang="5400000" scaled="1"/>
+              <a:tileRect/>
+            </a:gradFill>
+          </p:spPr>
+          <p:style>
+            <a:lnRef idx="1">
+              <a:schemeClr val="accent3"/>
+            </a:lnRef>
+            <a:fillRef idx="2">
+              <a:schemeClr val="accent3"/>
+            </a:fillRef>
+            <a:effectRef idx="1">
+              <a:schemeClr val="accent3"/>
+            </a:effectRef>
+            <a:fontRef idx="minor">
+              <a:schemeClr val="dk1"/>
+            </a:fontRef>
+          </p:style>
+          <p:txBody>
+            <a:bodyPr rot="0" spcFirstLastPara="0" vertOverflow="overflow" horzOverflow="overflow" vert="horz" wrap="square" lIns="37158" tIns="18579" rIns="37158" bIns="18579" numCol="1" spcCol="0" rtlCol="0" fromWordArt="0" anchor="ctr" anchorCtr="0" forceAA="0" compatLnSpc="1">
+              <a:prstTxWarp prst="textNoShape">
+                <a:avLst/>
+              </a:prstTxWarp>
+              <a:noAutofit/>
+            </a:bodyPr>
+            <a:lstStyle/>
+            <a:p>
+              <a:pPr algn="ctr"/>
+              <a:endParaRPr lang="zh-TW" altLang="en-US" sz="731" dirty="0">
+                <a:latin typeface="Times New Roman" panose="02020603050405020304" pitchFamily="18" charset="0"/>
+                <a:cs typeface="Times New Roman" panose="02020603050405020304" pitchFamily="18" charset="0"/>
+              </a:endParaRPr>
+            </a:p>
+          </p:txBody>
+        </p:sp>
+        <p:sp>
+          <p:nvSpPr>
+            <p:cNvPr id="70" name="箭號: 向右 69">
+              <a:extLst>
+                <a:ext uri="{FF2B5EF4-FFF2-40B4-BE49-F238E27FC236}">
+                  <a16:creationId xmlns:a16="http://schemas.microsoft.com/office/drawing/2014/main" id="{DFFDAE7A-3B0A-4808-88A0-C328B468C4EF}"/>
+                </a:ext>
+              </a:extLst>
+            </p:cNvPr>
+            <p:cNvSpPr/>
+            <p:nvPr/>
+          </p:nvSpPr>
+          <p:spPr>
+            <a:xfrm rot="5400000">
+              <a:off x="59136" y="3922599"/>
+              <a:ext cx="3787144" cy="673971"/>
+            </a:xfrm>
+            <a:prstGeom prst="rightArrow">
+              <a:avLst>
+                <a:gd name="adj1" fmla="val 50000"/>
+                <a:gd name="adj2" fmla="val 37190"/>
+              </a:avLst>
+            </a:prstGeom>
+          </p:spPr>
+          <p:style>
+            <a:lnRef idx="0">
+              <a:schemeClr val="accent2"/>
+            </a:lnRef>
+            <a:fillRef idx="3">
+              <a:schemeClr val="accent2"/>
+            </a:fillRef>
+            <a:effectRef idx="3">
+              <a:schemeClr val="accent2"/>
+            </a:effectRef>
+            <a:fontRef idx="minor">
+              <a:schemeClr val="lt1"/>
+            </a:fontRef>
+          </p:style>
+          <p:txBody>
+            <a:bodyPr rot="0" spcFirstLastPara="0" vertOverflow="overflow" horzOverflow="overflow" vert="horz" wrap="square" lIns="58516" tIns="29258" rIns="58516" bIns="29258" numCol="1" spcCol="0" rtlCol="0" fromWordArt="0" anchor="ctr" anchorCtr="0" forceAA="0" compatLnSpc="1">
+              <a:prstTxWarp prst="textNoShape">
+                <a:avLst/>
+              </a:prstTxWarp>
+              <a:noAutofit/>
+            </a:bodyPr>
+            <a:lstStyle/>
+            <a:p>
+              <a:pPr algn="ctr"/>
+              <a:endParaRPr lang="zh-TW" altLang="en-US" sz="1152" dirty="0">
+                <a:latin typeface="Times New Roman" panose="02020603050405020304" pitchFamily="18" charset="0"/>
+                <a:cs typeface="Times New Roman" panose="02020603050405020304" pitchFamily="18" charset="0"/>
+              </a:endParaRPr>
+            </a:p>
+          </p:txBody>
+        </p:sp>
+        <mc:AlternateContent xmlns:mc="http://schemas.openxmlformats.org/markup-compatibility/2006" xmlns:a14="http://schemas.microsoft.com/office/drawing/2010/main">
+          <mc:Choice Requires="a14">
+            <p:sp>
+              <p:nvSpPr>
+                <p:cNvPr id="65" name="文字方塊 64">
+                  <a:extLst>
+                    <a:ext uri="{FF2B5EF4-FFF2-40B4-BE49-F238E27FC236}">
+                      <a16:creationId xmlns:a16="http://schemas.microsoft.com/office/drawing/2014/main" id="{12227D7D-795D-4A5B-982D-19FD8C9D579C}"/>
+                    </a:ext>
+                  </a:extLst>
+                </p:cNvPr>
+                <p:cNvSpPr txBox="1"/>
+                <p:nvPr/>
+              </p:nvSpPr>
+              <p:spPr>
+                <a:xfrm>
+                  <a:off x="2988365" y="5953102"/>
+                  <a:ext cx="600310" cy="400110"/>
+                </a:xfrm>
+                <a:prstGeom prst="rect">
+                  <a:avLst/>
+                </a:prstGeom>
+                <a:noFill/>
+              </p:spPr>
+              <p:txBody>
+                <a:bodyPr wrap="square" rtlCol="0">
+                  <a:spAutoFit/>
+                </a:bodyPr>
+                <a:lstStyle/>
+                <a:p>
+                  <a:pPr/>
+                  <a14:m>
+                    <m:oMathPara xmlns:m="http://schemas.openxmlformats.org/officeDocument/2006/math">
+                      <m:oMathParaPr>
+                        <m:jc m:val="centerGroup"/>
+                      </m:oMathParaPr>
+                      <m:oMath xmlns:m="http://schemas.openxmlformats.org/officeDocument/2006/math">
+                        <m:r>
+                          <a:rPr lang="en-US" altLang="zh-TW" sz="2000" i="1">
+                            <a:latin typeface="Cambria Math" panose="02040503050406030204" pitchFamily="18" charset="0"/>
+                          </a:rPr>
+                          <m:t>ℓ</m:t>
+                        </m:r>
+                      </m:oMath>
+                    </m:oMathPara>
+                  </a14:m>
+                  <a:endParaRPr lang="zh-TW" altLang="en-US" sz="2000" dirty="0">
+                    <a:latin typeface="Times New Roman" panose="02020603050405020304" pitchFamily="18" charset="0"/>
+                    <a:cs typeface="Times New Roman" panose="02020603050405020304" pitchFamily="18" charset="0"/>
+                  </a:endParaRPr>
+                </a:p>
+              </p:txBody>
+            </p:sp>
+          </mc:Choice>
+          <mc:Fallback xmlns="">
+            <p:sp>
+              <p:nvSpPr>
+                <p:cNvPr id="65" name="文字方塊 64">
+                  <a:extLst>
+                    <a:ext uri="{FF2B5EF4-FFF2-40B4-BE49-F238E27FC236}">
+                      <a16:creationId xmlns:a16="http://schemas.microsoft.com/office/drawing/2014/main" id="{12227D7D-795D-4A5B-982D-19FD8C9D579C}"/>
+                    </a:ext>
+                  </a:extLst>
+                </p:cNvPr>
+                <p:cNvSpPr txBox="1">
+                  <a:spLocks noRot="1" noChangeAspect="1" noMove="1" noResize="1" noEditPoints="1" noAdjustHandles="1" noChangeArrowheads="1" noChangeShapeType="1" noTextEdit="1"/>
+                </p:cNvSpPr>
+                <p:nvPr/>
+              </p:nvSpPr>
+              <p:spPr>
+                <a:xfrm>
+                  <a:off x="2988365" y="5953102"/>
+                  <a:ext cx="600310" cy="400110"/>
+                </a:xfrm>
+                <a:prstGeom prst="rect">
+                  <a:avLst/>
+                </a:prstGeom>
+                <a:blipFill>
+                  <a:blip r:embed="rId2"/>
+                  <a:stretch>
+                    <a:fillRect/>
+                  </a:stretch>
+                </a:blipFill>
+              </p:spPr>
+              <p:txBody>
+                <a:bodyPr/>
+                <a:lstStyle/>
+                <a:p>
+                  <a:r>
+                    <a:rPr lang="zh-TW" altLang="en-US">
+                      <a:noFill/>
+                    </a:rPr>
+                    <a:t> </a:t>
+                  </a:r>
+                </a:p>
+              </p:txBody>
+            </p:sp>
+          </mc:Fallback>
+        </mc:AlternateContent>
+        <mc:AlternateContent xmlns:mc="http://schemas.openxmlformats.org/markup-compatibility/2006" xmlns:a14="http://schemas.microsoft.com/office/drawing/2010/main">
+          <mc:Choice Requires="a14">
+            <p:sp>
+              <p:nvSpPr>
+                <p:cNvPr id="66" name="文字方塊 65">
+                  <a:extLst>
+                    <a:ext uri="{FF2B5EF4-FFF2-40B4-BE49-F238E27FC236}">
+                      <a16:creationId xmlns:a16="http://schemas.microsoft.com/office/drawing/2014/main" id="{4D82635B-412F-4294-9D01-8D1D291F9573}"/>
+                    </a:ext>
+                  </a:extLst>
+                </p:cNvPr>
+                <p:cNvSpPr txBox="1"/>
+                <p:nvPr/>
+              </p:nvSpPr>
+              <p:spPr>
+                <a:xfrm>
+                  <a:off x="8644232" y="5953102"/>
+                  <a:ext cx="600310" cy="400110"/>
+                </a:xfrm>
+                <a:prstGeom prst="rect">
+                  <a:avLst/>
+                </a:prstGeom>
+                <a:noFill/>
+              </p:spPr>
+              <p:txBody>
+                <a:bodyPr wrap="square" rtlCol="0">
+                  <a:spAutoFit/>
+                </a:bodyPr>
+                <a:lstStyle/>
+                <a:p>
+                  <a:pPr/>
+                  <a14:m>
+                    <m:oMathPara xmlns:m="http://schemas.openxmlformats.org/officeDocument/2006/math">
+                      <m:oMathParaPr>
+                        <m:jc m:val="centerGroup"/>
+                      </m:oMathParaPr>
+                      <m:oMath xmlns:m="http://schemas.openxmlformats.org/officeDocument/2006/math">
+                        <m:r>
+                          <a:rPr lang="en-US" altLang="zh-TW" sz="2000" i="1">
+                            <a:latin typeface="Cambria Math" panose="02040503050406030204" pitchFamily="18" charset="0"/>
+                          </a:rPr>
+                          <m:t>ℓ</m:t>
+                        </m:r>
+                      </m:oMath>
+                    </m:oMathPara>
+                  </a14:m>
+                  <a:endParaRPr lang="zh-TW" altLang="en-US" sz="2000" dirty="0">
+                    <a:latin typeface="Times New Roman" panose="02020603050405020304" pitchFamily="18" charset="0"/>
+                    <a:cs typeface="Times New Roman" panose="02020603050405020304" pitchFamily="18" charset="0"/>
+                  </a:endParaRPr>
+                </a:p>
+              </p:txBody>
+            </p:sp>
+          </mc:Choice>
+          <mc:Fallback xmlns="">
+            <p:sp>
+              <p:nvSpPr>
+                <p:cNvPr id="66" name="文字方塊 65">
+                  <a:extLst>
+                    <a:ext uri="{FF2B5EF4-FFF2-40B4-BE49-F238E27FC236}">
+                      <a16:creationId xmlns:a16="http://schemas.microsoft.com/office/drawing/2014/main" id="{4D82635B-412F-4294-9D01-8D1D291F9573}"/>
+                    </a:ext>
+                  </a:extLst>
+                </p:cNvPr>
+                <p:cNvSpPr txBox="1">
+                  <a:spLocks noRot="1" noChangeAspect="1" noMove="1" noResize="1" noEditPoints="1" noAdjustHandles="1" noChangeArrowheads="1" noChangeShapeType="1" noTextEdit="1"/>
+                </p:cNvSpPr>
+                <p:nvPr/>
+              </p:nvSpPr>
+              <p:spPr>
+                <a:xfrm>
+                  <a:off x="8644232" y="5953102"/>
+                  <a:ext cx="600310" cy="400110"/>
+                </a:xfrm>
+                <a:prstGeom prst="rect">
+                  <a:avLst/>
+                </a:prstGeom>
+                <a:blipFill>
+                  <a:blip r:embed="rId3"/>
+                  <a:stretch>
+                    <a:fillRect/>
+                  </a:stretch>
+                </a:blipFill>
+              </p:spPr>
+              <p:txBody>
+                <a:bodyPr/>
+                <a:lstStyle/>
+                <a:p>
+                  <a:r>
+                    <a:rPr lang="zh-TW" altLang="en-US">
+                      <a:noFill/>
+                    </a:rPr>
+                    <a:t> </a:t>
+                  </a:r>
+                </a:p>
+              </p:txBody>
+            </p:sp>
+          </mc:Fallback>
+        </mc:AlternateContent>
+        <mc:AlternateContent xmlns:mc="http://schemas.openxmlformats.org/markup-compatibility/2006" xmlns:a14="http://schemas.microsoft.com/office/drawing/2010/main">
+          <mc:Choice Requires="a14">
+            <p:sp>
+              <p:nvSpPr>
+                <p:cNvPr id="67" name="文字方塊 66">
+                  <a:extLst>
+                    <a:ext uri="{FF2B5EF4-FFF2-40B4-BE49-F238E27FC236}">
+                      <a16:creationId xmlns:a16="http://schemas.microsoft.com/office/drawing/2014/main" id="{59A0B5A8-317E-4CC4-BEC5-A584D03F477A}"/>
+                    </a:ext>
+                  </a:extLst>
+                </p:cNvPr>
+                <p:cNvSpPr txBox="1"/>
+                <p:nvPr/>
+              </p:nvSpPr>
+              <p:spPr>
+                <a:xfrm>
+                  <a:off x="4873654" y="5953102"/>
+                  <a:ext cx="600310" cy="400110"/>
+                </a:xfrm>
+                <a:prstGeom prst="rect">
+                  <a:avLst/>
+                </a:prstGeom>
+                <a:noFill/>
+              </p:spPr>
+              <p:txBody>
+                <a:bodyPr wrap="square" rtlCol="0">
+                  <a:spAutoFit/>
+                </a:bodyPr>
+                <a:lstStyle/>
+                <a:p>
+                  <a:pPr/>
+                  <a14:m>
+                    <m:oMathPara xmlns:m="http://schemas.openxmlformats.org/officeDocument/2006/math">
+                      <m:oMathParaPr>
+                        <m:jc m:val="centerGroup"/>
+                      </m:oMathParaPr>
+                      <m:oMath xmlns:m="http://schemas.openxmlformats.org/officeDocument/2006/math">
+                        <m:r>
+                          <a:rPr lang="en-US" altLang="zh-TW" sz="2000" i="1">
+                            <a:latin typeface="Cambria Math" panose="02040503050406030204" pitchFamily="18" charset="0"/>
+                          </a:rPr>
+                          <m:t>ℓ</m:t>
+                        </m:r>
+                      </m:oMath>
+                    </m:oMathPara>
+                  </a14:m>
+                  <a:endParaRPr lang="zh-TW" altLang="en-US" sz="2000" dirty="0">
+                    <a:latin typeface="Times New Roman" panose="02020603050405020304" pitchFamily="18" charset="0"/>
+                    <a:cs typeface="Times New Roman" panose="02020603050405020304" pitchFamily="18" charset="0"/>
+                  </a:endParaRPr>
+                </a:p>
+              </p:txBody>
+            </p:sp>
+          </mc:Choice>
+          <mc:Fallback xmlns="">
+            <p:sp>
+              <p:nvSpPr>
+                <p:cNvPr id="67" name="文字方塊 66">
+                  <a:extLst>
+                    <a:ext uri="{FF2B5EF4-FFF2-40B4-BE49-F238E27FC236}">
+                      <a16:creationId xmlns:a16="http://schemas.microsoft.com/office/drawing/2014/main" id="{59A0B5A8-317E-4CC4-BEC5-A584D03F477A}"/>
+                    </a:ext>
+                  </a:extLst>
+                </p:cNvPr>
+                <p:cNvSpPr txBox="1">
+                  <a:spLocks noRot="1" noChangeAspect="1" noMove="1" noResize="1" noEditPoints="1" noAdjustHandles="1" noChangeArrowheads="1" noChangeShapeType="1" noTextEdit="1"/>
+                </p:cNvSpPr>
+                <p:nvPr/>
+              </p:nvSpPr>
+              <p:spPr>
+                <a:xfrm>
+                  <a:off x="4873654" y="5953102"/>
+                  <a:ext cx="600310" cy="400110"/>
+                </a:xfrm>
+                <a:prstGeom prst="rect">
+                  <a:avLst/>
+                </a:prstGeom>
+                <a:blipFill>
+                  <a:blip r:embed="rId4"/>
+                  <a:stretch>
+                    <a:fillRect/>
+                  </a:stretch>
+                </a:blipFill>
+              </p:spPr>
+              <p:txBody>
+                <a:bodyPr/>
+                <a:lstStyle/>
+                <a:p>
+                  <a:r>
+                    <a:rPr lang="zh-TW" altLang="en-US">
+                      <a:noFill/>
+                    </a:rPr>
+                    <a:t> </a:t>
+                  </a:r>
+                </a:p>
+              </p:txBody>
+            </p:sp>
+          </mc:Fallback>
+        </mc:AlternateContent>
+        <mc:AlternateContent xmlns:mc="http://schemas.openxmlformats.org/markup-compatibility/2006" xmlns:a14="http://schemas.microsoft.com/office/drawing/2010/main">
+          <mc:Choice Requires="a14">
+            <p:sp>
+              <p:nvSpPr>
+                <p:cNvPr id="68" name="文字方塊 67">
+                  <a:extLst>
+                    <a:ext uri="{FF2B5EF4-FFF2-40B4-BE49-F238E27FC236}">
+                      <a16:creationId xmlns:a16="http://schemas.microsoft.com/office/drawing/2014/main" id="{E6CD585A-C15D-460D-835D-4042EF42616B}"/>
+                    </a:ext>
+                  </a:extLst>
+                </p:cNvPr>
+                <p:cNvSpPr txBox="1"/>
+                <p:nvPr/>
+              </p:nvSpPr>
+              <p:spPr>
+                <a:xfrm>
+                  <a:off x="6758943" y="5953102"/>
+                  <a:ext cx="600310" cy="400110"/>
+                </a:xfrm>
+                <a:prstGeom prst="rect">
+                  <a:avLst/>
+                </a:prstGeom>
+                <a:noFill/>
+              </p:spPr>
+              <p:txBody>
+                <a:bodyPr wrap="square" rtlCol="0">
+                  <a:spAutoFit/>
+                </a:bodyPr>
+                <a:lstStyle/>
+                <a:p>
+                  <a:pPr/>
+                  <a14:m>
+                    <m:oMathPara xmlns:m="http://schemas.openxmlformats.org/officeDocument/2006/math">
+                      <m:oMathParaPr>
+                        <m:jc m:val="centerGroup"/>
+                      </m:oMathParaPr>
+                      <m:oMath xmlns:m="http://schemas.openxmlformats.org/officeDocument/2006/math">
+                        <m:r>
+                          <a:rPr lang="en-US" altLang="zh-TW" sz="2000" i="1">
+                            <a:latin typeface="Cambria Math" panose="02040503050406030204" pitchFamily="18" charset="0"/>
+                          </a:rPr>
+                          <m:t>ℓ</m:t>
+                        </m:r>
+                      </m:oMath>
+                    </m:oMathPara>
+                  </a14:m>
+                  <a:endParaRPr lang="zh-TW" altLang="en-US" sz="2000" dirty="0">
+                    <a:latin typeface="Times New Roman" panose="02020603050405020304" pitchFamily="18" charset="0"/>
+                    <a:cs typeface="Times New Roman" panose="02020603050405020304" pitchFamily="18" charset="0"/>
+                  </a:endParaRPr>
+                </a:p>
+              </p:txBody>
+            </p:sp>
+          </mc:Choice>
+          <mc:Fallback xmlns="">
+            <p:sp>
+              <p:nvSpPr>
+                <p:cNvPr id="68" name="文字方塊 67">
+                  <a:extLst>
+                    <a:ext uri="{FF2B5EF4-FFF2-40B4-BE49-F238E27FC236}">
+                      <a16:creationId xmlns:a16="http://schemas.microsoft.com/office/drawing/2014/main" id="{E6CD585A-C15D-460D-835D-4042EF42616B}"/>
+                    </a:ext>
+                  </a:extLst>
+                </p:cNvPr>
+                <p:cNvSpPr txBox="1">
+                  <a:spLocks noRot="1" noChangeAspect="1" noMove="1" noResize="1" noEditPoints="1" noAdjustHandles="1" noChangeArrowheads="1" noChangeShapeType="1" noTextEdit="1"/>
+                </p:cNvSpPr>
+                <p:nvPr/>
+              </p:nvSpPr>
+              <p:spPr>
+                <a:xfrm>
+                  <a:off x="6758943" y="5953102"/>
+                  <a:ext cx="600310" cy="400110"/>
+                </a:xfrm>
+                <a:prstGeom prst="rect">
+                  <a:avLst/>
+                </a:prstGeom>
+                <a:blipFill>
+                  <a:blip r:embed="rId5"/>
+                  <a:stretch>
+                    <a:fillRect/>
+                  </a:stretch>
+                </a:blipFill>
+              </p:spPr>
+              <p:txBody>
+                <a:bodyPr/>
+                <a:lstStyle/>
+                <a:p>
+                  <a:r>
+                    <a:rPr lang="zh-TW" altLang="en-US">
+                      <a:noFill/>
+                    </a:rPr>
+                    <a:t> </a:t>
+                  </a:r>
+                </a:p>
+              </p:txBody>
+            </p:sp>
+          </mc:Fallback>
+        </mc:AlternateContent>
+        <p:sp>
+          <p:nvSpPr>
+            <p:cNvPr id="69" name="文字方塊 68">
+              <a:extLst>
+                <a:ext uri="{FF2B5EF4-FFF2-40B4-BE49-F238E27FC236}">
+                  <a16:creationId xmlns:a16="http://schemas.microsoft.com/office/drawing/2014/main" id="{1F2F9EFB-F318-4A51-883A-29F8A8BB5188}"/>
+                </a:ext>
+              </a:extLst>
+            </p:cNvPr>
+            <p:cNvSpPr txBox="1"/>
+            <p:nvPr/>
+          </p:nvSpPr>
+          <p:spPr>
+            <a:xfrm>
+              <a:off x="3304499" y="1268689"/>
+              <a:ext cx="3297003" cy="507831"/>
+            </a:xfrm>
+            <a:prstGeom prst="rect">
+              <a:avLst/>
+            </a:prstGeom>
+            <a:noFill/>
+          </p:spPr>
+          <p:txBody>
+            <a:bodyPr wrap="square" rtlCol="0">
+              <a:spAutoFit/>
+            </a:bodyPr>
+            <a:lstStyle/>
+            <a:p>
+              <a:pPr algn="ctr"/>
+              <a:r>
+                <a:rPr lang="en-US" altLang="zh-TW" sz="2700" dirty="0">
+                  <a:latin typeface="Times New Roman" panose="02020603050405020304" pitchFamily="18" charset="0"/>
+                  <a:cs typeface="Times New Roman" panose="02020603050405020304" pitchFamily="18" charset="0"/>
+                </a:rPr>
+                <a:t>Total transition rate</a:t>
+              </a:r>
+              <a:endParaRPr lang="zh-TW" altLang="en-US" sz="2700" dirty="0">
+                <a:latin typeface="Times New Roman" panose="02020603050405020304" pitchFamily="18" charset="0"/>
+                <a:cs typeface="Times New Roman" panose="02020603050405020304" pitchFamily="18" charset="0"/>
+              </a:endParaRPr>
+            </a:p>
+          </p:txBody>
+        </p:sp>
+        <p:pic>
+          <p:nvPicPr>
+            <p:cNvPr id="15" name="圖片 14">
+              <a:extLst>
+                <a:ext uri="{FF2B5EF4-FFF2-40B4-BE49-F238E27FC236}">
+                  <a16:creationId xmlns:a16="http://schemas.microsoft.com/office/drawing/2014/main" id="{E7BF89E2-EF27-4960-B7B8-16EBBB95670C}"/>
+                </a:ext>
+              </a:extLst>
+            </p:cNvPr>
+            <p:cNvPicPr>
+              <a:picLocks noChangeAspect="1"/>
+            </p:cNvPicPr>
+            <p:nvPr/>
+          </p:nvPicPr>
+          <p:blipFill rotWithShape="1">
+            <a:blip r:embed="rId6">
+              <a:clrChange>
+                <a:clrFrom>
+                  <a:srgbClr val="FFFFFF"/>
+                </a:clrFrom>
+                <a:clrTo>
+                  <a:srgbClr val="FFFFFF">
+                    <a:alpha val="0"/>
+                  </a:srgbClr>
+                </a:clrTo>
+              </a:clrChange>
+            </a:blip>
+            <a:srcRect b="80007"/>
+            <a:stretch/>
+          </p:blipFill>
+          <p:spPr>
+            <a:xfrm>
+              <a:off x="2845941" y="1893261"/>
+              <a:ext cx="1075310" cy="409294"/>
+            </a:xfrm>
+            <a:prstGeom prst="rect">
+              <a:avLst/>
+            </a:prstGeom>
+          </p:spPr>
+        </p:pic>
+        <p:pic>
+          <p:nvPicPr>
+            <p:cNvPr id="72" name="圖片 71">
+              <a:extLst>
+                <a:ext uri="{FF2B5EF4-FFF2-40B4-BE49-F238E27FC236}">
+                  <a16:creationId xmlns:a16="http://schemas.microsoft.com/office/drawing/2014/main" id="{266DB175-C593-4AF8-8610-4FC2DB6102F0}"/>
+                </a:ext>
+              </a:extLst>
+            </p:cNvPr>
+            <p:cNvPicPr>
+              <a:picLocks noChangeAspect="1"/>
+            </p:cNvPicPr>
+            <p:nvPr/>
+          </p:nvPicPr>
+          <p:blipFill rotWithShape="1">
+            <a:blip r:embed="rId6">
+              <a:clrChange>
+                <a:clrFrom>
+                  <a:srgbClr val="FFFFFF"/>
+                </a:clrFrom>
+                <a:clrTo>
+                  <a:srgbClr val="FFFFFF">
+                    <a:alpha val="0"/>
+                  </a:srgbClr>
+                </a:clrTo>
+              </a:clrChange>
+            </a:blip>
+            <a:srcRect t="26340" b="54309"/>
+            <a:stretch/>
+          </p:blipFill>
+          <p:spPr>
+            <a:xfrm>
+              <a:off x="4714154" y="1879652"/>
+              <a:ext cx="1075306" cy="396160"/>
+            </a:xfrm>
+            <a:prstGeom prst="rect">
+              <a:avLst/>
+            </a:prstGeom>
+          </p:spPr>
+        </p:pic>
+        <p:pic>
+          <p:nvPicPr>
+            <p:cNvPr id="73" name="圖片 72">
+              <a:extLst>
+                <a:ext uri="{FF2B5EF4-FFF2-40B4-BE49-F238E27FC236}">
+                  <a16:creationId xmlns:a16="http://schemas.microsoft.com/office/drawing/2014/main" id="{1886C92E-A6D5-43FE-89DB-39A2E29192E0}"/>
+                </a:ext>
+              </a:extLst>
+            </p:cNvPr>
+            <p:cNvPicPr>
+              <a:picLocks noChangeAspect="1"/>
+            </p:cNvPicPr>
+            <p:nvPr/>
+          </p:nvPicPr>
+          <p:blipFill rotWithShape="1">
+            <a:blip r:embed="rId6">
+              <a:clrChange>
+                <a:clrFrom>
+                  <a:srgbClr val="FFFFFF"/>
+                </a:clrFrom>
+                <a:clrTo>
+                  <a:srgbClr val="FFFFFF">
+                    <a:alpha val="0"/>
+                  </a:srgbClr>
+                </a:clrTo>
+              </a:clrChange>
+            </a:blip>
+            <a:srcRect t="52461" b="26415"/>
+            <a:stretch/>
+          </p:blipFill>
+          <p:spPr>
+            <a:xfrm>
+              <a:off x="6570064" y="1878547"/>
+              <a:ext cx="1075308" cy="432456"/>
+            </a:xfrm>
+            <a:prstGeom prst="rect">
+              <a:avLst/>
+            </a:prstGeom>
+          </p:spPr>
+        </p:pic>
+        <p:pic>
+          <p:nvPicPr>
+            <p:cNvPr id="74" name="圖片 73">
+              <a:extLst>
+                <a:ext uri="{FF2B5EF4-FFF2-40B4-BE49-F238E27FC236}">
+                  <a16:creationId xmlns:a16="http://schemas.microsoft.com/office/drawing/2014/main" id="{93EE4156-B7D9-481C-918A-372D6376C75C}"/>
+                </a:ext>
+              </a:extLst>
+            </p:cNvPr>
+            <p:cNvPicPr>
+              <a:picLocks noChangeAspect="1"/>
+            </p:cNvPicPr>
+            <p:nvPr/>
+          </p:nvPicPr>
+          <p:blipFill rotWithShape="1">
+            <a:blip r:embed="rId6">
+              <a:clrChange>
+                <a:clrFrom>
+                  <a:srgbClr val="FFFFFF"/>
+                </a:clrFrom>
+                <a:clrTo>
+                  <a:srgbClr val="FFFFFF">
+                    <a:alpha val="0"/>
+                  </a:srgbClr>
+                </a:clrTo>
+              </a:clrChange>
+            </a:blip>
+            <a:srcRect t="79036"/>
+            <a:stretch/>
+          </p:blipFill>
+          <p:spPr>
+            <a:xfrm>
+              <a:off x="8491110" y="1869058"/>
+              <a:ext cx="1075306" cy="429186"/>
+            </a:xfrm>
+            <a:prstGeom prst="rect">
+              <a:avLst/>
+            </a:prstGeom>
+          </p:spPr>
+        </p:pic>
+        <p:grpSp>
+          <p:nvGrpSpPr>
+            <p:cNvPr id="50" name="群組 49">
+              <a:extLst>
+                <a:ext uri="{FF2B5EF4-FFF2-40B4-BE49-F238E27FC236}">
+                  <a16:creationId xmlns:a16="http://schemas.microsoft.com/office/drawing/2014/main" id="{DB4259E5-A5A0-4718-9941-7DF57F6731B4}"/>
+                </a:ext>
+              </a:extLst>
+            </p:cNvPr>
+            <p:cNvGrpSpPr/>
+            <p:nvPr/>
+          </p:nvGrpSpPr>
+          <p:grpSpPr>
+            <a:xfrm>
+              <a:off x="110222" y="2925016"/>
+              <a:ext cx="1606614" cy="2284146"/>
+              <a:chOff x="1187740" y="-909815"/>
+              <a:chExt cx="1606614" cy="2284146"/>
+            </a:xfrm>
+          </p:grpSpPr>
+          <mc:AlternateContent xmlns:mc="http://schemas.openxmlformats.org/markup-compatibility/2006" xmlns:a14="http://schemas.microsoft.com/office/drawing/2010/main">
+            <mc:Choice Requires="a14">
+              <p:sp>
+                <p:nvSpPr>
+                  <p:cNvPr id="51" name="文字方塊 50">
+                    <a:extLst>
+                      <a:ext uri="{FF2B5EF4-FFF2-40B4-BE49-F238E27FC236}">
+                        <a16:creationId xmlns:a16="http://schemas.microsoft.com/office/drawing/2014/main" id="{F4949E2B-21B2-4ED9-903E-09F890780B56}"/>
+                      </a:ext>
+                    </a:extLst>
+                  </p:cNvPr>
+                  <p:cNvSpPr txBox="1"/>
+                  <p:nvPr/>
+                </p:nvSpPr>
+                <p:spPr>
+                  <a:xfrm>
+                    <a:off x="1563231" y="1035777"/>
+                    <a:ext cx="812954" cy="338554"/>
+                  </a:xfrm>
+                  <a:prstGeom prst="rect">
+                    <a:avLst/>
+                  </a:prstGeom>
+                  <a:noFill/>
+                </p:spPr>
+                <p:txBody>
+                  <a:bodyPr wrap="square" rtlCol="0">
+                    <a:spAutoFit/>
+                  </a:bodyPr>
+                  <a:lstStyle/>
+                  <a:p>
+                    <a:pPr/>
+                    <a14:m>
+                      <m:oMathPara xmlns:m="http://schemas.openxmlformats.org/officeDocument/2006/math">
+                        <m:oMathParaPr>
+                          <m:jc m:val="centerGroup"/>
+                        </m:oMathParaPr>
+                        <m:oMath xmlns:m="http://schemas.openxmlformats.org/officeDocument/2006/math">
+                          <m:r>
+                            <a:rPr lang="en-US" altLang="zh-TW" sz="1600" i="1">
+                              <a:latin typeface="Cambria Math" panose="02040503050406030204" pitchFamily="18" charset="0"/>
+                            </a:rPr>
+                            <m:t>|</m:t>
+                          </m:r>
+                          <m:d>
+                            <m:dPr>
+                              <m:begChr m:val=""/>
+                              <m:endChr m:val="⟩"/>
+                              <m:ctrlPr>
+                                <a:rPr lang="en-US" altLang="zh-TW" sz="1600" i="1">
+                                  <a:latin typeface="Cambria Math" panose="02040503050406030204" pitchFamily="18" charset="0"/>
+                                </a:rPr>
+                              </m:ctrlPr>
+                            </m:dPr>
+                            <m:e>
+                              <m:r>
+                                <a:rPr lang="en-US" altLang="zh-TW" sz="1600" i="1">
+                                  <a:latin typeface="Cambria Math" panose="02040503050406030204" pitchFamily="18" charset="0"/>
+                                </a:rPr>
+                                <m:t>−1, 1</m:t>
+                              </m:r>
+                            </m:e>
+                          </m:d>
+                        </m:oMath>
+                      </m:oMathPara>
+                    </a14:m>
+                    <a:endParaRPr lang="zh-TW" altLang="en-US" sz="1600" dirty="0">
+                      <a:latin typeface="Times New Roman" panose="02020603050405020304" pitchFamily="18" charset="0"/>
+                      <a:cs typeface="Times New Roman" panose="02020603050405020304" pitchFamily="18" charset="0"/>
+                    </a:endParaRPr>
+                  </a:p>
+                </p:txBody>
+              </p:sp>
+            </mc:Choice>
+            <mc:Fallback xmlns="">
+              <p:sp>
+                <p:nvSpPr>
+                  <p:cNvPr id="51" name="文字方塊 50">
+                    <a:extLst>
+                      <a:ext uri="{FF2B5EF4-FFF2-40B4-BE49-F238E27FC236}">
+                        <a16:creationId xmlns:a16="http://schemas.microsoft.com/office/drawing/2014/main" id="{F4949E2B-21B2-4ED9-903E-09F890780B56}"/>
+                      </a:ext>
+                    </a:extLst>
+                  </p:cNvPr>
+                  <p:cNvSpPr txBox="1">
+                    <a:spLocks noRot="1" noChangeAspect="1" noMove="1" noResize="1" noEditPoints="1" noAdjustHandles="1" noChangeArrowheads="1" noChangeShapeType="1" noTextEdit="1"/>
+                  </p:cNvSpPr>
+                  <p:nvPr/>
+                </p:nvSpPr>
+                <p:spPr>
+                  <a:xfrm>
+                    <a:off x="1563231" y="1035777"/>
+                    <a:ext cx="812954" cy="338554"/>
+                  </a:xfrm>
+                  <a:prstGeom prst="rect">
+                    <a:avLst/>
+                  </a:prstGeom>
+                  <a:blipFill>
+                    <a:blip r:embed="rId7"/>
+                    <a:stretch>
+                      <a:fillRect t="-109091" r="-46617" b="-174545"/>
+                    </a:stretch>
+                  </a:blipFill>
+                </p:spPr>
+                <p:txBody>
+                  <a:bodyPr/>
+                  <a:lstStyle/>
+                  <a:p>
+                    <a:r>
+                      <a:rPr lang="zh-TW" altLang="en-US">
+                        <a:noFill/>
+                      </a:rPr>
+                      <a:t> </a:t>
+                    </a:r>
+                  </a:p>
+                </p:txBody>
+              </p:sp>
+            </mc:Fallback>
+          </mc:AlternateContent>
+          <mc:AlternateContent xmlns:mc="http://schemas.openxmlformats.org/markup-compatibility/2006" xmlns:a14="http://schemas.microsoft.com/office/drawing/2010/main">
+            <mc:Choice Requires="a14">
+              <p:sp>
+                <p:nvSpPr>
+                  <p:cNvPr id="52" name="文字方塊 51">
+                    <a:extLst>
+                      <a:ext uri="{FF2B5EF4-FFF2-40B4-BE49-F238E27FC236}">
+                        <a16:creationId xmlns:a16="http://schemas.microsoft.com/office/drawing/2014/main" id="{C09D2860-E450-4D94-9C1E-154D8ACD1ED1}"/>
+                      </a:ext>
+                    </a:extLst>
+                  </p:cNvPr>
+                  <p:cNvSpPr txBox="1"/>
+                  <p:nvPr/>
+                </p:nvSpPr>
+                <p:spPr>
+                  <a:xfrm>
+                    <a:off x="1580027" y="-909815"/>
+                    <a:ext cx="812954" cy="338554"/>
+                  </a:xfrm>
+                  <a:prstGeom prst="rect">
+                    <a:avLst/>
+                  </a:prstGeom>
+                  <a:noFill/>
+                </p:spPr>
+                <p:txBody>
+                  <a:bodyPr wrap="square" rtlCol="0">
+                    <a:spAutoFit/>
+                  </a:bodyPr>
+                  <a:lstStyle/>
+                  <a:p>
+                    <a:pPr/>
+                    <a14:m>
+                      <m:oMathPara xmlns:m="http://schemas.openxmlformats.org/officeDocument/2006/math">
+                        <m:oMathParaPr>
+                          <m:jc m:val="centerGroup"/>
+                        </m:oMathParaPr>
+                        <m:oMath xmlns:m="http://schemas.openxmlformats.org/officeDocument/2006/math">
+                          <m:r>
+                            <a:rPr lang="en-US" altLang="zh-TW" sz="1600" i="1">
+                              <a:latin typeface="Cambria Math" panose="02040503050406030204" pitchFamily="18" charset="0"/>
+                            </a:rPr>
+                            <m:t>|</m:t>
+                          </m:r>
+                          <m:d>
+                            <m:dPr>
+                              <m:begChr m:val=""/>
+                              <m:endChr m:val="⟩"/>
+                              <m:ctrlPr>
+                                <a:rPr lang="en-US" altLang="zh-TW" sz="1600" i="1">
+                                  <a:latin typeface="Cambria Math" panose="02040503050406030204" pitchFamily="18" charset="0"/>
+                                </a:rPr>
+                              </m:ctrlPr>
+                            </m:dPr>
+                            <m:e>
+                              <m:r>
+                                <a:rPr lang="en-US" altLang="zh-TW" sz="1600" i="1">
+                                  <a:latin typeface="Cambria Math" panose="02040503050406030204" pitchFamily="18" charset="0"/>
+                                </a:rPr>
+                                <m:t>1, −1</m:t>
+                              </m:r>
+                            </m:e>
+                          </m:d>
+                        </m:oMath>
+                      </m:oMathPara>
+                    </a14:m>
+                    <a:endParaRPr lang="zh-TW" altLang="en-US" sz="1600" dirty="0">
+                      <a:latin typeface="Times New Roman" panose="02020603050405020304" pitchFamily="18" charset="0"/>
+                      <a:cs typeface="Times New Roman" panose="02020603050405020304" pitchFamily="18" charset="0"/>
+                    </a:endParaRPr>
+                  </a:p>
+                </p:txBody>
+              </p:sp>
+            </mc:Choice>
+            <mc:Fallback xmlns="">
+              <p:sp>
+                <p:nvSpPr>
+                  <p:cNvPr id="52" name="文字方塊 51">
+                    <a:extLst>
+                      <a:ext uri="{FF2B5EF4-FFF2-40B4-BE49-F238E27FC236}">
+                        <a16:creationId xmlns:a16="http://schemas.microsoft.com/office/drawing/2014/main" id="{C09D2860-E450-4D94-9C1E-154D8ACD1ED1}"/>
+                      </a:ext>
+                    </a:extLst>
+                  </p:cNvPr>
+                  <p:cNvSpPr txBox="1">
+                    <a:spLocks noRot="1" noChangeAspect="1" noMove="1" noResize="1" noEditPoints="1" noAdjustHandles="1" noChangeArrowheads="1" noChangeShapeType="1" noTextEdit="1"/>
+                  </p:cNvSpPr>
+                  <p:nvPr/>
+                </p:nvSpPr>
+                <p:spPr>
+                  <a:xfrm>
+                    <a:off x="1580027" y="-909815"/>
+                    <a:ext cx="812954" cy="338554"/>
+                  </a:xfrm>
+                  <a:prstGeom prst="rect">
+                    <a:avLst/>
+                  </a:prstGeom>
+                  <a:blipFill>
+                    <a:blip r:embed="rId8"/>
+                    <a:stretch>
+                      <a:fillRect t="-107143" r="-46617" b="-169643"/>
+                    </a:stretch>
+                  </a:blipFill>
+                </p:spPr>
+                <p:txBody>
+                  <a:bodyPr/>
+                  <a:lstStyle/>
+                  <a:p>
+                    <a:r>
+                      <a:rPr lang="zh-TW" altLang="en-US">
+                        <a:noFill/>
+                      </a:rPr>
+                      <a:t> </a:t>
+                    </a:r>
+                  </a:p>
+                </p:txBody>
+              </p:sp>
+            </mc:Fallback>
+          </mc:AlternateContent>
           <p:sp>
             <p:nvSpPr>
-              <p:cNvPr id="71" name="矩形 70">
+              <p:cNvPr id="54" name="Oval 4">
                 <a:extLst>
                   <a:ext uri="{FF2B5EF4-FFF2-40B4-BE49-F238E27FC236}">
-                    <a16:creationId xmlns:a16="http://schemas.microsoft.com/office/drawing/2014/main" id="{7FAB7778-888A-4D13-B0E9-C2EA22859D0C}"/>
+                    <a16:creationId xmlns:a16="http://schemas.microsoft.com/office/drawing/2014/main" id="{471773A0-586C-4B5D-9506-DE7F786CC477}"/>
                   </a:ext>
                 </a:extLst>
               </p:cNvPr>
@@ -9141,10 +6997,1405 @@
             </p:nvSpPr>
             <p:spPr>
               <a:xfrm>
-                <a:off x="2604152" y="3484217"/>
-                <a:ext cx="1319592" cy="646331"/>
+                <a:off x="1271413" y="-529397"/>
+                <a:ext cx="1443999" cy="1495797"/>
               </a:xfrm>
-              <a:prstGeom prst="rect">
+              <a:prstGeom prst="ellipse">
+                <a:avLst/>
+              </a:prstGeom>
+              <a:gradFill flip="none" rotWithShape="1">
+                <a:gsLst>
+                  <a:gs pos="100000">
+                    <a:schemeClr val="accent3">
+                      <a:lumMod val="60000"/>
+                      <a:lumOff val="40000"/>
+                      <a:alpha val="60000"/>
+                    </a:schemeClr>
+                  </a:gs>
+                  <a:gs pos="55000">
+                    <a:schemeClr val="accent3">
+                      <a:lumMod val="40000"/>
+                      <a:lumOff val="60000"/>
+                      <a:alpha val="60000"/>
+                    </a:schemeClr>
+                  </a:gs>
+                  <a:gs pos="0">
+                    <a:schemeClr val="bg1">
+                      <a:alpha val="60000"/>
+                    </a:schemeClr>
+                  </a:gs>
+                </a:gsLst>
+                <a:path path="circle">
+                  <a:fillToRect l="100000" b="100000"/>
+                </a:path>
+                <a:tileRect t="-100000" r="-100000"/>
+              </a:gradFill>
+              <a:ln w="57150">
+                <a:solidFill>
+                  <a:srgbClr val="D5D7DA"/>
+                </a:solidFill>
+              </a:ln>
+            </p:spPr>
+            <p:style>
+              <a:lnRef idx="2">
+                <a:schemeClr val="accent1">
+                  <a:shade val="50000"/>
+                </a:schemeClr>
+              </a:lnRef>
+              <a:fillRef idx="1">
+                <a:schemeClr val="accent1"/>
+              </a:fillRef>
+              <a:effectRef idx="0">
+                <a:schemeClr val="accent1"/>
+              </a:effectRef>
+              <a:fontRef idx="minor">
+                <a:schemeClr val="lt1"/>
+              </a:fontRef>
+            </p:style>
+            <p:txBody>
+              <a:bodyPr rtlCol="0" anchor="ctr"/>
+              <a:lstStyle/>
+              <a:p>
+                <a:pPr algn="ctr"/>
+                <a:endParaRPr lang="en-US" sz="1600" dirty="0">
+                  <a:latin typeface="Times New Roman" panose="02020603050405020304" pitchFamily="18" charset="0"/>
+                  <a:cs typeface="Times New Roman" panose="02020603050405020304" pitchFamily="18" charset="0"/>
+                </a:endParaRPr>
+              </a:p>
+            </p:txBody>
+          </p:sp>
+          <p:sp>
+            <p:nvSpPr>
+              <p:cNvPr id="56" name="SHO">
+                <a:extLst>
+                  <a:ext uri="{FF2B5EF4-FFF2-40B4-BE49-F238E27FC236}">
+                    <a16:creationId xmlns:a16="http://schemas.microsoft.com/office/drawing/2014/main" id="{D5F2F6D1-8B15-46F3-86F4-661661F9F5A1}"/>
+                  </a:ext>
+                </a:extLst>
+              </p:cNvPr>
+              <p:cNvSpPr/>
+              <p:nvPr/>
+            </p:nvSpPr>
+            <p:spPr>
+              <a:xfrm rot="16200000">
+                <a:off x="1679874" y="-502998"/>
+                <a:ext cx="622693" cy="1443999"/>
+              </a:xfrm>
+              <a:prstGeom prst="arc">
+                <a:avLst>
+                  <a:gd name="adj1" fmla="val 5396867"/>
+                  <a:gd name="adj2" fmla="val 5395779"/>
+                </a:avLst>
+              </a:prstGeom>
+              <a:gradFill flip="none" rotWithShape="1">
+                <a:gsLst>
+                  <a:gs pos="0">
+                    <a:schemeClr val="bg1">
+                      <a:lumMod val="65000"/>
+                    </a:schemeClr>
+                  </a:gs>
+                  <a:gs pos="47000">
+                    <a:schemeClr val="bg1">
+                      <a:lumMod val="50000"/>
+                    </a:schemeClr>
+                  </a:gs>
+                  <a:gs pos="97000">
+                    <a:srgbClr val="5E5E5E"/>
+                  </a:gs>
+                </a:gsLst>
+                <a:path path="circle">
+                  <a:fillToRect l="50000" t="50000" r="50000" b="50000"/>
+                </a:path>
+                <a:tileRect/>
+              </a:gradFill>
+              <a:ln w="31750">
+                <a:noFill/>
+              </a:ln>
+            </p:spPr>
+            <p:style>
+              <a:lnRef idx="1">
+                <a:schemeClr val="accent1"/>
+              </a:lnRef>
+              <a:fillRef idx="0">
+                <a:schemeClr val="accent1"/>
+              </a:fillRef>
+              <a:effectRef idx="0">
+                <a:schemeClr val="accent1"/>
+              </a:effectRef>
+              <a:fontRef idx="minor">
+                <a:schemeClr val="tx1"/>
+              </a:fontRef>
+            </p:style>
+            <p:txBody>
+              <a:bodyPr rtlCol="0" anchor="ctr"/>
+              <a:lstStyle/>
+              <a:p>
+                <a:pPr algn="ctr"/>
+                <a:endParaRPr lang="en-US" sz="1600" dirty="0">
+                  <a:latin typeface="Times New Roman" panose="02020603050405020304" pitchFamily="18" charset="0"/>
+                  <a:cs typeface="Times New Roman" panose="02020603050405020304" pitchFamily="18" charset="0"/>
+                </a:endParaRPr>
+              </a:p>
+            </p:txBody>
+          </p:sp>
+          <p:sp>
+            <p:nvSpPr>
+              <p:cNvPr id="57" name="SVO">
+                <a:extLst>
+                  <a:ext uri="{FF2B5EF4-FFF2-40B4-BE49-F238E27FC236}">
+                    <a16:creationId xmlns:a16="http://schemas.microsoft.com/office/drawing/2014/main" id="{B2787C35-0306-47CD-AA2E-CE1A3AAF4D44}"/>
+                  </a:ext>
+                </a:extLst>
+              </p:cNvPr>
+              <p:cNvSpPr/>
+              <p:nvPr/>
+            </p:nvSpPr>
+            <p:spPr>
+              <a:xfrm>
+                <a:off x="1629320" y="-528896"/>
+                <a:ext cx="722000" cy="1495797"/>
+              </a:xfrm>
+              <a:prstGeom prst="ellipse">
+                <a:avLst/>
+              </a:prstGeom>
+              <a:noFill/>
+              <a:ln w="25400">
+                <a:solidFill>
+                  <a:schemeClr val="bg1">
+                    <a:lumMod val="50000"/>
+                  </a:schemeClr>
+                </a:solidFill>
+                <a:prstDash val="dash"/>
+              </a:ln>
+            </p:spPr>
+            <p:style>
+              <a:lnRef idx="2">
+                <a:schemeClr val="accent1">
+                  <a:shade val="50000"/>
+                </a:schemeClr>
+              </a:lnRef>
+              <a:fillRef idx="1">
+                <a:schemeClr val="accent1"/>
+              </a:fillRef>
+              <a:effectRef idx="0">
+                <a:schemeClr val="accent1"/>
+              </a:effectRef>
+              <a:fontRef idx="minor">
+                <a:schemeClr val="lt1"/>
+              </a:fontRef>
+            </p:style>
+            <p:txBody>
+              <a:bodyPr rtlCol="0" anchor="ctr"/>
+              <a:lstStyle/>
+              <a:p>
+                <a:pPr algn="ctr"/>
+                <a:endParaRPr lang="en-US" sz="1600">
+                  <a:latin typeface="Times New Roman" panose="02020603050405020304" pitchFamily="18" charset="0"/>
+                  <a:cs typeface="Times New Roman" panose="02020603050405020304" pitchFamily="18" charset="0"/>
+                </a:endParaRPr>
+              </a:p>
+            </p:txBody>
+          </p:sp>
+          <p:sp>
+            <p:nvSpPr>
+              <p:cNvPr id="58" name="Oval 6">
+                <a:extLst>
+                  <a:ext uri="{FF2B5EF4-FFF2-40B4-BE49-F238E27FC236}">
+                    <a16:creationId xmlns:a16="http://schemas.microsoft.com/office/drawing/2014/main" id="{108915DC-0DBA-454E-BB46-75C50684DE50}"/>
+                  </a:ext>
+                </a:extLst>
+              </p:cNvPr>
+              <p:cNvSpPr/>
+              <p:nvPr/>
+            </p:nvSpPr>
+            <p:spPr>
+              <a:xfrm rot="16200000">
+                <a:off x="1679874" y="-502998"/>
+                <a:ext cx="622693" cy="1443999"/>
+              </a:xfrm>
+              <a:prstGeom prst="ellipse">
+                <a:avLst/>
+              </a:prstGeom>
+              <a:noFill/>
+              <a:ln w="38100">
+                <a:gradFill>
+                  <a:gsLst>
+                    <a:gs pos="49000">
+                      <a:srgbClr val="FF3300">
+                        <a:alpha val="60000"/>
+                      </a:srgbClr>
+                    </a:gs>
+                    <a:gs pos="0">
+                      <a:srgbClr val="FF3300">
+                        <a:alpha val="60000"/>
+                      </a:srgbClr>
+                    </a:gs>
+                    <a:gs pos="51000">
+                      <a:schemeClr val="tx1">
+                        <a:alpha val="60000"/>
+                      </a:schemeClr>
+                    </a:gs>
+                    <a:gs pos="100000">
+                      <a:schemeClr val="tx1">
+                        <a:alpha val="60000"/>
+                      </a:schemeClr>
+                    </a:gs>
+                  </a:gsLst>
+                  <a:lin ang="0" scaled="0"/>
+                </a:gradFill>
+                <a:prstDash val="solid"/>
+              </a:ln>
+            </p:spPr>
+            <p:style>
+              <a:lnRef idx="2">
+                <a:schemeClr val="accent1">
+                  <a:shade val="50000"/>
+                </a:schemeClr>
+              </a:lnRef>
+              <a:fillRef idx="1">
+                <a:schemeClr val="accent1"/>
+              </a:fillRef>
+              <a:effectRef idx="0">
+                <a:schemeClr val="accent1"/>
+              </a:effectRef>
+              <a:fontRef idx="minor">
+                <a:schemeClr val="lt1"/>
+              </a:fontRef>
+            </p:style>
+            <p:txBody>
+              <a:bodyPr rtlCol="0" anchor="ctr"/>
+              <a:lstStyle/>
+              <a:p>
+                <a:pPr algn="ctr"/>
+                <a:endParaRPr lang="en-US" sz="1600" dirty="0">
+                  <a:latin typeface="Times New Roman" panose="02020603050405020304" pitchFamily="18" charset="0"/>
+                  <a:cs typeface="Times New Roman" panose="02020603050405020304" pitchFamily="18" charset="0"/>
+                </a:endParaRPr>
+              </a:p>
+            </p:txBody>
+          </p:sp>
+          <mc:AlternateContent xmlns:mc="http://schemas.openxmlformats.org/markup-compatibility/2006" xmlns:a14="http://schemas.microsoft.com/office/drawing/2010/main">
+            <mc:Choice Requires="a14">
+              <p:sp>
+                <p:nvSpPr>
+                  <p:cNvPr id="59" name="TextBox 11">
+                    <a:extLst>
+                      <a:ext uri="{FF2B5EF4-FFF2-40B4-BE49-F238E27FC236}">
+                        <a16:creationId xmlns:a16="http://schemas.microsoft.com/office/drawing/2014/main" id="{9C3B51CE-B82A-4AC3-9962-02CD775FFF2A}"/>
+                      </a:ext>
+                    </a:extLst>
+                  </p:cNvPr>
+                  <p:cNvSpPr txBox="1"/>
+                  <p:nvPr/>
+                </p:nvSpPr>
+                <p:spPr>
+                  <a:xfrm>
+                    <a:off x="1441522" y="40650"/>
+                    <a:ext cx="176928" cy="338554"/>
+                  </a:xfrm>
+                  <a:prstGeom prst="rect">
+                    <a:avLst/>
+                  </a:prstGeom>
+                  <a:noFill/>
+                </p:spPr>
+                <p:txBody>
+                  <a:bodyPr wrap="square" rtlCol="0">
+                    <a:spAutoFit/>
+                  </a:bodyPr>
+                  <a:lstStyle/>
+                  <a:p>
+                    <a:pPr/>
+                    <a14:m>
+                      <m:oMathPara xmlns:m="http://schemas.openxmlformats.org/officeDocument/2006/math">
+                        <m:oMathParaPr>
+                          <m:jc m:val="centerGroup"/>
+                        </m:oMathParaPr>
+                        <m:oMath xmlns:m="http://schemas.openxmlformats.org/officeDocument/2006/math">
+                          <m:r>
+                            <a:rPr lang="en-US" sz="1600" i="1">
+                              <a:latin typeface="Cambria Math" panose="02040503050406030204" pitchFamily="18" charset="0"/>
+                            </a:rPr>
+                            <m:t>𝑥</m:t>
+                          </m:r>
+                        </m:oMath>
+                      </m:oMathPara>
+                    </a14:m>
+                    <a:endParaRPr lang="en-US" sz="1600" dirty="0">
+                      <a:latin typeface="Times New Roman" panose="02020603050405020304" pitchFamily="18" charset="0"/>
+                      <a:cs typeface="Times New Roman" panose="02020603050405020304" pitchFamily="18" charset="0"/>
+                    </a:endParaRPr>
+                  </a:p>
+                </p:txBody>
+              </p:sp>
+            </mc:Choice>
+            <mc:Fallback xmlns="">
+              <p:sp>
+                <p:nvSpPr>
+                  <p:cNvPr id="59" name="TextBox 11">
+                    <a:extLst>
+                      <a:ext uri="{FF2B5EF4-FFF2-40B4-BE49-F238E27FC236}">
+                        <a16:creationId xmlns:a16="http://schemas.microsoft.com/office/drawing/2014/main" id="{9C3B51CE-B82A-4AC3-9962-02CD775FFF2A}"/>
+                      </a:ext>
+                    </a:extLst>
+                  </p:cNvPr>
+                  <p:cNvSpPr txBox="1">
+                    <a:spLocks noRot="1" noChangeAspect="1" noMove="1" noResize="1" noEditPoints="1" noAdjustHandles="1" noChangeArrowheads="1" noChangeShapeType="1" noTextEdit="1"/>
+                  </p:cNvSpPr>
+                  <p:nvPr/>
+                </p:nvSpPr>
+                <p:spPr>
+                  <a:xfrm>
+                    <a:off x="1441522" y="40650"/>
+                    <a:ext cx="176928" cy="338554"/>
+                  </a:xfrm>
+                  <a:prstGeom prst="rect">
+                    <a:avLst/>
+                  </a:prstGeom>
+                  <a:blipFill>
+                    <a:blip r:embed="rId9"/>
+                    <a:stretch>
+                      <a:fillRect r="-41379"/>
+                    </a:stretch>
+                  </a:blipFill>
+                </p:spPr>
+                <p:txBody>
+                  <a:bodyPr/>
+                  <a:lstStyle/>
+                  <a:p>
+                    <a:r>
+                      <a:rPr lang="zh-TW" altLang="en-US">
+                        <a:noFill/>
+                      </a:rPr>
+                      <a:t> </a:t>
+                    </a:r>
+                  </a:p>
+                </p:txBody>
+              </p:sp>
+            </mc:Fallback>
+          </mc:AlternateContent>
+          <mc:AlternateContent xmlns:mc="http://schemas.openxmlformats.org/markup-compatibility/2006" xmlns:a14="http://schemas.microsoft.com/office/drawing/2010/main">
+            <mc:Choice Requires="a14">
+              <p:sp>
+                <p:nvSpPr>
+                  <p:cNvPr id="75" name="TextBox 12">
+                    <a:extLst>
+                      <a:ext uri="{FF2B5EF4-FFF2-40B4-BE49-F238E27FC236}">
+                        <a16:creationId xmlns:a16="http://schemas.microsoft.com/office/drawing/2014/main" id="{DFB180A3-E153-415D-AC5C-1F2AE70BA6C4}"/>
+                      </a:ext>
+                    </a:extLst>
+                  </p:cNvPr>
+                  <p:cNvSpPr txBox="1"/>
+                  <p:nvPr/>
+                </p:nvSpPr>
+                <p:spPr>
+                  <a:xfrm>
+                    <a:off x="2096445" y="136047"/>
+                    <a:ext cx="176928" cy="338554"/>
+                  </a:xfrm>
+                  <a:prstGeom prst="rect">
+                    <a:avLst/>
+                  </a:prstGeom>
+                  <a:noFill/>
+                </p:spPr>
+                <p:txBody>
+                  <a:bodyPr wrap="square" rtlCol="0">
+                    <a:spAutoFit/>
+                  </a:bodyPr>
+                  <a:lstStyle/>
+                  <a:p>
+                    <a:pPr/>
+                    <a14:m>
+                      <m:oMathPara xmlns:m="http://schemas.openxmlformats.org/officeDocument/2006/math">
+                        <m:oMathParaPr>
+                          <m:jc m:val="centerGroup"/>
+                        </m:oMathParaPr>
+                        <m:oMath xmlns:m="http://schemas.openxmlformats.org/officeDocument/2006/math">
+                          <m:r>
+                            <a:rPr lang="en-US" sz="1600" i="1">
+                              <a:latin typeface="Cambria Math" panose="02040503050406030204" pitchFamily="18" charset="0"/>
+                            </a:rPr>
+                            <m:t>𝑦</m:t>
+                          </m:r>
+                        </m:oMath>
+                      </m:oMathPara>
+                    </a14:m>
+                    <a:endParaRPr lang="en-US" sz="1600" dirty="0">
+                      <a:latin typeface="Times New Roman" panose="02020603050405020304" pitchFamily="18" charset="0"/>
+                      <a:cs typeface="Times New Roman" panose="02020603050405020304" pitchFamily="18" charset="0"/>
+                    </a:endParaRPr>
+                  </a:p>
+                </p:txBody>
+              </p:sp>
+            </mc:Choice>
+            <mc:Fallback xmlns="">
+              <p:sp>
+                <p:nvSpPr>
+                  <p:cNvPr id="75" name="TextBox 12">
+                    <a:extLst>
+                      <a:ext uri="{FF2B5EF4-FFF2-40B4-BE49-F238E27FC236}">
+                        <a16:creationId xmlns:a16="http://schemas.microsoft.com/office/drawing/2014/main" id="{DFB180A3-E153-415D-AC5C-1F2AE70BA6C4}"/>
+                      </a:ext>
+                    </a:extLst>
+                  </p:cNvPr>
+                  <p:cNvSpPr txBox="1">
+                    <a:spLocks noRot="1" noChangeAspect="1" noMove="1" noResize="1" noEditPoints="1" noAdjustHandles="1" noChangeArrowheads="1" noChangeShapeType="1" noTextEdit="1"/>
+                  </p:cNvSpPr>
+                  <p:nvPr/>
+                </p:nvSpPr>
+                <p:spPr>
+                  <a:xfrm>
+                    <a:off x="2096445" y="136047"/>
+                    <a:ext cx="176928" cy="338554"/>
+                  </a:xfrm>
+                  <a:prstGeom prst="rect">
+                    <a:avLst/>
+                  </a:prstGeom>
+                  <a:blipFill>
+                    <a:blip r:embed="rId10"/>
+                    <a:stretch>
+                      <a:fillRect r="-55172" b="-5455"/>
+                    </a:stretch>
+                  </a:blipFill>
+                </p:spPr>
+                <p:txBody>
+                  <a:bodyPr/>
+                  <a:lstStyle/>
+                  <a:p>
+                    <a:r>
+                      <a:rPr lang="zh-TW" altLang="en-US">
+                        <a:noFill/>
+                      </a:rPr>
+                      <a:t> </a:t>
+                    </a:r>
+                  </a:p>
+                </p:txBody>
+              </p:sp>
+            </mc:Fallback>
+          </mc:AlternateContent>
+          <mc:AlternateContent xmlns:mc="http://schemas.openxmlformats.org/markup-compatibility/2006" xmlns:a14="http://schemas.microsoft.com/office/drawing/2010/main">
+            <mc:Choice Requires="a14">
+              <p:sp>
+                <p:nvSpPr>
+                  <p:cNvPr id="76" name="TextBox 13">
+                    <a:extLst>
+                      <a:ext uri="{FF2B5EF4-FFF2-40B4-BE49-F238E27FC236}">
+                        <a16:creationId xmlns:a16="http://schemas.microsoft.com/office/drawing/2014/main" id="{F25E64F7-0209-4C33-9B0F-95304961A15B}"/>
+                      </a:ext>
+                    </a:extLst>
+                  </p:cNvPr>
+                  <p:cNvSpPr txBox="1"/>
+                  <p:nvPr/>
+                </p:nvSpPr>
+                <p:spPr>
+                  <a:xfrm>
+                    <a:off x="1852321" y="-493695"/>
+                    <a:ext cx="256967" cy="338554"/>
+                  </a:xfrm>
+                  <a:prstGeom prst="rect">
+                    <a:avLst/>
+                  </a:prstGeom>
+                  <a:noFill/>
+                </p:spPr>
+                <p:txBody>
+                  <a:bodyPr wrap="square" rtlCol="0">
+                    <a:spAutoFit/>
+                  </a:bodyPr>
+                  <a:lstStyle/>
+                  <a:p>
+                    <a:pPr/>
+                    <a14:m>
+                      <m:oMathPara xmlns:m="http://schemas.openxmlformats.org/officeDocument/2006/math">
+                        <m:oMathParaPr>
+                          <m:jc m:val="centerGroup"/>
+                        </m:oMathParaPr>
+                        <m:oMath xmlns:m="http://schemas.openxmlformats.org/officeDocument/2006/math">
+                          <m:r>
+                            <a:rPr lang="en-US" sz="1600" i="1">
+                              <a:latin typeface="Cambria Math" panose="02040503050406030204" pitchFamily="18" charset="0"/>
+                            </a:rPr>
+                            <m:t>𝑧</m:t>
+                          </m:r>
+                        </m:oMath>
+                      </m:oMathPara>
+                    </a14:m>
+                    <a:endParaRPr lang="en-US" sz="1600" dirty="0">
+                      <a:latin typeface="Times New Roman" panose="02020603050405020304" pitchFamily="18" charset="0"/>
+                      <a:cs typeface="Times New Roman" panose="02020603050405020304" pitchFamily="18" charset="0"/>
+                    </a:endParaRPr>
+                  </a:p>
+                </p:txBody>
+              </p:sp>
+            </mc:Choice>
+            <mc:Fallback xmlns="">
+              <p:sp>
+                <p:nvSpPr>
+                  <p:cNvPr id="76" name="TextBox 13">
+                    <a:extLst>
+                      <a:ext uri="{FF2B5EF4-FFF2-40B4-BE49-F238E27FC236}">
+                        <a16:creationId xmlns:a16="http://schemas.microsoft.com/office/drawing/2014/main" id="{F25E64F7-0209-4C33-9B0F-95304961A15B}"/>
+                      </a:ext>
+                    </a:extLst>
+                  </p:cNvPr>
+                  <p:cNvSpPr txBox="1">
+                    <a:spLocks noRot="1" noChangeAspect="1" noMove="1" noResize="1" noEditPoints="1" noAdjustHandles="1" noChangeArrowheads="1" noChangeShapeType="1" noTextEdit="1"/>
+                  </p:cNvSpPr>
+                  <p:nvPr/>
+                </p:nvSpPr>
+                <p:spPr>
+                  <a:xfrm>
+                    <a:off x="1852321" y="-493695"/>
+                    <a:ext cx="256967" cy="338554"/>
+                  </a:xfrm>
+                  <a:prstGeom prst="rect">
+                    <a:avLst/>
+                  </a:prstGeom>
+                  <a:blipFill>
+                    <a:blip r:embed="rId11"/>
+                    <a:stretch>
+                      <a:fillRect/>
+                    </a:stretch>
+                  </a:blipFill>
+                </p:spPr>
+                <p:txBody>
+                  <a:bodyPr/>
+                  <a:lstStyle/>
+                  <a:p>
+                    <a:r>
+                      <a:rPr lang="zh-TW" altLang="en-US">
+                        <a:noFill/>
+                      </a:rPr>
+                      <a:t> </a:t>
+                    </a:r>
+                  </a:p>
+                </p:txBody>
+              </p:sp>
+            </mc:Fallback>
+          </mc:AlternateContent>
+          <p:sp>
+            <p:nvSpPr>
+              <p:cNvPr id="77" name="DVO">
+                <a:extLst>
+                  <a:ext uri="{FF2B5EF4-FFF2-40B4-BE49-F238E27FC236}">
+                    <a16:creationId xmlns:a16="http://schemas.microsoft.com/office/drawing/2014/main" id="{A7E89ABE-350D-4F06-B83F-2F02D712FC14}"/>
+                  </a:ext>
+                </a:extLst>
+              </p:cNvPr>
+              <p:cNvSpPr/>
+              <p:nvPr/>
+            </p:nvSpPr>
+            <p:spPr>
+              <a:xfrm flipH="1">
+                <a:off x="1629320" y="-528896"/>
+                <a:ext cx="722000" cy="1495797"/>
+              </a:xfrm>
+              <a:prstGeom prst="arc">
+                <a:avLst>
+                  <a:gd name="adj1" fmla="val 5396867"/>
+                  <a:gd name="adj2" fmla="val 16170484"/>
+                </a:avLst>
+              </a:prstGeom>
+              <a:ln w="25400">
+                <a:solidFill>
+                  <a:schemeClr val="bg1">
+                    <a:lumMod val="50000"/>
+                  </a:schemeClr>
+                </a:solidFill>
+              </a:ln>
+            </p:spPr>
+            <p:style>
+              <a:lnRef idx="1">
+                <a:schemeClr val="accent1"/>
+              </a:lnRef>
+              <a:fillRef idx="0">
+                <a:schemeClr val="accent1"/>
+              </a:fillRef>
+              <a:effectRef idx="0">
+                <a:schemeClr val="accent1"/>
+              </a:effectRef>
+              <a:fontRef idx="minor">
+                <a:schemeClr val="tx1"/>
+              </a:fontRef>
+            </p:style>
+            <p:txBody>
+              <a:bodyPr rtlCol="0" anchor="ctr"/>
+              <a:lstStyle/>
+              <a:p>
+                <a:pPr algn="ctr"/>
+                <a:endParaRPr lang="en-US" sz="1600" dirty="0">
+                  <a:latin typeface="Times New Roman" panose="02020603050405020304" pitchFamily="18" charset="0"/>
+                  <a:cs typeface="Times New Roman" panose="02020603050405020304" pitchFamily="18" charset="0"/>
+                </a:endParaRPr>
+              </a:p>
+            </p:txBody>
+          </p:sp>
+          <p:sp>
+            <p:nvSpPr>
+              <p:cNvPr id="78" name="Oval 23">
+                <a:extLst>
+                  <a:ext uri="{FF2B5EF4-FFF2-40B4-BE49-F238E27FC236}">
+                    <a16:creationId xmlns:a16="http://schemas.microsoft.com/office/drawing/2014/main" id="{8BEB4D8C-991D-4ADE-A4B2-F082BE8096E9}"/>
+                  </a:ext>
+                </a:extLst>
+              </p:cNvPr>
+              <p:cNvSpPr/>
+              <p:nvPr/>
+            </p:nvSpPr>
+            <p:spPr>
+              <a:xfrm>
+                <a:off x="2631904" y="134864"/>
+                <a:ext cx="162450" cy="168277"/>
+              </a:xfrm>
+              <a:prstGeom prst="ellipse">
+                <a:avLst/>
+              </a:prstGeom>
+              <a:gradFill flip="none" rotWithShape="1">
+                <a:gsLst>
+                  <a:gs pos="100000">
+                    <a:schemeClr val="tx1">
+                      <a:lumMod val="85000"/>
+                      <a:lumOff val="15000"/>
+                    </a:schemeClr>
+                  </a:gs>
+                  <a:gs pos="50000">
+                    <a:schemeClr val="tx1">
+                      <a:lumMod val="65000"/>
+                      <a:lumOff val="35000"/>
+                      <a:tint val="44500"/>
+                      <a:satMod val="160000"/>
+                    </a:schemeClr>
+                  </a:gs>
+                  <a:gs pos="0">
+                    <a:schemeClr val="tx1">
+                      <a:lumMod val="65000"/>
+                      <a:lumOff val="35000"/>
+                      <a:tint val="23500"/>
+                      <a:satMod val="160000"/>
+                    </a:schemeClr>
+                  </a:gs>
+                </a:gsLst>
+                <a:path path="circle">
+                  <a:fillToRect l="50000" t="50000" r="50000" b="50000"/>
+                </a:path>
+                <a:tileRect/>
+              </a:gradFill>
+              <a:ln>
+                <a:solidFill>
+                  <a:schemeClr val="tx1"/>
+                </a:solidFill>
+              </a:ln>
+            </p:spPr>
+            <p:style>
+              <a:lnRef idx="2">
+                <a:schemeClr val="accent1">
+                  <a:shade val="50000"/>
+                </a:schemeClr>
+              </a:lnRef>
+              <a:fillRef idx="1">
+                <a:schemeClr val="accent1"/>
+              </a:fillRef>
+              <a:effectRef idx="0">
+                <a:schemeClr val="accent1"/>
+              </a:effectRef>
+              <a:fontRef idx="minor">
+                <a:schemeClr val="lt1"/>
+              </a:fontRef>
+            </p:style>
+            <p:txBody>
+              <a:bodyPr rtlCol="0" anchor="ctr"/>
+              <a:lstStyle/>
+              <a:p>
+                <a:pPr algn="ctr"/>
+                <a:endParaRPr lang="en-US" sz="1600" dirty="0">
+                  <a:latin typeface="Times New Roman" panose="02020603050405020304" pitchFamily="18" charset="0"/>
+                  <a:cs typeface="Times New Roman" panose="02020603050405020304" pitchFamily="18" charset="0"/>
+                </a:endParaRPr>
+              </a:p>
+            </p:txBody>
+          </p:sp>
+          <p:cxnSp>
+            <p:nvCxnSpPr>
+              <p:cNvPr id="79" name="Straight Arrow Connector 7">
+                <a:extLst>
+                  <a:ext uri="{FF2B5EF4-FFF2-40B4-BE49-F238E27FC236}">
+                    <a16:creationId xmlns:a16="http://schemas.microsoft.com/office/drawing/2014/main" id="{237E883B-9E99-4B1C-836E-6EBB37C9D3D1}"/>
+                  </a:ext>
+                </a:extLst>
+              </p:cNvPr>
+              <p:cNvCxnSpPr>
+                <a:cxnSpLocks/>
+              </p:cNvCxnSpPr>
+              <p:nvPr/>
+            </p:nvCxnSpPr>
+            <p:spPr>
+              <a:xfrm flipV="1">
+                <a:off x="1987289" y="-229080"/>
+                <a:ext cx="1697" cy="445890"/>
+              </a:xfrm>
+              <a:prstGeom prst="straightConnector1">
+                <a:avLst/>
+              </a:prstGeom>
+              <a:ln w="12700">
+                <a:solidFill>
+                  <a:schemeClr val="tx1"/>
+                </a:solidFill>
+                <a:tailEnd type="triangle" w="med" len="lg"/>
+              </a:ln>
+            </p:spPr>
+            <p:style>
+              <a:lnRef idx="1">
+                <a:schemeClr val="accent1"/>
+              </a:lnRef>
+              <a:fillRef idx="0">
+                <a:schemeClr val="accent1"/>
+              </a:fillRef>
+              <a:effectRef idx="0">
+                <a:schemeClr val="accent1"/>
+              </a:effectRef>
+              <a:fontRef idx="minor">
+                <a:schemeClr val="tx1"/>
+              </a:fontRef>
+            </p:style>
+          </p:cxnSp>
+          <p:cxnSp>
+            <p:nvCxnSpPr>
+              <p:cNvPr id="80" name="Straight Arrow Connector 19">
+                <a:extLst>
+                  <a:ext uri="{FF2B5EF4-FFF2-40B4-BE49-F238E27FC236}">
+                    <a16:creationId xmlns:a16="http://schemas.microsoft.com/office/drawing/2014/main" id="{9EE12019-F0EF-41D5-A915-66B68B30AF47}"/>
+                  </a:ext>
+                </a:extLst>
+              </p:cNvPr>
+              <p:cNvCxnSpPr>
+                <a:cxnSpLocks/>
+              </p:cNvCxnSpPr>
+              <p:nvPr/>
+            </p:nvCxnSpPr>
+            <p:spPr>
+              <a:xfrm>
+                <a:off x="1990273" y="214626"/>
+                <a:ext cx="195802" cy="156763"/>
+              </a:xfrm>
+              <a:prstGeom prst="straightConnector1">
+                <a:avLst/>
+              </a:prstGeom>
+              <a:ln w="12700">
+                <a:solidFill>
+                  <a:schemeClr val="tx1"/>
+                </a:solidFill>
+                <a:tailEnd type="triangle" w="med" len="lg"/>
+              </a:ln>
+            </p:spPr>
+            <p:style>
+              <a:lnRef idx="1">
+                <a:schemeClr val="accent1"/>
+              </a:lnRef>
+              <a:fillRef idx="0">
+                <a:schemeClr val="accent1"/>
+              </a:fillRef>
+              <a:effectRef idx="0">
+                <a:schemeClr val="accent1"/>
+              </a:effectRef>
+              <a:fontRef idx="minor">
+                <a:schemeClr val="tx1"/>
+              </a:fontRef>
+            </p:style>
+          </p:cxnSp>
+          <p:cxnSp>
+            <p:nvCxnSpPr>
+              <p:cNvPr id="81" name="Straight Arrow Connector 18">
+                <a:extLst>
+                  <a:ext uri="{FF2B5EF4-FFF2-40B4-BE49-F238E27FC236}">
+                    <a16:creationId xmlns:a16="http://schemas.microsoft.com/office/drawing/2014/main" id="{D9D2B841-D7D4-401B-948A-E4B6E6D6C796}"/>
+                  </a:ext>
+                </a:extLst>
+              </p:cNvPr>
+              <p:cNvCxnSpPr>
+                <a:cxnSpLocks/>
+              </p:cNvCxnSpPr>
+              <p:nvPr/>
+            </p:nvCxnSpPr>
+            <p:spPr>
+              <a:xfrm rot="16200000" flipH="1" flipV="1">
+                <a:off x="1818951" y="43150"/>
+                <a:ext cx="0" cy="342950"/>
+              </a:xfrm>
+              <a:prstGeom prst="straightConnector1">
+                <a:avLst/>
+              </a:prstGeom>
+              <a:ln w="12700">
+                <a:solidFill>
+                  <a:schemeClr val="tx1"/>
+                </a:solidFill>
+                <a:tailEnd type="triangle" w="med" len="lg"/>
+              </a:ln>
+            </p:spPr>
+            <p:style>
+              <a:lnRef idx="1">
+                <a:schemeClr val="accent1"/>
+              </a:lnRef>
+              <a:fillRef idx="0">
+                <a:schemeClr val="accent1"/>
+              </a:fillRef>
+              <a:effectRef idx="0">
+                <a:schemeClr val="accent1"/>
+              </a:effectRef>
+              <a:fontRef idx="minor">
+                <a:schemeClr val="tx1"/>
+              </a:fontRef>
+            </p:style>
+          </p:cxnSp>
+          <p:sp>
+            <p:nvSpPr>
+              <p:cNvPr id="82" name="Oval 20">
+                <a:extLst>
+                  <a:ext uri="{FF2B5EF4-FFF2-40B4-BE49-F238E27FC236}">
+                    <a16:creationId xmlns:a16="http://schemas.microsoft.com/office/drawing/2014/main" id="{08870176-ADC2-42AA-9719-C958B3C3327C}"/>
+                  </a:ext>
+                </a:extLst>
+              </p:cNvPr>
+              <p:cNvSpPr/>
+              <p:nvPr/>
+            </p:nvSpPr>
+            <p:spPr>
+              <a:xfrm>
+                <a:off x="1187740" y="134864"/>
+                <a:ext cx="162450" cy="168277"/>
+              </a:xfrm>
+              <a:prstGeom prst="ellipse">
+                <a:avLst/>
+              </a:prstGeom>
+              <a:gradFill flip="none" rotWithShape="1">
+                <a:gsLst>
+                  <a:gs pos="100000">
+                    <a:schemeClr val="tx1">
+                      <a:lumMod val="85000"/>
+                      <a:lumOff val="15000"/>
+                    </a:schemeClr>
+                  </a:gs>
+                  <a:gs pos="50000">
+                    <a:schemeClr val="tx1">
+                      <a:lumMod val="65000"/>
+                      <a:lumOff val="35000"/>
+                      <a:tint val="44500"/>
+                      <a:satMod val="160000"/>
+                    </a:schemeClr>
+                  </a:gs>
+                  <a:gs pos="0">
+                    <a:schemeClr val="tx1">
+                      <a:lumMod val="65000"/>
+                      <a:lumOff val="35000"/>
+                      <a:tint val="23500"/>
+                      <a:satMod val="160000"/>
+                    </a:schemeClr>
+                  </a:gs>
+                </a:gsLst>
+                <a:path path="circle">
+                  <a:fillToRect l="50000" t="50000" r="50000" b="50000"/>
+                </a:path>
+                <a:tileRect/>
+              </a:gradFill>
+              <a:ln>
+                <a:solidFill>
+                  <a:schemeClr val="tx1"/>
+                </a:solidFill>
+              </a:ln>
+            </p:spPr>
+            <p:style>
+              <a:lnRef idx="2">
+                <a:schemeClr val="accent1">
+                  <a:shade val="50000"/>
+                </a:schemeClr>
+              </a:lnRef>
+              <a:fillRef idx="1">
+                <a:schemeClr val="accent1"/>
+              </a:fillRef>
+              <a:effectRef idx="0">
+                <a:schemeClr val="accent1"/>
+              </a:effectRef>
+              <a:fontRef idx="minor">
+                <a:schemeClr val="lt1"/>
+              </a:fontRef>
+            </p:style>
+            <p:txBody>
+              <a:bodyPr rtlCol="0" anchor="ctr"/>
+              <a:lstStyle/>
+              <a:p>
+                <a:pPr algn="ctr"/>
+                <a:endParaRPr lang="en-US" sz="1600">
+                  <a:latin typeface="Times New Roman" panose="02020603050405020304" pitchFamily="18" charset="0"/>
+                  <a:cs typeface="Times New Roman" panose="02020603050405020304" pitchFamily="18" charset="0"/>
+                </a:endParaRPr>
+              </a:p>
+            </p:txBody>
+          </p:sp>
+          <p:sp>
+            <p:nvSpPr>
+              <p:cNvPr id="84" name="Partial Circle 9">
+                <a:extLst>
+                  <a:ext uri="{FF2B5EF4-FFF2-40B4-BE49-F238E27FC236}">
+                    <a16:creationId xmlns:a16="http://schemas.microsoft.com/office/drawing/2014/main" id="{81683723-6BA4-410C-81F9-B823A5AB872E}"/>
+                  </a:ext>
+                </a:extLst>
+              </p:cNvPr>
+              <p:cNvSpPr>
+                <a:spLocks noChangeAspect="1"/>
+              </p:cNvSpPr>
+              <p:nvPr/>
+            </p:nvSpPr>
+            <p:spPr>
+              <a:xfrm rot="16200000" flipH="1">
+                <a:off x="1924887" y="120473"/>
+                <a:ext cx="102408" cy="197724"/>
+              </a:xfrm>
+              <a:prstGeom prst="pie">
+                <a:avLst>
+                  <a:gd name="adj1" fmla="val 16258856"/>
+                  <a:gd name="adj2" fmla="val 19252600"/>
+                </a:avLst>
+              </a:prstGeom>
+              <a:gradFill flip="none" rotWithShape="1">
+                <a:gsLst>
+                  <a:gs pos="0">
+                    <a:schemeClr val="tx1"/>
+                  </a:gs>
+                  <a:gs pos="50000">
+                    <a:schemeClr val="tx1">
+                      <a:lumMod val="50000"/>
+                      <a:lumOff val="50000"/>
+                    </a:schemeClr>
+                  </a:gs>
+                  <a:gs pos="100000">
+                    <a:schemeClr val="bg1">
+                      <a:lumMod val="50000"/>
+                    </a:schemeClr>
+                  </a:gs>
+                </a:gsLst>
+                <a:lin ang="2700000" scaled="1"/>
+                <a:tileRect/>
+              </a:gradFill>
+              <a:ln w="19050">
+                <a:solidFill>
+                  <a:schemeClr val="tx1"/>
+                </a:solidFill>
+              </a:ln>
+            </p:spPr>
+            <p:style>
+              <a:lnRef idx="2">
+                <a:schemeClr val="accent1">
+                  <a:shade val="50000"/>
+                </a:schemeClr>
+              </a:lnRef>
+              <a:fillRef idx="1">
+                <a:schemeClr val="accent1"/>
+              </a:fillRef>
+              <a:effectRef idx="0">
+                <a:schemeClr val="accent1"/>
+              </a:effectRef>
+              <a:fontRef idx="minor">
+                <a:schemeClr val="lt1"/>
+              </a:fontRef>
+            </p:style>
+            <p:txBody>
+              <a:bodyPr rtlCol="0" anchor="ctr"/>
+              <a:lstStyle/>
+              <a:p>
+                <a:pPr algn="ctr"/>
+                <a:endParaRPr lang="en-US" sz="1600" dirty="0">
+                  <a:solidFill>
+                    <a:schemeClr val="tx1"/>
+                  </a:solidFill>
+                  <a:latin typeface="Times New Roman" panose="02020603050405020304" pitchFamily="18" charset="0"/>
+                  <a:cs typeface="Times New Roman" panose="02020603050405020304" pitchFamily="18" charset="0"/>
+                </a:endParaRPr>
+              </a:p>
+            </p:txBody>
+          </p:sp>
+          <mc:AlternateContent xmlns:mc="http://schemas.openxmlformats.org/markup-compatibility/2006" xmlns:a14="http://schemas.microsoft.com/office/drawing/2010/main">
+            <mc:Choice Requires="a14">
+              <p:sp>
+                <p:nvSpPr>
+                  <p:cNvPr id="85" name="TextBox 10">
+                    <a:extLst>
+                      <a:ext uri="{FF2B5EF4-FFF2-40B4-BE49-F238E27FC236}">
+                        <a16:creationId xmlns:a16="http://schemas.microsoft.com/office/drawing/2014/main" id="{5C8BEE24-B80E-45D5-A366-BF8CE052562A}"/>
+                      </a:ext>
+                    </a:extLst>
+                  </p:cNvPr>
+                  <p:cNvSpPr txBox="1"/>
+                  <p:nvPr/>
+                </p:nvSpPr>
+                <p:spPr>
+                  <a:xfrm>
+                    <a:off x="1560871" y="155523"/>
+                    <a:ext cx="315234" cy="338554"/>
+                  </a:xfrm>
+                  <a:prstGeom prst="rect">
+                    <a:avLst/>
+                  </a:prstGeom>
+                  <a:noFill/>
+                </p:spPr>
+                <p:txBody>
+                  <a:bodyPr wrap="square" rtlCol="0">
+                    <a:spAutoFit/>
+                  </a:bodyPr>
+                  <a:lstStyle/>
+                  <a:p>
+                    <a:pPr/>
+                    <a14:m>
+                      <m:oMathPara xmlns:m="http://schemas.openxmlformats.org/officeDocument/2006/math">
+                        <m:oMathParaPr>
+                          <m:jc m:val="centerGroup"/>
+                        </m:oMathParaPr>
+                        <m:oMath xmlns:m="http://schemas.openxmlformats.org/officeDocument/2006/math">
+                          <m:r>
+                            <a:rPr lang="en-US" sz="1600" i="1">
+                              <a:latin typeface="Cambria Math" panose="02040503050406030204" pitchFamily="18" charset="0"/>
+                            </a:rPr>
+                            <m:t>𝛼</m:t>
+                          </m:r>
+                        </m:oMath>
+                      </m:oMathPara>
+                    </a14:m>
+                    <a:endParaRPr lang="en-US" sz="1600" dirty="0">
+                      <a:latin typeface="Times New Roman" panose="02020603050405020304" pitchFamily="18" charset="0"/>
+                      <a:cs typeface="Times New Roman" panose="02020603050405020304" pitchFamily="18" charset="0"/>
+                    </a:endParaRPr>
+                  </a:p>
+                </p:txBody>
+              </p:sp>
+            </mc:Choice>
+            <mc:Fallback xmlns="">
+              <p:sp>
+                <p:nvSpPr>
+                  <p:cNvPr id="85" name="TextBox 10">
+                    <a:extLst>
+                      <a:ext uri="{FF2B5EF4-FFF2-40B4-BE49-F238E27FC236}">
+                        <a16:creationId xmlns:a16="http://schemas.microsoft.com/office/drawing/2014/main" id="{5C8BEE24-B80E-45D5-A366-BF8CE052562A}"/>
+                      </a:ext>
+                    </a:extLst>
+                  </p:cNvPr>
+                  <p:cNvSpPr txBox="1">
+                    <a:spLocks noRot="1" noChangeAspect="1" noMove="1" noResize="1" noEditPoints="1" noAdjustHandles="1" noChangeArrowheads="1" noChangeShapeType="1" noTextEdit="1"/>
+                  </p:cNvSpPr>
+                  <p:nvPr/>
+                </p:nvSpPr>
+                <p:spPr>
+                  <a:xfrm>
+                    <a:off x="1560871" y="155523"/>
+                    <a:ext cx="315234" cy="338554"/>
+                  </a:xfrm>
+                  <a:prstGeom prst="rect">
+                    <a:avLst/>
+                  </a:prstGeom>
+                  <a:blipFill>
+                    <a:blip r:embed="rId12"/>
+                    <a:stretch>
+                      <a:fillRect/>
+                    </a:stretch>
+                  </a:blipFill>
+                </p:spPr>
+                <p:txBody>
+                  <a:bodyPr/>
+                  <a:lstStyle/>
+                  <a:p>
+                    <a:r>
+                      <a:rPr lang="zh-TW" altLang="en-US">
+                        <a:noFill/>
+                      </a:rPr>
+                      <a:t> </a:t>
+                    </a:r>
+                  </a:p>
+                </p:txBody>
+              </p:sp>
+            </mc:Fallback>
+          </mc:AlternateContent>
+          <p:cxnSp>
+            <p:nvCxnSpPr>
+              <p:cNvPr id="86" name="Straight Arrow Connector 17">
+                <a:extLst>
+                  <a:ext uri="{FF2B5EF4-FFF2-40B4-BE49-F238E27FC236}">
+                    <a16:creationId xmlns:a16="http://schemas.microsoft.com/office/drawing/2014/main" id="{40C44466-68AD-46A6-9046-58B2AB26F3A9}"/>
+                  </a:ext>
+                </a:extLst>
+              </p:cNvPr>
+              <p:cNvCxnSpPr>
+                <a:cxnSpLocks/>
+              </p:cNvCxnSpPr>
+              <p:nvPr/>
+            </p:nvCxnSpPr>
+            <p:spPr>
+              <a:xfrm flipH="1">
+                <a:off x="1768140" y="220545"/>
+                <a:ext cx="221585" cy="286539"/>
+              </a:xfrm>
+              <a:prstGeom prst="straightConnector1">
+                <a:avLst/>
+              </a:prstGeom>
+              <a:ln w="38100">
+                <a:solidFill>
+                  <a:schemeClr val="tx1"/>
+                </a:solidFill>
+                <a:tailEnd type="stealth" w="lg" len="lg"/>
+              </a:ln>
+            </p:spPr>
+            <p:style>
+              <a:lnRef idx="3">
+                <a:schemeClr val="accent6"/>
+              </a:lnRef>
+              <a:fillRef idx="0">
+                <a:schemeClr val="accent6"/>
+              </a:fillRef>
+              <a:effectRef idx="2">
+                <a:schemeClr val="accent6"/>
+              </a:effectRef>
+              <a:fontRef idx="minor">
+                <a:schemeClr val="tx1"/>
+              </a:fontRef>
+            </p:style>
+          </p:cxnSp>
+          <p:sp>
+            <p:nvSpPr>
+              <p:cNvPr id="87" name="Partial Circle 9">
+                <a:extLst>
+                  <a:ext uri="{FF2B5EF4-FFF2-40B4-BE49-F238E27FC236}">
+                    <a16:creationId xmlns:a16="http://schemas.microsoft.com/office/drawing/2014/main" id="{0A10C67B-E8F9-447B-BF78-4CE42E6A8E1D}"/>
+                  </a:ext>
+                </a:extLst>
+              </p:cNvPr>
+              <p:cNvSpPr>
+                <a:spLocks noChangeAspect="1"/>
+              </p:cNvSpPr>
+              <p:nvPr/>
+            </p:nvSpPr>
+            <p:spPr>
+              <a:xfrm>
+                <a:off x="1912164" y="83252"/>
+                <a:ext cx="149214" cy="301366"/>
+              </a:xfrm>
+              <a:prstGeom prst="pie">
+                <a:avLst>
+                  <a:gd name="adj1" fmla="val 16258856"/>
+                  <a:gd name="adj2" fmla="val 19252600"/>
+                </a:avLst>
+              </a:prstGeom>
+              <a:gradFill flip="none" rotWithShape="1">
+                <a:gsLst>
+                  <a:gs pos="0">
+                    <a:schemeClr val="tx1"/>
+                  </a:gs>
+                  <a:gs pos="50000">
+                    <a:schemeClr val="tx1">
+                      <a:lumMod val="50000"/>
+                      <a:lumOff val="50000"/>
+                    </a:schemeClr>
+                  </a:gs>
+                  <a:gs pos="100000">
+                    <a:schemeClr val="bg1">
+                      <a:lumMod val="50000"/>
+                    </a:schemeClr>
+                  </a:gs>
+                </a:gsLst>
+                <a:lin ang="2700000" scaled="1"/>
+                <a:tileRect/>
+              </a:gradFill>
+              <a:ln w="19050">
+                <a:solidFill>
+                  <a:schemeClr val="tx1"/>
+                </a:solidFill>
+              </a:ln>
+            </p:spPr>
+            <p:style>
+              <a:lnRef idx="2">
+                <a:schemeClr val="accent1">
+                  <a:shade val="50000"/>
+                </a:schemeClr>
+              </a:lnRef>
+              <a:fillRef idx="1">
+                <a:schemeClr val="accent1"/>
+              </a:fillRef>
+              <a:effectRef idx="0">
+                <a:schemeClr val="accent1"/>
+              </a:effectRef>
+              <a:fontRef idx="minor">
+                <a:schemeClr val="lt1"/>
+              </a:fontRef>
+            </p:style>
+            <p:txBody>
+              <a:bodyPr rtlCol="0" anchor="ctr"/>
+              <a:lstStyle/>
+              <a:p>
+                <a:pPr algn="ctr"/>
+                <a:endParaRPr lang="en-US" sz="1600" dirty="0">
+                  <a:solidFill>
+                    <a:schemeClr val="tx1"/>
+                  </a:solidFill>
+                  <a:latin typeface="Times New Roman" panose="02020603050405020304" pitchFamily="18" charset="0"/>
+                  <a:cs typeface="Times New Roman" panose="02020603050405020304" pitchFamily="18" charset="0"/>
+                </a:endParaRPr>
+              </a:p>
+            </p:txBody>
+          </p:sp>
+          <mc:AlternateContent xmlns:mc="http://schemas.openxmlformats.org/markup-compatibility/2006" xmlns:a14="http://schemas.microsoft.com/office/drawing/2010/main">
+            <mc:Choice Requires="a14">
+              <p:sp>
+                <p:nvSpPr>
+                  <p:cNvPr id="88" name="TextBox 10">
+                    <a:extLst>
+                      <a:ext uri="{FF2B5EF4-FFF2-40B4-BE49-F238E27FC236}">
+                        <a16:creationId xmlns:a16="http://schemas.microsoft.com/office/drawing/2014/main" id="{7641A4AE-D759-48EC-B1E9-5642B6CEF6D9}"/>
+                      </a:ext>
+                    </a:extLst>
+                  </p:cNvPr>
+                  <p:cNvSpPr txBox="1"/>
+                  <p:nvPr/>
+                </p:nvSpPr>
+                <p:spPr>
+                  <a:xfrm>
+                    <a:off x="1951942" y="-164895"/>
+                    <a:ext cx="297046" cy="338554"/>
+                  </a:xfrm>
+                  <a:prstGeom prst="rect">
+                    <a:avLst/>
+                  </a:prstGeom>
+                  <a:noFill/>
+                </p:spPr>
+                <p:txBody>
+                  <a:bodyPr wrap="square" rtlCol="0">
+                    <a:spAutoFit/>
+                  </a:bodyPr>
+                  <a:lstStyle/>
+                  <a:p>
+                    <a:pPr/>
+                    <a14:m>
+                      <m:oMathPara xmlns:m="http://schemas.openxmlformats.org/officeDocument/2006/math">
+                        <m:oMathParaPr>
+                          <m:jc m:val="centerGroup"/>
+                        </m:oMathParaPr>
+                        <m:oMath xmlns:m="http://schemas.openxmlformats.org/officeDocument/2006/math">
+                          <m:r>
+                            <a:rPr lang="en-US" sz="1600" i="1">
+                              <a:latin typeface="Cambria Math" panose="02040503050406030204" pitchFamily="18" charset="0"/>
+                            </a:rPr>
+                            <m:t>𝛽</m:t>
+                          </m:r>
+                        </m:oMath>
+                      </m:oMathPara>
+                    </a14:m>
+                    <a:endParaRPr lang="en-US" sz="1600" dirty="0">
+                      <a:latin typeface="Times New Roman" panose="02020603050405020304" pitchFamily="18" charset="0"/>
+                      <a:cs typeface="Times New Roman" panose="02020603050405020304" pitchFamily="18" charset="0"/>
+                    </a:endParaRPr>
+                  </a:p>
+                </p:txBody>
+              </p:sp>
+            </mc:Choice>
+            <mc:Fallback xmlns="">
+              <p:sp>
+                <p:nvSpPr>
+                  <p:cNvPr id="88" name="TextBox 10">
+                    <a:extLst>
+                      <a:ext uri="{FF2B5EF4-FFF2-40B4-BE49-F238E27FC236}">
+                        <a16:creationId xmlns:a16="http://schemas.microsoft.com/office/drawing/2014/main" id="{7641A4AE-D759-48EC-B1E9-5642B6CEF6D9}"/>
+                      </a:ext>
+                    </a:extLst>
+                  </p:cNvPr>
+                  <p:cNvSpPr txBox="1">
+                    <a:spLocks noRot="1" noChangeAspect="1" noMove="1" noResize="1" noEditPoints="1" noAdjustHandles="1" noChangeArrowheads="1" noChangeShapeType="1" noTextEdit="1"/>
+                  </p:cNvSpPr>
+                  <p:nvPr/>
+                </p:nvSpPr>
+                <p:spPr>
+                  <a:xfrm>
+                    <a:off x="1951942" y="-164895"/>
+                    <a:ext cx="297046" cy="338554"/>
+                  </a:xfrm>
+                  <a:prstGeom prst="rect">
+                    <a:avLst/>
+                  </a:prstGeom>
+                  <a:blipFill>
+                    <a:blip r:embed="rId13"/>
+                    <a:stretch>
+                      <a:fillRect l="-2083" r="-4167" b="-12727"/>
+                    </a:stretch>
+                  </a:blipFill>
+                </p:spPr>
+                <p:txBody>
+                  <a:bodyPr/>
+                  <a:lstStyle/>
+                  <a:p>
+                    <a:r>
+                      <a:rPr lang="zh-TW" altLang="en-US">
+                        <a:noFill/>
+                      </a:rPr>
+                      <a:t> </a:t>
+                    </a:r>
+                  </a:p>
+                </p:txBody>
+              </p:sp>
+            </mc:Fallback>
+          </mc:AlternateContent>
+          <p:cxnSp>
+            <p:nvCxnSpPr>
+              <p:cNvPr id="89" name="Straight Arrow Connector 17">
+                <a:extLst>
+                  <a:ext uri="{FF2B5EF4-FFF2-40B4-BE49-F238E27FC236}">
+                    <a16:creationId xmlns:a16="http://schemas.microsoft.com/office/drawing/2014/main" id="{FAB80374-67F8-4F58-B896-A7386F0D18EE}"/>
+                  </a:ext>
+                </a:extLst>
+              </p:cNvPr>
+              <p:cNvCxnSpPr>
+                <a:cxnSpLocks/>
+              </p:cNvCxnSpPr>
+              <p:nvPr/>
+            </p:nvCxnSpPr>
+            <p:spPr>
+              <a:xfrm flipV="1">
+                <a:off x="1981637" y="-225181"/>
+                <a:ext cx="571923" cy="449644"/>
+              </a:xfrm>
+              <a:prstGeom prst="straightConnector1">
+                <a:avLst/>
+              </a:prstGeom>
+              <a:ln w="38100">
+                <a:solidFill>
+                  <a:schemeClr val="tx1"/>
+                </a:solidFill>
+                <a:tailEnd type="stealth" w="lg" len="lg"/>
+              </a:ln>
+            </p:spPr>
+            <p:style>
+              <a:lnRef idx="3">
+                <a:schemeClr val="accent6"/>
+              </a:lnRef>
+              <a:fillRef idx="0">
+                <a:schemeClr val="accent6"/>
+              </a:fillRef>
+              <a:effectRef idx="2">
+                <a:schemeClr val="accent6"/>
+              </a:effectRef>
+              <a:fontRef idx="minor">
+                <a:schemeClr val="tx1"/>
+              </a:fontRef>
+            </p:style>
+          </p:cxnSp>
+          <p:sp>
+            <p:nvSpPr>
+              <p:cNvPr id="90" name="等腰三角形 89">
+                <a:extLst>
+                  <a:ext uri="{FF2B5EF4-FFF2-40B4-BE49-F238E27FC236}">
+                    <a16:creationId xmlns:a16="http://schemas.microsoft.com/office/drawing/2014/main" id="{B2CDBC32-AB36-4385-B13D-37A84F496152}"/>
+                  </a:ext>
+                </a:extLst>
+              </p:cNvPr>
+              <p:cNvSpPr/>
+              <p:nvPr/>
+            </p:nvSpPr>
+            <p:spPr>
+              <a:xfrm rot="5400000">
+                <a:off x="1943813" y="420057"/>
+                <a:ext cx="329835" cy="221179"/>
+              </a:xfrm>
+              <a:prstGeom prst="triangle">
                 <a:avLst/>
               </a:prstGeom>
             </p:spPr>
@@ -9163,42 +8414,891 @@
               </a:fontRef>
             </p:style>
             <p:txBody>
-              <a:bodyPr wrap="square">
-                <a:spAutoFit/>
+              <a:bodyPr rot="0" spcFirstLastPara="0" vertOverflow="overflow" horzOverflow="overflow" vert="horz" wrap="square" lIns="71889" tIns="35945" rIns="71889" bIns="35945" numCol="1" spcCol="0" rtlCol="0" fromWordArt="0" anchor="ctr" anchorCtr="0" forceAA="0" compatLnSpc="1">
+                <a:prstTxWarp prst="textNoShape">
+                  <a:avLst/>
+                </a:prstTxWarp>
+                <a:noAutofit/>
               </a:bodyPr>
               <a:lstStyle/>
               <a:p>
                 <a:pPr algn="ctr"/>
-                <a:r>
-                  <a:rPr lang="en-US" altLang="zh-TW" dirty="0">
-                    <a:solidFill>
-                      <a:schemeClr val="tx1"/>
-                    </a:solidFill>
+                <a:endParaRPr lang="zh-TW" altLang="en-US" sz="1415" dirty="0">
+                  <a:latin typeface="Times New Roman" panose="02020603050405020304" pitchFamily="18" charset="0"/>
+                  <a:cs typeface="Times New Roman" panose="02020603050405020304" pitchFamily="18" charset="0"/>
+                </a:endParaRPr>
+              </a:p>
+            </p:txBody>
+          </p:sp>
+          <p:sp>
+            <p:nvSpPr>
+              <p:cNvPr id="60" name="Oval 22">
+                <a:extLst>
+                  <a:ext uri="{FF2B5EF4-FFF2-40B4-BE49-F238E27FC236}">
+                    <a16:creationId xmlns:a16="http://schemas.microsoft.com/office/drawing/2014/main" id="{63F05932-6193-4703-A2BF-1CFD15C079F2}"/>
+                  </a:ext>
+                </a:extLst>
+              </p:cNvPr>
+              <p:cNvSpPr/>
+              <p:nvPr/>
+            </p:nvSpPr>
+            <p:spPr>
+              <a:xfrm>
+                <a:off x="2247185" y="400410"/>
+                <a:ext cx="162450" cy="168277"/>
+              </a:xfrm>
+              <a:prstGeom prst="ellipse">
+                <a:avLst/>
+              </a:prstGeom>
+              <a:gradFill flip="none" rotWithShape="1">
+                <a:gsLst>
+                  <a:gs pos="100000">
+                    <a:schemeClr val="tx1">
+                      <a:lumMod val="85000"/>
+                      <a:lumOff val="15000"/>
+                    </a:schemeClr>
+                  </a:gs>
+                  <a:gs pos="50000">
+                    <a:schemeClr val="tx1">
+                      <a:lumMod val="65000"/>
+                      <a:lumOff val="35000"/>
+                      <a:tint val="44500"/>
+                      <a:satMod val="160000"/>
+                    </a:schemeClr>
+                  </a:gs>
+                  <a:gs pos="0">
+                    <a:schemeClr val="tx1">
+                      <a:lumMod val="65000"/>
+                      <a:lumOff val="35000"/>
+                      <a:tint val="23500"/>
+                      <a:satMod val="160000"/>
+                    </a:schemeClr>
+                  </a:gs>
+                </a:gsLst>
+                <a:path path="circle">
+                  <a:fillToRect l="50000" t="50000" r="50000" b="50000"/>
+                </a:path>
+                <a:tileRect/>
+              </a:gradFill>
+              <a:ln>
+                <a:solidFill>
+                  <a:schemeClr val="tx1"/>
+                </a:solidFill>
+              </a:ln>
+            </p:spPr>
+            <p:style>
+              <a:lnRef idx="2">
+                <a:schemeClr val="accent1">
+                  <a:shade val="50000"/>
+                </a:schemeClr>
+              </a:lnRef>
+              <a:fillRef idx="1">
+                <a:schemeClr val="accent1"/>
+              </a:fillRef>
+              <a:effectRef idx="0">
+                <a:schemeClr val="accent1"/>
+              </a:effectRef>
+              <a:fontRef idx="minor">
+                <a:schemeClr val="lt1"/>
+              </a:fontRef>
+            </p:style>
+            <p:txBody>
+              <a:bodyPr rtlCol="0" anchor="ctr"/>
+              <a:lstStyle/>
+              <a:p>
+                <a:pPr algn="ctr"/>
+                <a:endParaRPr lang="en-US" sz="1600" dirty="0">
+                  <a:latin typeface="Times New Roman" panose="02020603050405020304" pitchFamily="18" charset="0"/>
+                  <a:cs typeface="Times New Roman" panose="02020603050405020304" pitchFamily="18" charset="0"/>
+                </a:endParaRPr>
+              </a:p>
+            </p:txBody>
+          </p:sp>
+        </p:grpSp>
+        <p:grpSp>
+          <p:nvGrpSpPr>
+            <p:cNvPr id="100" name="群組 99">
+              <a:extLst>
+                <a:ext uri="{FF2B5EF4-FFF2-40B4-BE49-F238E27FC236}">
+                  <a16:creationId xmlns:a16="http://schemas.microsoft.com/office/drawing/2014/main" id="{70E25E55-64C6-4FCD-A170-BE3D052857AA}"/>
+                </a:ext>
+              </a:extLst>
+            </p:cNvPr>
+            <p:cNvGrpSpPr/>
+            <p:nvPr/>
+          </p:nvGrpSpPr>
+          <p:grpSpPr>
+            <a:xfrm>
+              <a:off x="1641417" y="2238375"/>
+              <a:ext cx="8230673" cy="3790928"/>
+              <a:chOff x="1848481" y="2270706"/>
+              <a:chExt cx="7995034" cy="3682396"/>
+            </a:xfrm>
+          </p:grpSpPr>
+          <p:grpSp>
+            <p:nvGrpSpPr>
+              <p:cNvPr id="99" name="群組 98">
+                <a:extLst>
+                  <a:ext uri="{FF2B5EF4-FFF2-40B4-BE49-F238E27FC236}">
+                    <a16:creationId xmlns:a16="http://schemas.microsoft.com/office/drawing/2014/main" id="{30027040-2E8A-4E06-BC76-736C83B9C1EE}"/>
+                  </a:ext>
+                </a:extLst>
+              </p:cNvPr>
+              <p:cNvGrpSpPr/>
+              <p:nvPr/>
+            </p:nvGrpSpPr>
+            <p:grpSpPr>
+              <a:xfrm>
+                <a:off x="1848481" y="2270706"/>
+                <a:ext cx="7995034" cy="3682396"/>
+                <a:chOff x="1848481" y="2270706"/>
+                <a:chExt cx="7995034" cy="3682396"/>
+              </a:xfrm>
+            </p:grpSpPr>
+            <p:sp>
+              <p:nvSpPr>
+                <p:cNvPr id="62" name="矩形: 圓角 61">
+                  <a:extLst>
+                    <a:ext uri="{FF2B5EF4-FFF2-40B4-BE49-F238E27FC236}">
+                      <a16:creationId xmlns:a16="http://schemas.microsoft.com/office/drawing/2014/main" id="{11160685-28B3-46DE-9AC0-6E0BD39730FC}"/>
+                    </a:ext>
+                  </a:extLst>
+                </p:cNvPr>
+                <p:cNvSpPr/>
+                <p:nvPr/>
+              </p:nvSpPr>
+              <p:spPr>
+                <a:xfrm>
+                  <a:off x="2043627" y="4645917"/>
+                  <a:ext cx="7763887" cy="1151081"/>
+                </a:xfrm>
+                <a:prstGeom prst="roundRect">
+                  <a:avLst>
+                    <a:gd name="adj" fmla="val 4048"/>
+                  </a:avLst>
+                </a:prstGeom>
+                <a:gradFill flip="none" rotWithShape="1">
+                  <a:gsLst>
+                    <a:gs pos="0">
+                      <a:schemeClr val="bg1">
+                        <a:lumMod val="85000"/>
+                      </a:schemeClr>
+                    </a:gs>
+                    <a:gs pos="100000">
+                      <a:schemeClr val="bg1">
+                        <a:lumMod val="95000"/>
+                      </a:schemeClr>
+                    </a:gs>
+                  </a:gsLst>
+                  <a:lin ang="16200000" scaled="1"/>
+                  <a:tileRect/>
+                </a:gradFill>
+                <a:ln>
+                  <a:noFill/>
+                </a:ln>
+              </p:spPr>
+              <p:style>
+                <a:lnRef idx="0">
+                  <a:schemeClr val="accent3"/>
+                </a:lnRef>
+                <a:fillRef idx="3">
+                  <a:schemeClr val="accent3"/>
+                </a:fillRef>
+                <a:effectRef idx="3">
+                  <a:schemeClr val="accent3"/>
+                </a:effectRef>
+                <a:fontRef idx="minor">
+                  <a:schemeClr val="lt1"/>
+                </a:fontRef>
+              </p:style>
+              <p:txBody>
+                <a:bodyPr rot="0" spcFirstLastPara="0" vertOverflow="overflow" horzOverflow="overflow" vert="horz" wrap="square" lIns="37158" tIns="18579" rIns="37158" bIns="18579" numCol="1" spcCol="0" rtlCol="0" fromWordArt="0" anchor="ctr" anchorCtr="0" forceAA="0" compatLnSpc="1">
+                  <a:prstTxWarp prst="textNoShape">
+                    <a:avLst/>
+                  </a:prstTxWarp>
+                  <a:noAutofit/>
+                </a:bodyPr>
+                <a:lstStyle/>
+                <a:p>
+                  <a:pPr algn="ctr"/>
+                  <a:endParaRPr lang="zh-TW" altLang="en-US" sz="731" dirty="0">
                     <a:latin typeface="Times New Roman" panose="02020603050405020304" pitchFamily="18" charset="0"/>
                     <a:cs typeface="Times New Roman" panose="02020603050405020304" pitchFamily="18" charset="0"/>
-                  </a:rPr>
-                  <a:t>Equator line</a:t>
-                </a:r>
-              </a:p>
-              <a:p>
-                <a:pPr algn="ctr"/>
-                <a14:m>
-                  <m:oMathPara xmlns:m="http://schemas.openxmlformats.org/officeDocument/2006/math">
-                    <m:oMathParaPr>
-                      <m:jc m:val="center"/>
-                    </m:oMathParaPr>
+                  </a:endParaRPr>
+                </a:p>
+              </p:txBody>
+            </p:sp>
+            <p:sp>
+              <p:nvSpPr>
+                <p:cNvPr id="97" name="矩形: 圓角 96">
+                  <a:extLst>
+                    <a:ext uri="{FF2B5EF4-FFF2-40B4-BE49-F238E27FC236}">
+                      <a16:creationId xmlns:a16="http://schemas.microsoft.com/office/drawing/2014/main" id="{045E8295-6028-4BF4-9E21-EB4697ED9947}"/>
+                    </a:ext>
+                  </a:extLst>
+                </p:cNvPr>
+                <p:cNvSpPr/>
+                <p:nvPr/>
+              </p:nvSpPr>
+              <p:spPr>
+                <a:xfrm>
+                  <a:off x="2043627" y="3500469"/>
+                  <a:ext cx="7763887" cy="1151081"/>
+                </a:xfrm>
+                <a:prstGeom prst="roundRect">
+                  <a:avLst>
+                    <a:gd name="adj" fmla="val 4048"/>
+                  </a:avLst>
+                </a:prstGeom>
+                <a:gradFill flip="none" rotWithShape="1">
+                  <a:gsLst>
+                    <a:gs pos="0">
+                      <a:schemeClr val="bg1">
+                        <a:lumMod val="85000"/>
+                      </a:schemeClr>
+                    </a:gs>
+                    <a:gs pos="100000">
+                      <a:schemeClr val="bg1">
+                        <a:lumMod val="95000"/>
+                      </a:schemeClr>
+                    </a:gs>
+                  </a:gsLst>
+                  <a:lin ang="16200000" scaled="1"/>
+                  <a:tileRect/>
+                </a:gradFill>
+                <a:ln>
+                  <a:noFill/>
+                </a:ln>
+              </p:spPr>
+              <p:style>
+                <a:lnRef idx="0">
+                  <a:schemeClr val="accent3"/>
+                </a:lnRef>
+                <a:fillRef idx="3">
+                  <a:schemeClr val="accent3"/>
+                </a:fillRef>
+                <a:effectRef idx="3">
+                  <a:schemeClr val="accent3"/>
+                </a:effectRef>
+                <a:fontRef idx="minor">
+                  <a:schemeClr val="lt1"/>
+                </a:fontRef>
+              </p:style>
+              <p:txBody>
+                <a:bodyPr rot="0" spcFirstLastPara="0" vertOverflow="overflow" horzOverflow="overflow" vert="horz" wrap="square" lIns="37158" tIns="18579" rIns="37158" bIns="18579" numCol="1" spcCol="0" rtlCol="0" fromWordArt="0" anchor="ctr" anchorCtr="0" forceAA="0" compatLnSpc="1">
+                  <a:prstTxWarp prst="textNoShape">
+                    <a:avLst/>
+                  </a:prstTxWarp>
+                  <a:noAutofit/>
+                </a:bodyPr>
+                <a:lstStyle/>
+                <a:p>
+                  <a:pPr algn="ctr"/>
+                  <a:endParaRPr lang="zh-TW" altLang="en-US" sz="731" dirty="0">
+                    <a:latin typeface="Times New Roman" panose="02020603050405020304" pitchFamily="18" charset="0"/>
+                    <a:cs typeface="Times New Roman" panose="02020603050405020304" pitchFamily="18" charset="0"/>
+                  </a:endParaRPr>
+                </a:p>
+              </p:txBody>
+            </p:sp>
+            <p:sp>
+              <p:nvSpPr>
+                <p:cNvPr id="98" name="矩形: 圓角 97">
+                  <a:extLst>
+                    <a:ext uri="{FF2B5EF4-FFF2-40B4-BE49-F238E27FC236}">
+                      <a16:creationId xmlns:a16="http://schemas.microsoft.com/office/drawing/2014/main" id="{5C205CF1-35BB-473E-96F8-86F708DE602E}"/>
+                    </a:ext>
+                  </a:extLst>
+                </p:cNvPr>
+                <p:cNvSpPr/>
+                <p:nvPr/>
+              </p:nvSpPr>
+              <p:spPr>
+                <a:xfrm>
+                  <a:off x="2043627" y="2355021"/>
+                  <a:ext cx="7763887" cy="1151081"/>
+                </a:xfrm>
+                <a:prstGeom prst="roundRect">
+                  <a:avLst>
+                    <a:gd name="adj" fmla="val 4048"/>
+                  </a:avLst>
+                </a:prstGeom>
+                <a:gradFill flip="none" rotWithShape="1">
+                  <a:gsLst>
+                    <a:gs pos="0">
+                      <a:schemeClr val="bg1">
+                        <a:lumMod val="85000"/>
+                      </a:schemeClr>
+                    </a:gs>
+                    <a:gs pos="100000">
+                      <a:schemeClr val="bg1">
+                        <a:lumMod val="95000"/>
+                      </a:schemeClr>
+                    </a:gs>
+                  </a:gsLst>
+                  <a:lin ang="16200000" scaled="1"/>
+                  <a:tileRect/>
+                </a:gradFill>
+                <a:ln>
+                  <a:noFill/>
+                </a:ln>
+              </p:spPr>
+              <p:style>
+                <a:lnRef idx="0">
+                  <a:schemeClr val="accent3"/>
+                </a:lnRef>
+                <a:fillRef idx="3">
+                  <a:schemeClr val="accent3"/>
+                </a:fillRef>
+                <a:effectRef idx="3">
+                  <a:schemeClr val="accent3"/>
+                </a:effectRef>
+                <a:fontRef idx="minor">
+                  <a:schemeClr val="lt1"/>
+                </a:fontRef>
+              </p:style>
+              <p:txBody>
+                <a:bodyPr rot="0" spcFirstLastPara="0" vertOverflow="overflow" horzOverflow="overflow" vert="horz" wrap="square" lIns="37158" tIns="18579" rIns="37158" bIns="18579" numCol="1" spcCol="0" rtlCol="0" fromWordArt="0" anchor="ctr" anchorCtr="0" forceAA="0" compatLnSpc="1">
+                  <a:prstTxWarp prst="textNoShape">
+                    <a:avLst/>
+                  </a:prstTxWarp>
+                  <a:noAutofit/>
+                </a:bodyPr>
+                <a:lstStyle/>
+                <a:p>
+                  <a:pPr algn="ctr"/>
+                  <a:endParaRPr lang="zh-TW" altLang="en-US" sz="731" dirty="0">
+                    <a:latin typeface="Times New Roman" panose="02020603050405020304" pitchFamily="18" charset="0"/>
+                    <a:cs typeface="Times New Roman" panose="02020603050405020304" pitchFamily="18" charset="0"/>
+                  </a:endParaRPr>
+                </a:p>
+              </p:txBody>
+            </p:sp>
+            <mc:AlternateContent xmlns:mc="http://schemas.openxmlformats.org/markup-compatibility/2006" xmlns:a14="http://schemas.microsoft.com/office/drawing/2010/main">
+              <mc:Choice Requires="a14">
+                <p:sp>
+                  <p:nvSpPr>
+                    <p:cNvPr id="47" name="文字方塊 46">
+                      <a:extLst>
+                        <a:ext uri="{FF2B5EF4-FFF2-40B4-BE49-F238E27FC236}">
+                          <a16:creationId xmlns:a16="http://schemas.microsoft.com/office/drawing/2014/main" id="{15691A11-45C0-4F72-8C42-876060437EB5}"/>
+                        </a:ext>
+                      </a:extLst>
+                    </p:cNvPr>
+                    <p:cNvSpPr txBox="1"/>
+                    <p:nvPr/>
+                  </p:nvSpPr>
+                  <p:spPr>
+                    <a:xfrm>
+                      <a:off x="1958304" y="5052180"/>
+                      <a:ext cx="707500" cy="338554"/>
+                    </a:xfrm>
+                    <a:prstGeom prst="rect">
+                      <a:avLst/>
+                    </a:prstGeom>
+                    <a:noFill/>
+                  </p:spPr>
+                  <p:txBody>
+                    <a:bodyPr wrap="square" rtlCol="0">
+                      <a:spAutoFit/>
+                    </a:bodyPr>
+                    <a:lstStyle/>
+                    <a:p>
+                      <a:pPr algn="ctr"/>
+                      <a14:m>
+                        <m:oMath xmlns:m="http://schemas.openxmlformats.org/officeDocument/2006/math">
+                          <m:r>
+                            <a:rPr lang="en-US" altLang="zh-TW" sz="1600" i="1">
+                              <a:latin typeface="Cambria Math" panose="02040503050406030204" pitchFamily="18" charset="0"/>
+                            </a:rPr>
+                            <m:t>𝜋</m:t>
+                          </m:r>
+                        </m:oMath>
+                      </a14:m>
+                      <a:r>
+                        <a:rPr lang="zh-TW" altLang="en-US" sz="1600" dirty="0">
+                          <a:latin typeface="Times New Roman" panose="02020603050405020304" pitchFamily="18" charset="0"/>
+                          <a:cs typeface="Times New Roman" panose="02020603050405020304" pitchFamily="18" charset="0"/>
+                        </a:rPr>
+                        <a:t> </a:t>
+                      </a:r>
+                    </a:p>
+                  </p:txBody>
+                </p:sp>
+              </mc:Choice>
+              <mc:Fallback xmlns="">
+                <p:sp>
+                  <p:nvSpPr>
+                    <p:cNvPr id="47" name="文字方塊 46">
+                      <a:extLst>
+                        <a:ext uri="{FF2B5EF4-FFF2-40B4-BE49-F238E27FC236}">
+                          <a16:creationId xmlns:a16="http://schemas.microsoft.com/office/drawing/2014/main" id="{15691A11-45C0-4F72-8C42-876060437EB5}"/>
+                        </a:ext>
+                      </a:extLst>
+                    </p:cNvPr>
+                    <p:cNvSpPr txBox="1">
+                      <a:spLocks noRot="1" noChangeAspect="1" noMove="1" noResize="1" noEditPoints="1" noAdjustHandles="1" noChangeArrowheads="1" noChangeShapeType="1" noTextEdit="1"/>
+                    </p:cNvSpPr>
+                    <p:nvPr/>
+                  </p:nvSpPr>
+                  <p:spPr>
+                    <a:xfrm>
+                      <a:off x="1958304" y="5052180"/>
+                      <a:ext cx="707500" cy="338554"/>
+                    </a:xfrm>
+                    <a:prstGeom prst="rect">
+                      <a:avLst/>
+                    </a:prstGeom>
+                    <a:blipFill>
+                      <a:blip r:embed="rId14"/>
+                      <a:stretch>
+                        <a:fillRect/>
+                      </a:stretch>
+                    </a:blipFill>
+                  </p:spPr>
+                  <p:txBody>
+                    <a:bodyPr/>
+                    <a:lstStyle/>
+                    <a:p>
+                      <a:r>
+                        <a:rPr lang="zh-TW" altLang="en-US">
+                          <a:noFill/>
+                        </a:rPr>
+                        <a:t> </a:t>
+                      </a:r>
+                    </a:p>
+                  </p:txBody>
+                </p:sp>
+              </mc:Fallback>
+            </mc:AlternateContent>
+            <mc:AlternateContent xmlns:mc="http://schemas.openxmlformats.org/markup-compatibility/2006" xmlns:a14="http://schemas.microsoft.com/office/drawing/2010/main">
+              <mc:Choice Requires="a14">
+                <p:sp>
+                  <p:nvSpPr>
+                    <p:cNvPr id="48" name="文字方塊 47">
+                      <a:extLst>
+                        <a:ext uri="{FF2B5EF4-FFF2-40B4-BE49-F238E27FC236}">
+                          <a16:creationId xmlns:a16="http://schemas.microsoft.com/office/drawing/2014/main" id="{7E33DDEF-2F12-42EE-93FB-FD59888A6738}"/>
+                        </a:ext>
+                      </a:extLst>
+                    </p:cNvPr>
+                    <p:cNvSpPr txBox="1"/>
+                    <p:nvPr/>
+                  </p:nvSpPr>
+                  <p:spPr>
+                    <a:xfrm>
+                      <a:off x="1958304" y="2744983"/>
+                      <a:ext cx="707500" cy="338554"/>
+                    </a:xfrm>
+                    <a:prstGeom prst="rect">
+                      <a:avLst/>
+                    </a:prstGeom>
+                    <a:noFill/>
+                  </p:spPr>
+                  <p:txBody>
+                    <a:bodyPr wrap="square" rtlCol="0">
+                      <a:spAutoFit/>
+                    </a:bodyPr>
+                    <a:lstStyle/>
+                    <a:p>
+                      <a:pPr algn="ctr"/>
+                      <a14:m>
+                        <m:oMath xmlns:m="http://schemas.openxmlformats.org/officeDocument/2006/math">
+                          <m:r>
+                            <a:rPr lang="en-US" altLang="zh-TW" sz="1600" i="1">
+                              <a:latin typeface="Cambria Math" panose="02040503050406030204" pitchFamily="18" charset="0"/>
+                            </a:rPr>
+                            <m:t>0</m:t>
+                          </m:r>
+                        </m:oMath>
+                      </a14:m>
+                      <a:r>
+                        <a:rPr lang="zh-TW" altLang="en-US" sz="1600" dirty="0">
+                          <a:latin typeface="Times New Roman" panose="02020603050405020304" pitchFamily="18" charset="0"/>
+                          <a:cs typeface="Times New Roman" panose="02020603050405020304" pitchFamily="18" charset="0"/>
+                        </a:rPr>
+                        <a:t> </a:t>
+                      </a:r>
+                    </a:p>
+                  </p:txBody>
+                </p:sp>
+              </mc:Choice>
+              <mc:Fallback xmlns="">
+                <p:sp>
+                  <p:nvSpPr>
+                    <p:cNvPr id="48" name="文字方塊 47">
+                      <a:extLst>
+                        <a:ext uri="{FF2B5EF4-FFF2-40B4-BE49-F238E27FC236}">
+                          <a16:creationId xmlns:a16="http://schemas.microsoft.com/office/drawing/2014/main" id="{7E33DDEF-2F12-42EE-93FB-FD59888A6738}"/>
+                        </a:ext>
+                      </a:extLst>
+                    </p:cNvPr>
+                    <p:cNvSpPr txBox="1">
+                      <a:spLocks noRot="1" noChangeAspect="1" noMove="1" noResize="1" noEditPoints="1" noAdjustHandles="1" noChangeArrowheads="1" noChangeShapeType="1" noTextEdit="1"/>
+                    </p:cNvSpPr>
+                    <p:nvPr/>
+                  </p:nvSpPr>
+                  <p:spPr>
+                    <a:xfrm>
+                      <a:off x="1958304" y="2744983"/>
+                      <a:ext cx="707500" cy="338554"/>
+                    </a:xfrm>
+                    <a:prstGeom prst="rect">
+                      <a:avLst/>
+                    </a:prstGeom>
+                    <a:blipFill>
+                      <a:blip r:embed="rId15"/>
+                      <a:stretch>
+                        <a:fillRect/>
+                      </a:stretch>
+                    </a:blipFill>
+                  </p:spPr>
+                  <p:txBody>
+                    <a:bodyPr/>
+                    <a:lstStyle/>
+                    <a:p>
+                      <a:r>
+                        <a:rPr lang="zh-TW" altLang="en-US">
+                          <a:noFill/>
+                        </a:rPr>
+                        <a:t> </a:t>
+                      </a:r>
+                    </a:p>
+                  </p:txBody>
+                </p:sp>
+              </mc:Fallback>
+            </mc:AlternateContent>
+            <mc:AlternateContent xmlns:mc="http://schemas.openxmlformats.org/markup-compatibility/2006" xmlns:a14="http://schemas.microsoft.com/office/drawing/2010/main">
+              <mc:Choice Requires="a14">
+                <p:sp>
+                  <p:nvSpPr>
+                    <p:cNvPr id="49" name="文字方塊 48">
+                      <a:extLst>
+                        <a:ext uri="{FF2B5EF4-FFF2-40B4-BE49-F238E27FC236}">
+                          <a16:creationId xmlns:a16="http://schemas.microsoft.com/office/drawing/2014/main" id="{C33442D0-2642-4711-B00F-F6CC385BC9F8}"/>
+                        </a:ext>
+                      </a:extLst>
+                    </p:cNvPr>
+                    <p:cNvSpPr txBox="1"/>
+                    <p:nvPr/>
+                  </p:nvSpPr>
+                  <p:spPr>
+                    <a:xfrm>
+                      <a:off x="1848481" y="3898582"/>
+                      <a:ext cx="927146" cy="338554"/>
+                    </a:xfrm>
+                    <a:prstGeom prst="rect">
+                      <a:avLst/>
+                    </a:prstGeom>
+                    <a:noFill/>
+                  </p:spPr>
+                  <p:txBody>
+                    <a:bodyPr wrap="square" rtlCol="0">
+                      <a:spAutoFit/>
+                    </a:bodyPr>
+                    <a:lstStyle/>
+                    <a:p>
+                      <a:pPr algn="ctr"/>
+                      <a14:m>
+                        <m:oMath xmlns:m="http://schemas.openxmlformats.org/officeDocument/2006/math">
+                          <m:r>
+                            <a:rPr lang="en-US" altLang="zh-TW" sz="1600" i="1">
+                              <a:latin typeface="Cambria Math" panose="02040503050406030204" pitchFamily="18" charset="0"/>
+                            </a:rPr>
+                            <m:t>𝜋</m:t>
+                          </m:r>
+                          <m:r>
+                            <a:rPr lang="en-US" altLang="zh-TW" sz="1600" i="1">
+                              <a:latin typeface="Cambria Math" panose="02040503050406030204" pitchFamily="18" charset="0"/>
+                            </a:rPr>
+                            <m:t>/2</m:t>
+                          </m:r>
+                        </m:oMath>
+                      </a14:m>
+                      <a:r>
+                        <a:rPr lang="zh-TW" altLang="en-US" sz="1600" dirty="0">
+                          <a:latin typeface="Times New Roman" panose="02020603050405020304" pitchFamily="18" charset="0"/>
+                          <a:cs typeface="Times New Roman" panose="02020603050405020304" pitchFamily="18" charset="0"/>
+                        </a:rPr>
+                        <a:t> </a:t>
+                      </a:r>
+                    </a:p>
+                  </p:txBody>
+                </p:sp>
+              </mc:Choice>
+              <mc:Fallback xmlns="">
+                <p:sp>
+                  <p:nvSpPr>
+                    <p:cNvPr id="49" name="文字方塊 48">
+                      <a:extLst>
+                        <a:ext uri="{FF2B5EF4-FFF2-40B4-BE49-F238E27FC236}">
+                          <a16:creationId xmlns:a16="http://schemas.microsoft.com/office/drawing/2014/main" id="{C33442D0-2642-4711-B00F-F6CC385BC9F8}"/>
+                        </a:ext>
+                      </a:extLst>
+                    </p:cNvPr>
+                    <p:cNvSpPr txBox="1">
+                      <a:spLocks noRot="1" noChangeAspect="1" noMove="1" noResize="1" noEditPoints="1" noAdjustHandles="1" noChangeArrowheads="1" noChangeShapeType="1" noTextEdit="1"/>
+                    </p:cNvSpPr>
+                    <p:nvPr/>
+                  </p:nvSpPr>
+                  <p:spPr>
+                    <a:xfrm>
+                      <a:off x="1848481" y="3898582"/>
+                      <a:ext cx="927146" cy="338554"/>
+                    </a:xfrm>
+                    <a:prstGeom prst="rect">
+                      <a:avLst/>
+                    </a:prstGeom>
+                    <a:blipFill>
+                      <a:blip r:embed="rId16"/>
+                      <a:stretch>
+                        <a:fillRect b="-8772"/>
+                      </a:stretch>
+                    </a:blipFill>
+                  </p:spPr>
+                  <p:txBody>
+                    <a:bodyPr/>
+                    <a:lstStyle/>
+                    <a:p>
+                      <a:r>
+                        <a:rPr lang="zh-TW" altLang="en-US">
+                          <a:noFill/>
+                        </a:rPr>
+                        <a:t> </a:t>
+                      </a:r>
+                    </a:p>
+                  </p:txBody>
+                </p:sp>
+              </mc:Fallback>
+            </mc:AlternateContent>
+            <p:pic>
+              <p:nvPicPr>
+                <p:cNvPr id="96" name="圖片 95">
+                  <a:extLst>
+                    <a:ext uri="{FF2B5EF4-FFF2-40B4-BE49-F238E27FC236}">
+                      <a16:creationId xmlns:a16="http://schemas.microsoft.com/office/drawing/2014/main" id="{581EBD39-1713-4B01-8D6F-F0A0F903D163}"/>
+                    </a:ext>
+                  </a:extLst>
+                </p:cNvPr>
+                <p:cNvPicPr>
+                  <a:picLocks noChangeAspect="1"/>
+                </p:cNvPicPr>
+                <p:nvPr/>
+              </p:nvPicPr>
+              <p:blipFill>
+                <a:blip r:embed="rId17">
+                  <a:extLst>
+                    <a:ext uri="{28A0092B-C50C-407E-A947-70E740481C1C}">
+                      <a14:useLocalDpi xmlns:a14="http://schemas.microsoft.com/office/drawing/2010/main" val="0"/>
+                    </a:ext>
+                  </a:extLst>
+                </a:blip>
+                <a:stretch>
+                  <a:fillRect/>
+                </a:stretch>
+              </p:blipFill>
+              <p:spPr>
+                <a:xfrm>
+                  <a:off x="2478723" y="2270706"/>
+                  <a:ext cx="7364792" cy="3682396"/>
+                </a:xfrm>
+                <a:prstGeom prst="rect">
+                  <a:avLst/>
+                </a:prstGeom>
+              </p:spPr>
+            </p:pic>
+          </p:grpSp>
+          <mc:AlternateContent xmlns:mc="http://schemas.openxmlformats.org/markup-compatibility/2006" xmlns:a14="http://schemas.microsoft.com/office/drawing/2010/main">
+            <mc:Choice Requires="a14">
+              <p:sp>
+                <p:nvSpPr>
+                  <p:cNvPr id="43" name="文字方塊 42">
+                    <a:extLst>
+                      <a:ext uri="{FF2B5EF4-FFF2-40B4-BE49-F238E27FC236}">
+                        <a16:creationId xmlns:a16="http://schemas.microsoft.com/office/drawing/2014/main" id="{66D7E432-829E-4FA4-A6C7-DECCE799C731}"/>
+                      </a:ext>
+                    </a:extLst>
+                  </p:cNvPr>
+                  <p:cNvSpPr txBox="1"/>
+                  <p:nvPr/>
+                </p:nvSpPr>
+                <p:spPr>
+                  <a:xfrm rot="16200000">
+                    <a:off x="2227528" y="5462668"/>
+                    <a:ext cx="452829" cy="338554"/>
+                  </a:xfrm>
+                  <a:prstGeom prst="rect">
+                    <a:avLst/>
+                  </a:prstGeom>
+                  <a:noFill/>
+                </p:spPr>
+                <p:txBody>
+                  <a:bodyPr wrap="square" rtlCol="0">
+                    <a:spAutoFit/>
+                  </a:bodyPr>
+                  <a:lstStyle/>
+                  <a:p>
+                    <a:pPr/>
+                    <a14:m>
+                      <m:oMathPara xmlns:m="http://schemas.openxmlformats.org/officeDocument/2006/math">
+                        <m:oMathParaPr>
+                          <m:jc m:val="centerGroup"/>
+                        </m:oMathParaPr>
+                        <m:oMath xmlns:m="http://schemas.openxmlformats.org/officeDocument/2006/math">
+                          <m:r>
+                            <m:rPr>
+                              <m:sty m:val="p"/>
+                            </m:rPr>
+                            <a:rPr lang="en-US" altLang="zh-TW" sz="1600">
+                              <a:latin typeface="Cambria Math" panose="02040503050406030204" pitchFamily="18" charset="0"/>
+                            </a:rPr>
+                            <m:t>a</m:t>
+                          </m:r>
+                          <m:r>
+                            <a:rPr lang="en-US" altLang="zh-TW" sz="1600">
+                              <a:latin typeface="Cambria Math" panose="02040503050406030204" pitchFamily="18" charset="0"/>
+                            </a:rPr>
+                            <m:t>.</m:t>
+                          </m:r>
+                          <m:r>
+                            <m:rPr>
+                              <m:sty m:val="p"/>
+                            </m:rPr>
+                            <a:rPr lang="en-US" altLang="zh-TW" sz="1600">
+                              <a:latin typeface="Cambria Math" panose="02040503050406030204" pitchFamily="18" charset="0"/>
+                            </a:rPr>
+                            <m:t>u</m:t>
+                          </m:r>
+                          <m:r>
+                            <a:rPr lang="en-US" altLang="zh-TW" sz="1600">
+                              <a:latin typeface="Cambria Math" panose="02040503050406030204" pitchFamily="18" charset="0"/>
+                            </a:rPr>
+                            <m:t>.</m:t>
+                          </m:r>
+                        </m:oMath>
+                      </m:oMathPara>
+                    </a14:m>
+                    <a:endParaRPr lang="zh-TW" altLang="en-US" sz="1600" dirty="0">
+                      <a:latin typeface="Times New Roman" panose="02020603050405020304" pitchFamily="18" charset="0"/>
+                      <a:cs typeface="Times New Roman" panose="02020603050405020304" pitchFamily="18" charset="0"/>
+                    </a:endParaRPr>
+                  </a:p>
+                </p:txBody>
+              </p:sp>
+            </mc:Choice>
+            <mc:Fallback xmlns="">
+              <p:sp>
+                <p:nvSpPr>
+                  <p:cNvPr id="43" name="文字方塊 42">
+                    <a:extLst>
+                      <a:ext uri="{FF2B5EF4-FFF2-40B4-BE49-F238E27FC236}">
+                        <a16:creationId xmlns:a16="http://schemas.microsoft.com/office/drawing/2014/main" id="{66D7E432-829E-4FA4-A6C7-DECCE799C731}"/>
+                      </a:ext>
+                    </a:extLst>
+                  </p:cNvPr>
+                  <p:cNvSpPr txBox="1">
+                    <a:spLocks noRot="1" noChangeAspect="1" noMove="1" noResize="1" noEditPoints="1" noAdjustHandles="1" noChangeArrowheads="1" noChangeShapeType="1" noTextEdit="1"/>
+                  </p:cNvSpPr>
+                  <p:nvPr/>
+                </p:nvSpPr>
+                <p:spPr>
+                  <a:xfrm rot="16200000">
+                    <a:off x="2227528" y="5462668"/>
+                    <a:ext cx="452829" cy="338554"/>
+                  </a:xfrm>
+                  <a:prstGeom prst="rect">
+                    <a:avLst/>
+                  </a:prstGeom>
+                  <a:blipFill>
+                    <a:blip r:embed="rId18"/>
+                    <a:stretch>
+                      <a:fillRect/>
+                    </a:stretch>
+                  </a:blipFill>
+                </p:spPr>
+                <p:txBody>
+                  <a:bodyPr/>
+                  <a:lstStyle/>
+                  <a:p>
+                    <a:r>
+                      <a:rPr lang="zh-TW" altLang="en-US">
+                        <a:noFill/>
+                      </a:rPr>
+                      <a:t> </a:t>
+                    </a:r>
+                  </a:p>
+                </p:txBody>
+              </p:sp>
+            </mc:Fallback>
+          </mc:AlternateContent>
+        </p:grpSp>
+        <mc:AlternateContent xmlns:mc="http://schemas.openxmlformats.org/markup-compatibility/2006" xmlns:a14="http://schemas.microsoft.com/office/drawing/2010/main">
+          <mc:Choice Requires="a14">
+            <p:sp>
+              <p:nvSpPr>
+                <p:cNvPr id="71" name="矩形 70">
+                  <a:extLst>
+                    <a:ext uri="{FF2B5EF4-FFF2-40B4-BE49-F238E27FC236}">
+                      <a16:creationId xmlns:a16="http://schemas.microsoft.com/office/drawing/2014/main" id="{7FAB7778-888A-4D13-B0E9-C2EA22859D0C}"/>
+                    </a:ext>
+                  </a:extLst>
+                </p:cNvPr>
+                <p:cNvSpPr/>
+                <p:nvPr/>
+              </p:nvSpPr>
+              <p:spPr>
+                <a:xfrm>
+                  <a:off x="128857" y="2047947"/>
+                  <a:ext cx="1920520" cy="400110"/>
+                </a:xfrm>
+                <a:prstGeom prst="rect">
+                  <a:avLst/>
+                </a:prstGeom>
+              </p:spPr>
+              <p:style>
+                <a:lnRef idx="0">
+                  <a:schemeClr val="accent2"/>
+                </a:lnRef>
+                <a:fillRef idx="3">
+                  <a:schemeClr val="accent2"/>
+                </a:fillRef>
+                <a:effectRef idx="3">
+                  <a:schemeClr val="accent2"/>
+                </a:effectRef>
+                <a:fontRef idx="minor">
+                  <a:schemeClr val="lt1"/>
+                </a:fontRef>
+              </p:style>
+              <p:txBody>
+                <a:bodyPr wrap="square">
+                  <a:spAutoFit/>
+                </a:bodyPr>
+                <a:lstStyle/>
+                <a:p>
+                  <a:pPr algn="ctr"/>
+                  <a:r>
+                    <a:rPr lang="en-US" altLang="zh-TW" sz="2000" dirty="0">
+                      <a:solidFill>
+                        <a:schemeClr val="tx1"/>
+                      </a:solidFill>
+                      <a:latin typeface="Times New Roman" panose="02020603050405020304" pitchFamily="18" charset="0"/>
+                      <a:cs typeface="Times New Roman" panose="02020603050405020304" pitchFamily="18" charset="0"/>
+                    </a:rPr>
+                    <a:t>At equator, </a:t>
+                  </a:r>
+                  <a14:m>
                     <m:oMath xmlns:m="http://schemas.openxmlformats.org/officeDocument/2006/math">
                       <m:r>
-                        <a:rPr lang="en-US" altLang="zh-TW" i="1">
+                        <a:rPr lang="en-US" altLang="zh-TW" sz="2000" i="1">
                           <a:solidFill>
                             <a:schemeClr val="tx1"/>
                           </a:solidFill>
                           <a:latin typeface="Cambria Math" panose="02040503050406030204" pitchFamily="18" charset="0"/>
                         </a:rPr>
-                        <m:t>𝛽</m:t>
+                        <m:t>𝛼</m:t>
                       </m:r>
                       <m:r>
-                        <a:rPr lang="en-US" altLang="zh-TW" i="1">
+                        <a:rPr lang="en-US" altLang="zh-TW" sz="2000">
                           <a:solidFill>
                             <a:schemeClr val="tx1"/>
                           </a:solidFill>
@@ -9206,241 +9306,59 @@
                         </a:rPr>
                         <m:t>=</m:t>
                       </m:r>
-                      <m:r>
-                        <a:rPr lang="en-US" altLang="zh-TW" i="1">
-                          <a:solidFill>
-                            <a:schemeClr val="tx1"/>
-                          </a:solidFill>
-                          <a:latin typeface="Cambria Math" panose="02040503050406030204" pitchFamily="18" charset="0"/>
-                        </a:rPr>
-                        <m:t>𝜋</m:t>
-                      </m:r>
-                      <m:r>
-                        <a:rPr lang="en-US" altLang="zh-TW" i="1">
-                          <a:solidFill>
-                            <a:schemeClr val="tx1"/>
-                          </a:solidFill>
-                          <a:latin typeface="Cambria Math" panose="02040503050406030204" pitchFamily="18" charset="0"/>
-                        </a:rPr>
-                        <m:t>/2</m:t>
-                      </m:r>
                     </m:oMath>
-                  </m:oMathPara>
-                </a14:m>
-                <a:endParaRPr lang="zh-TW" altLang="en-US" dirty="0">
-                  <a:solidFill>
-                    <a:schemeClr val="tx1"/>
-                  </a:solidFill>
-                </a:endParaRPr>
-              </a:p>
-            </p:txBody>
-          </p:sp>
-        </mc:Choice>
-        <mc:Fallback xmlns="">
-          <p:sp>
-            <p:nvSpPr>
-              <p:cNvPr id="71" name="矩形 70">
-                <a:extLst>
-                  <a:ext uri="{FF2B5EF4-FFF2-40B4-BE49-F238E27FC236}">
-                    <a16:creationId xmlns:a16="http://schemas.microsoft.com/office/drawing/2014/main" id="{7FAB7778-888A-4D13-B0E9-C2EA22859D0C}"/>
-                  </a:ext>
-                </a:extLst>
-              </p:cNvPr>
-              <p:cNvSpPr>
-                <a:spLocks noRot="1" noChangeAspect="1" noMove="1" noResize="1" noEditPoints="1" noAdjustHandles="1" noChangeArrowheads="1" noChangeShapeType="1" noTextEdit="1"/>
-              </p:cNvSpPr>
-              <p:nvPr/>
-            </p:nvSpPr>
-            <p:spPr>
-              <a:xfrm>
-                <a:off x="2604152" y="3484217"/>
-                <a:ext cx="1319592" cy="646331"/>
-              </a:xfrm>
-              <a:prstGeom prst="rect">
-                <a:avLst/>
-              </a:prstGeom>
-              <a:blipFill>
-                <a:blip r:embed="rId20"/>
-                <a:stretch>
-                  <a:fillRect/>
-                </a:stretch>
-              </a:blipFill>
-            </p:spPr>
-            <p:txBody>
-              <a:bodyPr/>
-              <a:lstStyle/>
-              <a:p>
-                <a:r>
-                  <a:rPr lang="zh-TW" altLang="en-US">
-                    <a:noFill/>
-                  </a:rPr>
-                  <a:t> </a:t>
-                </a:r>
-              </a:p>
-            </p:txBody>
-          </p:sp>
-        </mc:Fallback>
-      </mc:AlternateContent>
-      <p:pic>
-        <p:nvPicPr>
-          <p:cNvPr id="15" name="圖片 14">
-            <a:extLst>
-              <a:ext uri="{FF2B5EF4-FFF2-40B4-BE49-F238E27FC236}">
-                <a16:creationId xmlns:a16="http://schemas.microsoft.com/office/drawing/2014/main" id="{E7BF89E2-EF27-4960-B7B8-16EBBB95670C}"/>
-              </a:ext>
-            </a:extLst>
-          </p:cNvPr>
-          <p:cNvPicPr>
-            <a:picLocks noChangeAspect="1"/>
-          </p:cNvPicPr>
-          <p:nvPr/>
-        </p:nvPicPr>
-        <p:blipFill rotWithShape="1">
-          <a:blip r:embed="rId21">
-            <a:clrChange>
-              <a:clrFrom>
-                <a:srgbClr val="FFFFFF"/>
-              </a:clrFrom>
-              <a:clrTo>
-                <a:srgbClr val="FFFFFF">
-                  <a:alpha val="0"/>
-                </a:srgbClr>
-              </a:clrTo>
-            </a:clrChange>
-          </a:blip>
-          <a:srcRect b="80007"/>
-          <a:stretch/>
-        </p:blipFill>
-        <p:spPr>
-          <a:xfrm>
-            <a:off x="6349396" y="205827"/>
-            <a:ext cx="1299468" cy="494616"/>
-          </a:xfrm>
-          <a:prstGeom prst="rect">
-            <a:avLst/>
-          </a:prstGeom>
-        </p:spPr>
-      </p:pic>
-      <p:pic>
-        <p:nvPicPr>
-          <p:cNvPr id="72" name="圖片 71">
-            <a:extLst>
-              <a:ext uri="{FF2B5EF4-FFF2-40B4-BE49-F238E27FC236}">
-                <a16:creationId xmlns:a16="http://schemas.microsoft.com/office/drawing/2014/main" id="{266DB175-C593-4AF8-8610-4FC2DB6102F0}"/>
-              </a:ext>
-            </a:extLst>
-          </p:cNvPr>
-          <p:cNvPicPr>
-            <a:picLocks noChangeAspect="1"/>
-          </p:cNvPicPr>
-          <p:nvPr/>
-        </p:nvPicPr>
-        <p:blipFill rotWithShape="1">
-          <a:blip r:embed="rId21">
-            <a:clrChange>
-              <a:clrFrom>
-                <a:srgbClr val="FFFFFF"/>
-              </a:clrFrom>
-              <a:clrTo>
-                <a:srgbClr val="FFFFFF">
-                  <a:alpha val="0"/>
-                </a:srgbClr>
-              </a:clrTo>
-            </a:clrChange>
-          </a:blip>
-          <a:srcRect t="26340" b="54309"/>
-          <a:stretch/>
-        </p:blipFill>
-        <p:spPr>
-          <a:xfrm>
-            <a:off x="8644611" y="178128"/>
-            <a:ext cx="1299468" cy="478746"/>
-          </a:xfrm>
-          <a:prstGeom prst="rect">
-            <a:avLst/>
-          </a:prstGeom>
-        </p:spPr>
-      </p:pic>
-      <p:pic>
-        <p:nvPicPr>
-          <p:cNvPr id="73" name="圖片 72">
-            <a:extLst>
-              <a:ext uri="{FF2B5EF4-FFF2-40B4-BE49-F238E27FC236}">
-                <a16:creationId xmlns:a16="http://schemas.microsoft.com/office/drawing/2014/main" id="{1886C92E-A6D5-43FE-89DB-39A2E29192E0}"/>
-              </a:ext>
-            </a:extLst>
-          </p:cNvPr>
-          <p:cNvPicPr>
-            <a:picLocks noChangeAspect="1"/>
-          </p:cNvPicPr>
-          <p:nvPr/>
-        </p:nvPicPr>
-        <p:blipFill rotWithShape="1">
-          <a:blip r:embed="rId21">
-            <a:clrChange>
-              <a:clrFrom>
-                <a:srgbClr val="FFFFFF"/>
-              </a:clrFrom>
-              <a:clrTo>
-                <a:srgbClr val="FFFFFF">
-                  <a:alpha val="0"/>
-                </a:srgbClr>
-              </a:clrTo>
-            </a:clrChange>
-          </a:blip>
-          <a:srcRect t="52461" b="26415"/>
-          <a:stretch/>
-        </p:blipFill>
-        <p:spPr>
-          <a:xfrm>
-            <a:off x="10985755" y="194176"/>
-            <a:ext cx="1299468" cy="522606"/>
-          </a:xfrm>
-          <a:prstGeom prst="rect">
-            <a:avLst/>
-          </a:prstGeom>
-        </p:spPr>
-      </p:pic>
-      <p:pic>
-        <p:nvPicPr>
-          <p:cNvPr id="74" name="圖片 73">
-            <a:extLst>
-              <a:ext uri="{FF2B5EF4-FFF2-40B4-BE49-F238E27FC236}">
-                <a16:creationId xmlns:a16="http://schemas.microsoft.com/office/drawing/2014/main" id="{93EE4156-B7D9-481C-918A-372D6376C75C}"/>
-              </a:ext>
-            </a:extLst>
-          </p:cNvPr>
-          <p:cNvPicPr>
-            <a:picLocks noChangeAspect="1"/>
-          </p:cNvPicPr>
-          <p:nvPr/>
-        </p:nvPicPr>
-        <p:blipFill rotWithShape="1">
-          <a:blip r:embed="rId21">
-            <a:clrChange>
-              <a:clrFrom>
-                <a:srgbClr val="FFFFFF"/>
-              </a:clrFrom>
-              <a:clrTo>
-                <a:srgbClr val="FFFFFF">
-                  <a:alpha val="0"/>
-                </a:srgbClr>
-              </a:clrTo>
-            </a:clrChange>
-          </a:blip>
-          <a:srcRect t="79036"/>
-          <a:stretch/>
-        </p:blipFill>
-        <p:spPr>
-          <a:xfrm>
-            <a:off x="13290292" y="177745"/>
-            <a:ext cx="1299468" cy="518656"/>
-          </a:xfrm>
-          <a:prstGeom prst="rect">
-            <a:avLst/>
-          </a:prstGeom>
-        </p:spPr>
-      </p:pic>
+                  </a14:m>
+                  <a:endParaRPr lang="zh-TW" altLang="en-US" sz="2000" dirty="0"/>
+                </a:p>
+              </p:txBody>
+            </p:sp>
+          </mc:Choice>
+          <mc:Fallback xmlns="">
+            <p:sp>
+              <p:nvSpPr>
+                <p:cNvPr id="71" name="矩形 70">
+                  <a:extLst>
+                    <a:ext uri="{FF2B5EF4-FFF2-40B4-BE49-F238E27FC236}">
+                      <a16:creationId xmlns:a16="http://schemas.microsoft.com/office/drawing/2014/main" id="{7FAB7778-888A-4D13-B0E9-C2EA22859D0C}"/>
+                    </a:ext>
+                  </a:extLst>
+                </p:cNvPr>
+                <p:cNvSpPr>
+                  <a:spLocks noRot="1" noChangeAspect="1" noMove="1" noResize="1" noEditPoints="1" noAdjustHandles="1" noChangeArrowheads="1" noChangeShapeType="1" noTextEdit="1"/>
+                </p:cNvSpPr>
+                <p:nvPr/>
+              </p:nvSpPr>
+              <p:spPr>
+                <a:xfrm>
+                  <a:off x="128857" y="2047947"/>
+                  <a:ext cx="1920520" cy="400110"/>
+                </a:xfrm>
+                <a:prstGeom prst="rect">
+                  <a:avLst/>
+                </a:prstGeom>
+                <a:blipFill>
+                  <a:blip r:embed="rId19"/>
+                  <a:stretch>
+                    <a:fillRect/>
+                  </a:stretch>
+                </a:blipFill>
+              </p:spPr>
+              <p:txBody>
+                <a:bodyPr/>
+                <a:lstStyle/>
+                <a:p>
+                  <a:r>
+                    <a:rPr lang="zh-TW" altLang="en-US">
+                      <a:noFill/>
+                    </a:rPr>
+                    <a:t> </a:t>
+                  </a:r>
+                </a:p>
+              </p:txBody>
+            </p:sp>
+          </mc:Fallback>
+        </mc:AlternateContent>
+      </p:grpSp>
     </p:spTree>
     <p:extLst>
       <p:ext uri="{BB962C8B-B14F-4D97-AF65-F5344CB8AC3E}">
